--- a/Course Plan/PPts/Unit_3_Part_2.pptx
+++ b/Course Plan/PPts/Unit_3_Part_2.pptx
@@ -174,6 +174,14 @@
 </p:presentation>
 </file>
 
+<file path=ppt/revisionInfo.xml><?xml version="1.0" encoding="utf-8"?>
+<p1510:revInfo xmlns:a="http://schemas.openxmlformats.org/drawingml/2006/main" xmlns:r="http://schemas.openxmlformats.org/officeDocument/2006/relationships" xmlns:p1510="http://schemas.microsoft.com/office/powerpoint/2015/10/main">
+  <p1510:revLst>
+    <p1510:client id="{B54B5FAA-D75E-4F48-8200-917910A5A323}" v="4" dt="2026-05-04T05:59:12.701"/>
+  </p1510:revLst>
+</p1510:revInfo>
+</file>
+
 <file path=ppt/notesMasters/notesMaster1.xml><?xml version="1.0" encoding="utf-8"?>
 <p:notesMaster xmlns:a="http://schemas.openxmlformats.org/drawingml/2006/main" xmlns:r="http://schemas.openxmlformats.org/officeDocument/2006/relationships" xmlns:p="http://schemas.openxmlformats.org/presentationml/2006/main">
   <p:cSld>
@@ -256,7 +264,7 @@
           <a:p>
             <a:fld id="{2F4A91EB-9D04-4B2B-A8EC-C26057F35368}" type="datetimeFigureOut">
               <a:rPr lang="en-US" smtClean="0"/>
-              <a:t>3/16/2026</a:t>
+              <a:t>5/4/2026</a:t>
             </a:fld>
             <a:endParaRPr lang="en-US"/>
           </a:p>
@@ -320,38 +328,37 @@
           <a:p>
             <a:pPr lvl="0"/>
             <a:r>
-              <a:rPr lang="en-US" smtClean="0"/>
+              <a:rPr lang="en-US"/>
               <a:t>Edit Master text styles</a:t>
             </a:r>
           </a:p>
           <a:p>
             <a:pPr lvl="1"/>
             <a:r>
-              <a:rPr lang="en-US" smtClean="0"/>
+              <a:rPr lang="en-US"/>
               <a:t>Second level</a:t>
             </a:r>
           </a:p>
           <a:p>
             <a:pPr lvl="2"/>
             <a:r>
-              <a:rPr lang="en-US" smtClean="0"/>
+              <a:rPr lang="en-US"/>
               <a:t>Third level</a:t>
             </a:r>
           </a:p>
           <a:p>
             <a:pPr lvl="3"/>
             <a:r>
-              <a:rPr lang="en-US" smtClean="0"/>
+              <a:rPr lang="en-US"/>
               <a:t>Fourth level</a:t>
             </a:r>
           </a:p>
           <a:p>
             <a:pPr lvl="4"/>
             <a:r>
-              <a:rPr lang="en-US" smtClean="0"/>
+              <a:rPr lang="en-US"/>
               <a:t>Fifth level</a:t>
             </a:r>
-            <a:endParaRPr lang="en-US"/>
           </a:p>
         </p:txBody>
       </p:sp>
@@ -569,13 +576,13 @@
           <a:lstStyle/>
           <a:p>
             <a:r>
-              <a:rPr lang="en-US" dirty="0" smtClean="0"/>
+              <a:rPr lang="en-US" dirty="0"/>
               <a:t>https://www.w3resource.com/c-programming-exercises/linked_list/index.php</a:t>
             </a:r>
           </a:p>
           <a:p>
             <a:r>
-              <a:rPr lang="en-US" smtClean="0"/>
+              <a:rPr lang="en-US"/>
               <a:t>http://www.ggu.ac.in/download/IT/Inf%20Tech%20Pankaj%20Chandra%20B%20Tech%20%20IV%20Data%20Structure%20-%20Model%20Answer.pdf</a:t>
             </a:r>
           </a:p>
@@ -665,26 +672,382 @@
           <a:lstStyle/>
           <a:p>
             <a:r>
-              <a:rPr lang="en-US" dirty="0" err="1" smtClean="0"/>
+              <a:rPr lang="en-US" dirty="0"/>
+              <a:t>Output restricted</a:t>
+            </a:r>
+          </a:p>
+        </p:txBody>
+      </p:sp>
+      <p:sp>
+        <p:nvSpPr>
+          <p:cNvPr id="4" name="Slide Number Placeholder 3"/>
+          <p:cNvSpPr>
+            <a:spLocks noGrp="1"/>
+          </p:cNvSpPr>
+          <p:nvPr>
+            <p:ph type="sldNum" sz="quarter" idx="10"/>
+          </p:nvPr>
+        </p:nvSpPr>
+        <p:spPr/>
+        <p:txBody>
+          <a:bodyPr/>
+          <a:lstStyle/>
+          <a:p>
+            <a:fld id="{B0EAF083-6659-4761-8DBD-F9B281D98BC7}" type="slidenum">
+              <a:rPr lang="en-US" smtClean="0"/>
+              <a:t>26</a:t>
+            </a:fld>
+            <a:endParaRPr lang="en-US"/>
+          </a:p>
+        </p:txBody>
+      </p:sp>
+    </p:spTree>
+    <p:extLst>
+      <p:ext uri="{BB962C8B-B14F-4D97-AF65-F5344CB8AC3E}">
+        <p14:creationId xmlns:p14="http://schemas.microsoft.com/office/powerpoint/2010/main" val="2550171394"/>
+      </p:ext>
+    </p:extLst>
+  </p:cSld>
+  <p:clrMapOvr>
+    <a:masterClrMapping/>
+  </p:clrMapOvr>
+</p:notes>
+</file>
+
+<file path=ppt/notesSlides/notesSlide3.xml><?xml version="1.0" encoding="utf-8"?>
+<p:notes xmlns:a="http://schemas.openxmlformats.org/drawingml/2006/main" xmlns:r="http://schemas.openxmlformats.org/officeDocument/2006/relationships" xmlns:p="http://schemas.openxmlformats.org/presentationml/2006/main">
+  <p:cSld>
+    <p:spTree>
+      <p:nvGrpSpPr>
+        <p:cNvPr id="1" name=""/>
+        <p:cNvGrpSpPr/>
+        <p:nvPr/>
+      </p:nvGrpSpPr>
+      <p:grpSpPr>
+        <a:xfrm>
+          <a:off x="0" y="0"/>
+          <a:ext cx="0" cy="0"/>
+          <a:chOff x="0" y="0"/>
+          <a:chExt cx="0" cy="0"/>
+        </a:xfrm>
+      </p:grpSpPr>
+      <p:sp>
+        <p:nvSpPr>
+          <p:cNvPr id="2" name="Slide Image Placeholder 1"/>
+          <p:cNvSpPr>
+            <a:spLocks noGrp="1" noRot="1" noChangeAspect="1"/>
+          </p:cNvSpPr>
+          <p:nvPr>
+            <p:ph type="sldImg"/>
+          </p:nvPr>
+        </p:nvSpPr>
+        <p:spPr/>
+      </p:sp>
+      <p:sp>
+        <p:nvSpPr>
+          <p:cNvPr id="3" name="Notes Placeholder 2"/>
+          <p:cNvSpPr>
+            <a:spLocks noGrp="1"/>
+          </p:cNvSpPr>
+          <p:nvPr>
+            <p:ph type="body" idx="1"/>
+          </p:nvPr>
+        </p:nvSpPr>
+        <p:spPr/>
+        <p:txBody>
+          <a:bodyPr/>
+          <a:lstStyle/>
+          <a:p>
+            <a:r>
+              <a:rPr lang="en-US" dirty="0"/>
+              <a:t>Input restricted</a:t>
+            </a:r>
+          </a:p>
+        </p:txBody>
+      </p:sp>
+      <p:sp>
+        <p:nvSpPr>
+          <p:cNvPr id="4" name="Slide Number Placeholder 3"/>
+          <p:cNvSpPr>
+            <a:spLocks noGrp="1"/>
+          </p:cNvSpPr>
+          <p:nvPr>
+            <p:ph type="sldNum" sz="quarter" idx="10"/>
+          </p:nvPr>
+        </p:nvSpPr>
+        <p:spPr/>
+        <p:txBody>
+          <a:bodyPr/>
+          <a:lstStyle/>
+          <a:p>
+            <a:fld id="{B0EAF083-6659-4761-8DBD-F9B281D98BC7}" type="slidenum">
+              <a:rPr lang="en-US" smtClean="0"/>
+              <a:t>27</a:t>
+            </a:fld>
+            <a:endParaRPr lang="en-US"/>
+          </a:p>
+        </p:txBody>
+      </p:sp>
+    </p:spTree>
+    <p:extLst>
+      <p:ext uri="{BB962C8B-B14F-4D97-AF65-F5344CB8AC3E}">
+        <p14:creationId xmlns:p14="http://schemas.microsoft.com/office/powerpoint/2010/main" val="2514013306"/>
+      </p:ext>
+    </p:extLst>
+  </p:cSld>
+  <p:clrMapOvr>
+    <a:masterClrMapping/>
+  </p:clrMapOvr>
+</p:notes>
+</file>
+
+<file path=ppt/notesSlides/notesSlide4.xml><?xml version="1.0" encoding="utf-8"?>
+<p:notes xmlns:a="http://schemas.openxmlformats.org/drawingml/2006/main" xmlns:r="http://schemas.openxmlformats.org/officeDocument/2006/relationships" xmlns:p="http://schemas.openxmlformats.org/presentationml/2006/main">
+  <p:cSld>
+    <p:spTree>
+      <p:nvGrpSpPr>
+        <p:cNvPr id="1" name=""/>
+        <p:cNvGrpSpPr/>
+        <p:nvPr/>
+      </p:nvGrpSpPr>
+      <p:grpSpPr>
+        <a:xfrm>
+          <a:off x="0" y="0"/>
+          <a:ext cx="0" cy="0"/>
+          <a:chOff x="0" y="0"/>
+          <a:chExt cx="0" cy="0"/>
+        </a:xfrm>
+      </p:grpSpPr>
+      <p:sp>
+        <p:nvSpPr>
+          <p:cNvPr id="2" name="Slide Image Placeholder 1"/>
+          <p:cNvSpPr>
+            <a:spLocks noGrp="1" noRot="1" noChangeAspect="1"/>
+          </p:cNvSpPr>
+          <p:nvPr>
+            <p:ph type="sldImg"/>
+          </p:nvPr>
+        </p:nvSpPr>
+        <p:spPr/>
+      </p:sp>
+      <p:sp>
+        <p:nvSpPr>
+          <p:cNvPr id="3" name="Notes Placeholder 2"/>
+          <p:cNvSpPr>
+            <a:spLocks noGrp="1"/>
+          </p:cNvSpPr>
+          <p:nvPr>
+            <p:ph type="body" idx="1"/>
+          </p:nvPr>
+        </p:nvSpPr>
+        <p:spPr/>
+        <p:txBody>
+          <a:bodyPr/>
+          <a:lstStyle/>
+          <a:p>
+            <a:r>
+              <a:rPr lang="en-US" dirty="0"/>
+              <a:t>Output</a:t>
+            </a:r>
+            <a:r>
+              <a:rPr lang="en-US" baseline="0" dirty="0"/>
+              <a:t> restricted</a:t>
+            </a:r>
+            <a:endParaRPr lang="en-US" dirty="0"/>
+          </a:p>
+        </p:txBody>
+      </p:sp>
+      <p:sp>
+        <p:nvSpPr>
+          <p:cNvPr id="4" name="Slide Number Placeholder 3"/>
+          <p:cNvSpPr>
+            <a:spLocks noGrp="1"/>
+          </p:cNvSpPr>
+          <p:nvPr>
+            <p:ph type="sldNum" sz="quarter" idx="10"/>
+          </p:nvPr>
+        </p:nvSpPr>
+        <p:spPr/>
+        <p:txBody>
+          <a:bodyPr/>
+          <a:lstStyle/>
+          <a:p>
+            <a:fld id="{B0EAF083-6659-4761-8DBD-F9B281D98BC7}" type="slidenum">
+              <a:rPr lang="en-US" smtClean="0"/>
+              <a:t>28</a:t>
+            </a:fld>
+            <a:endParaRPr lang="en-US"/>
+          </a:p>
+        </p:txBody>
+      </p:sp>
+    </p:spTree>
+    <p:extLst>
+      <p:ext uri="{BB962C8B-B14F-4D97-AF65-F5344CB8AC3E}">
+        <p14:creationId xmlns:p14="http://schemas.microsoft.com/office/powerpoint/2010/main" val="3204335975"/>
+      </p:ext>
+    </p:extLst>
+  </p:cSld>
+  <p:clrMapOvr>
+    <a:masterClrMapping/>
+  </p:clrMapOvr>
+</p:notes>
+</file>
+
+<file path=ppt/notesSlides/notesSlide5.xml><?xml version="1.0" encoding="utf-8"?>
+<p:notes xmlns:a="http://schemas.openxmlformats.org/drawingml/2006/main" xmlns:r="http://schemas.openxmlformats.org/officeDocument/2006/relationships" xmlns:p="http://schemas.openxmlformats.org/presentationml/2006/main">
+  <p:cSld>
+    <p:spTree>
+      <p:nvGrpSpPr>
+        <p:cNvPr id="1" name=""/>
+        <p:cNvGrpSpPr/>
+        <p:nvPr/>
+      </p:nvGrpSpPr>
+      <p:grpSpPr>
+        <a:xfrm>
+          <a:off x="0" y="0"/>
+          <a:ext cx="0" cy="0"/>
+          <a:chOff x="0" y="0"/>
+          <a:chExt cx="0" cy="0"/>
+        </a:xfrm>
+      </p:grpSpPr>
+      <p:sp>
+        <p:nvSpPr>
+          <p:cNvPr id="2" name="Slide Image Placeholder 1"/>
+          <p:cNvSpPr>
+            <a:spLocks noGrp="1" noRot="1" noChangeAspect="1"/>
+          </p:cNvSpPr>
+          <p:nvPr>
+            <p:ph type="sldImg"/>
+          </p:nvPr>
+        </p:nvSpPr>
+        <p:spPr/>
+      </p:sp>
+      <p:sp>
+        <p:nvSpPr>
+          <p:cNvPr id="3" name="Notes Placeholder 2"/>
+          <p:cNvSpPr>
+            <a:spLocks noGrp="1"/>
+          </p:cNvSpPr>
+          <p:nvPr>
+            <p:ph type="body" idx="1"/>
+          </p:nvPr>
+        </p:nvSpPr>
+        <p:spPr/>
+        <p:txBody>
+          <a:bodyPr/>
+          <a:lstStyle/>
+          <a:p>
+            <a:r>
+              <a:rPr lang="en-US" dirty="0"/>
+              <a:t>Input restricted</a:t>
+            </a:r>
+          </a:p>
+          <a:p>
+            <a:endParaRPr lang="en-US" dirty="0"/>
+          </a:p>
+        </p:txBody>
+      </p:sp>
+      <p:sp>
+        <p:nvSpPr>
+          <p:cNvPr id="4" name="Slide Number Placeholder 3"/>
+          <p:cNvSpPr>
+            <a:spLocks noGrp="1"/>
+          </p:cNvSpPr>
+          <p:nvPr>
+            <p:ph type="sldNum" sz="quarter" idx="10"/>
+          </p:nvPr>
+        </p:nvSpPr>
+        <p:spPr/>
+        <p:txBody>
+          <a:bodyPr/>
+          <a:lstStyle/>
+          <a:p>
+            <a:fld id="{B0EAF083-6659-4761-8DBD-F9B281D98BC7}" type="slidenum">
+              <a:rPr lang="en-US" smtClean="0"/>
+              <a:t>29</a:t>
+            </a:fld>
+            <a:endParaRPr lang="en-US"/>
+          </a:p>
+        </p:txBody>
+      </p:sp>
+    </p:spTree>
+    <p:extLst>
+      <p:ext uri="{BB962C8B-B14F-4D97-AF65-F5344CB8AC3E}">
+        <p14:creationId xmlns:p14="http://schemas.microsoft.com/office/powerpoint/2010/main" val="1623040421"/>
+      </p:ext>
+    </p:extLst>
+  </p:cSld>
+  <p:clrMapOvr>
+    <a:masterClrMapping/>
+  </p:clrMapOvr>
+</p:notes>
+</file>
+
+<file path=ppt/notesSlides/notesSlide6.xml><?xml version="1.0" encoding="utf-8"?>
+<p:notes xmlns:a="http://schemas.openxmlformats.org/drawingml/2006/main" xmlns:r="http://schemas.openxmlformats.org/officeDocument/2006/relationships" xmlns:p="http://schemas.openxmlformats.org/presentationml/2006/main">
+  <p:cSld>
+    <p:spTree>
+      <p:nvGrpSpPr>
+        <p:cNvPr id="1" name=""/>
+        <p:cNvGrpSpPr/>
+        <p:nvPr/>
+      </p:nvGrpSpPr>
+      <p:grpSpPr>
+        <a:xfrm>
+          <a:off x="0" y="0"/>
+          <a:ext cx="0" cy="0"/>
+          <a:chOff x="0" y="0"/>
+          <a:chExt cx="0" cy="0"/>
+        </a:xfrm>
+      </p:grpSpPr>
+      <p:sp>
+        <p:nvSpPr>
+          <p:cNvPr id="2" name="Slide Image Placeholder 1"/>
+          <p:cNvSpPr>
+            <a:spLocks noGrp="1" noRot="1" noChangeAspect="1"/>
+          </p:cNvSpPr>
+          <p:nvPr>
+            <p:ph type="sldImg"/>
+          </p:nvPr>
+        </p:nvSpPr>
+        <p:spPr/>
+      </p:sp>
+      <p:sp>
+        <p:nvSpPr>
+          <p:cNvPr id="3" name="Notes Placeholder 2"/>
+          <p:cNvSpPr>
+            <a:spLocks noGrp="1"/>
+          </p:cNvSpPr>
+          <p:nvPr>
+            <p:ph type="body" idx="1"/>
+          </p:nvPr>
+        </p:nvSpPr>
+        <p:spPr/>
+        <p:txBody>
+          <a:bodyPr/>
+          <a:lstStyle/>
+          <a:p>
+            <a:r>
+              <a:rPr lang="en-US" dirty="0" err="1"/>
               <a:t>Ans</a:t>
             </a:r>
             <a:r>
-              <a:rPr lang="en-US" dirty="0" smtClean="0"/>
+              <a:rPr lang="en-US" dirty="0"/>
               <a:t> C</a:t>
             </a:r>
           </a:p>
           <a:p>
             <a:r>
-              <a:rPr lang="en-US" dirty="0" err="1" smtClean="0"/>
+              <a:rPr lang="en-US" dirty="0" err="1"/>
               <a:t>Ans</a:t>
             </a:r>
             <a:r>
-              <a:rPr lang="en-US" dirty="0" smtClean="0"/>
+              <a:rPr lang="en-US" dirty="0"/>
               <a:t> D</a:t>
             </a:r>
           </a:p>
           <a:p>
-            <a:endParaRPr lang="en-US" dirty="0" smtClean="0"/>
+            <a:endParaRPr lang="en-US" dirty="0"/>
           </a:p>
           <a:p>
             <a:endParaRPr lang="en-US" dirty="0"/>
@@ -1797,6 +2160,13 @@
             <a:tailEnd/>
           </a:ln>
         </p:spPr>
+        <p:txBody>
+          <a:bodyPr/>
+          <a:lstStyle/>
+          <a:p>
+            <a:endParaRPr lang="en-IN"/>
+          </a:p>
+        </p:txBody>
       </p:sp>
       <p:sp>
         <p:nvSpPr>
@@ -1825,7 +2195,7 @@
           </a:lstStyle>
           <a:p>
             <a:r>
-              <a:rPr lang="en-US" smtClean="0"/>
+              <a:rPr lang="en-US"/>
               <a:t>Click to edit Master title style</a:t>
             </a:r>
             <a:endParaRPr lang="en-US" dirty="0"/>
@@ -1899,7 +2269,7 @@
           </a:lstStyle>
           <a:p>
             <a:r>
-              <a:rPr lang="en-US" smtClean="0"/>
+              <a:rPr lang="en-US"/>
               <a:t>Click to edit Master subtitle style</a:t>
             </a:r>
             <a:endParaRPr lang="en-US" dirty="0"/>
@@ -1939,7 +2309,7 @@
             <a:fld id="{9334D819-9F07-4261-B09B-9E467E5D9002}" type="datetimeFigureOut">
               <a:rPr lang="en-US" dirty="0"/>
               <a:pPr/>
-              <a:t>3/16/2026</a:t>
+              <a:t>5/4/2026</a:t>
             </a:fld>
             <a:endParaRPr lang="en-US" dirty="0"/>
           </a:p>
@@ -2055,6 +2425,13 @@
             <a:schemeClr val="lt1"/>
           </a:fontRef>
         </p:style>
+        <p:txBody>
+          <a:bodyPr/>
+          <a:lstStyle/>
+          <a:p>
+            <a:endParaRPr lang="en-IN"/>
+          </a:p>
+        </p:txBody>
       </p:sp>
     </p:spTree>
   </p:cSld>
@@ -2097,7 +2474,7 @@
           <a:lstStyle/>
           <a:p>
             <a:r>
-              <a:rPr lang="en-US" smtClean="0"/>
+              <a:rPr lang="en-US"/>
               <a:t>Click to edit Master title style</a:t>
             </a:r>
             <a:endParaRPr lang="en-US" dirty="0"/>
@@ -2121,35 +2498,35 @@
           <a:p>
             <a:pPr lvl="0"/>
             <a:r>
-              <a:rPr lang="en-US" smtClean="0"/>
+              <a:rPr lang="en-US"/>
               <a:t>Edit Master text styles</a:t>
             </a:r>
           </a:p>
           <a:p>
             <a:pPr lvl="1"/>
             <a:r>
-              <a:rPr lang="en-US" smtClean="0"/>
+              <a:rPr lang="en-US"/>
               <a:t>Second level</a:t>
             </a:r>
           </a:p>
           <a:p>
             <a:pPr lvl="2"/>
             <a:r>
-              <a:rPr lang="en-US" smtClean="0"/>
+              <a:rPr lang="en-US"/>
               <a:t>Third level</a:t>
             </a:r>
           </a:p>
           <a:p>
             <a:pPr lvl="3"/>
             <a:r>
-              <a:rPr lang="en-US" smtClean="0"/>
+              <a:rPr lang="en-US"/>
               <a:t>Fourth level</a:t>
             </a:r>
           </a:p>
           <a:p>
             <a:pPr lvl="4"/>
             <a:r>
-              <a:rPr lang="en-US" smtClean="0"/>
+              <a:rPr lang="en-US"/>
               <a:t>Fifth level</a:t>
             </a:r>
             <a:endParaRPr lang="en-US" dirty="0"/>
@@ -2173,7 +2550,7 @@
           <a:p>
             <a:fld id="{9334D819-9F07-4261-B09B-9E467E5D9002}" type="datetimeFigureOut">
               <a:rPr lang="en-US" dirty="0"/>
-              <a:t>3/16/2026</a:t>
+              <a:t>5/4/2026</a:t>
             </a:fld>
             <a:endParaRPr lang="en-US" dirty="0"/>
           </a:p>
@@ -2267,7 +2644,7 @@
           <a:lstStyle/>
           <a:p>
             <a:r>
-              <a:rPr lang="en-US" smtClean="0"/>
+              <a:rPr lang="en-US"/>
               <a:t>Click to edit Master title style</a:t>
             </a:r>
             <a:endParaRPr lang="en-US" dirty="0"/>
@@ -2296,35 +2673,35 @@
           <a:p>
             <a:pPr lvl="0"/>
             <a:r>
-              <a:rPr lang="en-US" smtClean="0"/>
+              <a:rPr lang="en-US"/>
               <a:t>Edit Master text styles</a:t>
             </a:r>
           </a:p>
           <a:p>
             <a:pPr lvl="1"/>
             <a:r>
-              <a:rPr lang="en-US" smtClean="0"/>
+              <a:rPr lang="en-US"/>
               <a:t>Second level</a:t>
             </a:r>
           </a:p>
           <a:p>
             <a:pPr lvl="2"/>
             <a:r>
-              <a:rPr lang="en-US" smtClean="0"/>
+              <a:rPr lang="en-US"/>
               <a:t>Third level</a:t>
             </a:r>
           </a:p>
           <a:p>
             <a:pPr lvl="3"/>
             <a:r>
-              <a:rPr lang="en-US" smtClean="0"/>
+              <a:rPr lang="en-US"/>
               <a:t>Fourth level</a:t>
             </a:r>
           </a:p>
           <a:p>
             <a:pPr lvl="4"/>
             <a:r>
-              <a:rPr lang="en-US" smtClean="0"/>
+              <a:rPr lang="en-US"/>
               <a:t>Fifth level</a:t>
             </a:r>
             <a:endParaRPr lang="en-US" dirty="0"/>
@@ -2348,7 +2725,7 @@
           <a:p>
             <a:fld id="{9334D819-9F07-4261-B09B-9E467E5D9002}" type="datetimeFigureOut">
               <a:rPr lang="en-US" dirty="0"/>
-              <a:t>3/16/2026</a:t>
+              <a:t>5/4/2026</a:t>
             </a:fld>
             <a:endParaRPr lang="en-US" dirty="0"/>
           </a:p>
@@ -2753,10 +3130,9 @@
           <a:lstStyle/>
           <a:p>
             <a:r>
-              <a:rPr lang="en-US" dirty="0" smtClean="0"/>
+              <a:rPr lang="en-US" dirty="0"/>
               <a:t>Click to edit Master title style</a:t>
             </a:r>
-            <a:endParaRPr lang="en-US" dirty="0"/>
           </a:p>
         </p:txBody>
       </p:sp>
@@ -2810,38 +3186,37 @@
           <a:p>
             <a:pPr lvl="0"/>
             <a:r>
-              <a:rPr lang="en-US" dirty="0" smtClean="0"/>
+              <a:rPr lang="en-US" dirty="0"/>
               <a:t>Edit Master text styles</a:t>
             </a:r>
           </a:p>
           <a:p>
             <a:pPr lvl="1"/>
             <a:r>
-              <a:rPr lang="en-US" dirty="0" smtClean="0"/>
+              <a:rPr lang="en-US" dirty="0"/>
               <a:t>Second level</a:t>
             </a:r>
           </a:p>
           <a:p>
             <a:pPr lvl="2"/>
             <a:r>
-              <a:rPr lang="en-US" dirty="0" smtClean="0"/>
+              <a:rPr lang="en-US" dirty="0"/>
               <a:t>Third level</a:t>
             </a:r>
           </a:p>
           <a:p>
             <a:pPr lvl="3"/>
             <a:r>
-              <a:rPr lang="en-US" dirty="0" smtClean="0"/>
+              <a:rPr lang="en-US" dirty="0"/>
               <a:t>Fourth level</a:t>
             </a:r>
           </a:p>
           <a:p>
             <a:pPr lvl="4"/>
             <a:r>
-              <a:rPr lang="en-US" dirty="0" smtClean="0"/>
+              <a:rPr lang="en-US" dirty="0"/>
               <a:t>Fifth level</a:t>
             </a:r>
-            <a:endParaRPr lang="en-US" dirty="0"/>
           </a:p>
         </p:txBody>
       </p:sp>
@@ -2909,7 +3284,7 @@
           </a:lstStyle>
           <a:p>
             <a:r>
-              <a:rPr lang="en-US" smtClean="0"/>
+              <a:rPr lang="en-US"/>
               <a:t>Click to edit Master title style</a:t>
             </a:r>
             <a:endParaRPr lang="en-US" dirty="0"/>
@@ -3032,7 +3407,7 @@
           <a:p>
             <a:pPr lvl="0"/>
             <a:r>
-              <a:rPr lang="en-US" smtClean="0"/>
+              <a:rPr lang="en-US"/>
               <a:t>Edit Master text styles</a:t>
             </a:r>
           </a:p>
@@ -3069,7 +3444,7 @@
             <a:fld id="{9334D819-9F07-4261-B09B-9E467E5D9002}" type="datetimeFigureOut">
               <a:rPr lang="en-US" dirty="0"/>
               <a:pPr/>
-              <a:t>3/16/2026</a:t>
+              <a:t>5/4/2026</a:t>
             </a:fld>
             <a:endParaRPr lang="en-US" dirty="0"/>
           </a:p>
@@ -4128,7 +4503,7 @@
           <a:lstStyle/>
           <a:p>
             <a:r>
-              <a:rPr lang="en-US" smtClean="0"/>
+              <a:rPr lang="en-US"/>
               <a:t>Click to edit Master title style</a:t>
             </a:r>
             <a:endParaRPr lang="en-US" dirty="0"/>
@@ -4157,35 +4532,35 @@
           <a:p>
             <a:pPr lvl="0"/>
             <a:r>
-              <a:rPr lang="en-US" smtClean="0"/>
+              <a:rPr lang="en-US"/>
               <a:t>Edit Master text styles</a:t>
             </a:r>
           </a:p>
           <a:p>
             <a:pPr lvl="1"/>
             <a:r>
-              <a:rPr lang="en-US" smtClean="0"/>
+              <a:rPr lang="en-US"/>
               <a:t>Second level</a:t>
             </a:r>
           </a:p>
           <a:p>
             <a:pPr lvl="2"/>
             <a:r>
-              <a:rPr lang="en-US" smtClean="0"/>
+              <a:rPr lang="en-US"/>
               <a:t>Third level</a:t>
             </a:r>
           </a:p>
           <a:p>
             <a:pPr lvl="3"/>
             <a:r>
-              <a:rPr lang="en-US" smtClean="0"/>
+              <a:rPr lang="en-US"/>
               <a:t>Fourth level</a:t>
             </a:r>
           </a:p>
           <a:p>
             <a:pPr lvl="4"/>
             <a:r>
-              <a:rPr lang="en-US" smtClean="0"/>
+              <a:rPr lang="en-US"/>
               <a:t>Fifth level</a:t>
             </a:r>
             <a:endParaRPr lang="en-US" dirty="0"/>
@@ -4214,35 +4589,35 @@
           <a:p>
             <a:pPr lvl="0"/>
             <a:r>
-              <a:rPr lang="en-US" smtClean="0"/>
+              <a:rPr lang="en-US"/>
               <a:t>Edit Master text styles</a:t>
             </a:r>
           </a:p>
           <a:p>
             <a:pPr lvl="1"/>
             <a:r>
-              <a:rPr lang="en-US" smtClean="0"/>
+              <a:rPr lang="en-US"/>
               <a:t>Second level</a:t>
             </a:r>
           </a:p>
           <a:p>
             <a:pPr lvl="2"/>
             <a:r>
-              <a:rPr lang="en-US" smtClean="0"/>
+              <a:rPr lang="en-US"/>
               <a:t>Third level</a:t>
             </a:r>
           </a:p>
           <a:p>
             <a:pPr lvl="3"/>
             <a:r>
-              <a:rPr lang="en-US" smtClean="0"/>
+              <a:rPr lang="en-US"/>
               <a:t>Fourth level</a:t>
             </a:r>
           </a:p>
           <a:p>
             <a:pPr lvl="4"/>
             <a:r>
-              <a:rPr lang="en-US" smtClean="0"/>
+              <a:rPr lang="en-US"/>
               <a:t>Fifth level</a:t>
             </a:r>
             <a:endParaRPr lang="en-US" dirty="0"/>
@@ -4266,7 +4641,7 @@
           <a:p>
             <a:fld id="{9334D819-9F07-4261-B09B-9E467E5D9002}" type="datetimeFigureOut">
               <a:rPr lang="en-US" dirty="0"/>
-              <a:t>3/16/2026</a:t>
+              <a:t>5/4/2026</a:t>
             </a:fld>
             <a:endParaRPr lang="en-US" dirty="0"/>
           </a:p>
@@ -4319,7 +4694,7 @@
   <p:clrMapOvr>
     <a:masterClrMapping/>
   </p:clrMapOvr>
-  <p:extLst mod="1">
+  <p:extLst>
     <p:ext uri="{DCECCB84-F9BA-43D5-87BE-67443E8EF086}">
       <p15:sldGuideLst xmlns:p15="http://schemas.microsoft.com/office/powerpoint/2012/main"/>
     </p:ext>
@@ -4365,7 +4740,7 @@
           <a:lstStyle/>
           <a:p>
             <a:r>
-              <a:rPr lang="en-US" smtClean="0"/>
+              <a:rPr lang="en-US"/>
               <a:t>Click to edit Master title style</a:t>
             </a:r>
             <a:endParaRPr lang="en-US" dirty="0"/>
@@ -4440,7 +4815,7 @@
           <a:p>
             <a:pPr lvl="0"/>
             <a:r>
-              <a:rPr lang="en-US" smtClean="0"/>
+              <a:rPr lang="en-US"/>
               <a:t>Edit Master text styles</a:t>
             </a:r>
           </a:p>
@@ -4468,35 +4843,35 @@
           <a:p>
             <a:pPr lvl="0"/>
             <a:r>
-              <a:rPr lang="en-US" smtClean="0"/>
+              <a:rPr lang="en-US"/>
               <a:t>Edit Master text styles</a:t>
             </a:r>
           </a:p>
           <a:p>
             <a:pPr lvl="1"/>
             <a:r>
-              <a:rPr lang="en-US" smtClean="0"/>
+              <a:rPr lang="en-US"/>
               <a:t>Second level</a:t>
             </a:r>
           </a:p>
           <a:p>
             <a:pPr lvl="2"/>
             <a:r>
-              <a:rPr lang="en-US" smtClean="0"/>
+              <a:rPr lang="en-US"/>
               <a:t>Third level</a:t>
             </a:r>
           </a:p>
           <a:p>
             <a:pPr lvl="3"/>
             <a:r>
-              <a:rPr lang="en-US" smtClean="0"/>
+              <a:rPr lang="en-US"/>
               <a:t>Fourth level</a:t>
             </a:r>
           </a:p>
           <a:p>
             <a:pPr lvl="4"/>
             <a:r>
-              <a:rPr lang="en-US" smtClean="0"/>
+              <a:rPr lang="en-US"/>
               <a:t>Fifth level</a:t>
             </a:r>
             <a:endParaRPr lang="en-US" dirty="0"/>
@@ -4571,7 +4946,7 @@
           <a:p>
             <a:pPr lvl="0"/>
             <a:r>
-              <a:rPr lang="en-US" smtClean="0"/>
+              <a:rPr lang="en-US"/>
               <a:t>Edit Master text styles</a:t>
             </a:r>
           </a:p>
@@ -4599,35 +4974,35 @@
           <a:p>
             <a:pPr lvl="0"/>
             <a:r>
-              <a:rPr lang="en-US" smtClean="0"/>
+              <a:rPr lang="en-US"/>
               <a:t>Edit Master text styles</a:t>
             </a:r>
           </a:p>
           <a:p>
             <a:pPr lvl="1"/>
             <a:r>
-              <a:rPr lang="en-US" smtClean="0"/>
+              <a:rPr lang="en-US"/>
               <a:t>Second level</a:t>
             </a:r>
           </a:p>
           <a:p>
             <a:pPr lvl="2"/>
             <a:r>
-              <a:rPr lang="en-US" smtClean="0"/>
+              <a:rPr lang="en-US"/>
               <a:t>Third level</a:t>
             </a:r>
           </a:p>
           <a:p>
             <a:pPr lvl="3"/>
             <a:r>
-              <a:rPr lang="en-US" smtClean="0"/>
+              <a:rPr lang="en-US"/>
               <a:t>Fourth level</a:t>
             </a:r>
           </a:p>
           <a:p>
             <a:pPr lvl="4"/>
             <a:r>
-              <a:rPr lang="en-US" smtClean="0"/>
+              <a:rPr lang="en-US"/>
               <a:t>Fifth level</a:t>
             </a:r>
             <a:endParaRPr lang="en-US" dirty="0"/>
@@ -4651,7 +5026,7 @@
           <a:p>
             <a:fld id="{9334D819-9F07-4261-B09B-9E467E5D9002}" type="datetimeFigureOut">
               <a:rPr lang="en-US" dirty="0"/>
-              <a:t>3/16/2026</a:t>
+              <a:t>5/4/2026</a:t>
             </a:fld>
             <a:endParaRPr lang="en-US" dirty="0"/>
           </a:p>
@@ -4704,7 +5079,7 @@
   <p:clrMapOvr>
     <a:masterClrMapping/>
   </p:clrMapOvr>
-  <p:extLst mod="1">
+  <p:extLst>
     <p:ext uri="{DCECCB84-F9BA-43D5-87BE-67443E8EF086}">
       <p15:sldGuideLst xmlns:p15="http://schemas.microsoft.com/office/powerpoint/2012/main"/>
     </p:ext>
@@ -4745,7 +5120,7 @@
           <a:lstStyle/>
           <a:p>
             <a:r>
-              <a:rPr lang="en-US" smtClean="0"/>
+              <a:rPr lang="en-US"/>
               <a:t>Click to edit Master title style</a:t>
             </a:r>
             <a:endParaRPr lang="en-US" dirty="0"/>
@@ -4769,7 +5144,7 @@
           <a:p>
             <a:fld id="{9334D819-9F07-4261-B09B-9E467E5D9002}" type="datetimeFigureOut">
               <a:rPr lang="en-US" dirty="0"/>
-              <a:t>3/16/2026</a:t>
+              <a:t>5/4/2026</a:t>
             </a:fld>
             <a:endParaRPr lang="en-US" dirty="0"/>
           </a:p>
@@ -4859,7 +5234,7 @@
           <a:p>
             <a:fld id="{9334D819-9F07-4261-B09B-9E467E5D9002}" type="datetimeFigureOut">
               <a:rPr lang="en-US" dirty="0"/>
-              <a:t>3/16/2026</a:t>
+              <a:t>5/4/2026</a:t>
             </a:fld>
             <a:endParaRPr lang="en-US" dirty="0"/>
           </a:p>
@@ -5428,7 +5803,7 @@
           </a:lstStyle>
           <a:p>
             <a:r>
-              <a:rPr lang="en-US" smtClean="0"/>
+              <a:rPr lang="en-US"/>
               <a:t>Click to edit Master title style</a:t>
             </a:r>
             <a:endParaRPr lang="en-US" dirty="0"/>
@@ -5485,35 +5860,35 @@
           <a:p>
             <a:pPr lvl="0"/>
             <a:r>
-              <a:rPr lang="en-US" smtClean="0"/>
+              <a:rPr lang="en-US"/>
               <a:t>Edit Master text styles</a:t>
             </a:r>
           </a:p>
           <a:p>
             <a:pPr lvl="1"/>
             <a:r>
-              <a:rPr lang="en-US" smtClean="0"/>
+              <a:rPr lang="en-US"/>
               <a:t>Second level</a:t>
             </a:r>
           </a:p>
           <a:p>
             <a:pPr lvl="2"/>
             <a:r>
-              <a:rPr lang="en-US" smtClean="0"/>
+              <a:rPr lang="en-US"/>
               <a:t>Third level</a:t>
             </a:r>
           </a:p>
           <a:p>
             <a:pPr lvl="3"/>
             <a:r>
-              <a:rPr lang="en-US" smtClean="0"/>
+              <a:rPr lang="en-US"/>
               <a:t>Fourth level</a:t>
             </a:r>
           </a:p>
           <a:p>
             <a:pPr lvl="4"/>
             <a:r>
-              <a:rPr lang="en-US" smtClean="0"/>
+              <a:rPr lang="en-US"/>
               <a:t>Fifth level</a:t>
             </a:r>
             <a:endParaRPr lang="en-US" dirty="0"/>
@@ -5589,7 +5964,7 @@
           <a:p>
             <a:pPr lvl="0"/>
             <a:r>
-              <a:rPr lang="en-US" smtClean="0"/>
+              <a:rPr lang="en-US"/>
               <a:t>Edit Master text styles</a:t>
             </a:r>
           </a:p>
@@ -5617,7 +5992,7 @@
           <a:p>
             <a:fld id="{9334D819-9F07-4261-B09B-9E467E5D9002}" type="datetimeFigureOut">
               <a:rPr lang="en-US" dirty="0"/>
-              <a:t>3/16/2026</a:t>
+              <a:t>5/4/2026</a:t>
             </a:fld>
             <a:endParaRPr lang="en-US" dirty="0"/>
           </a:p>
@@ -5718,7 +6093,7 @@
   <p:clrMapOvr>
     <a:masterClrMapping/>
   </p:clrMapOvr>
-  <p:extLst mod="1">
+  <p:extLst>
     <p:ext uri="{DCECCB84-F9BA-43D5-87BE-67443E8EF086}">
       <p15:sldGuideLst xmlns:p15="http://schemas.microsoft.com/office/powerpoint/2012/main">
         <p15:guide id="1" orient="horz" pos="696">
@@ -5807,7 +6182,7 @@
           </a:lstStyle>
           <a:p>
             <a:r>
-              <a:rPr lang="en-US" smtClean="0"/>
+              <a:rPr lang="en-US"/>
               <a:t>Click icon to add picture</a:t>
             </a:r>
             <a:endParaRPr lang="en-US" dirty="0"/>
@@ -6348,7 +6723,7 @@
           </a:lstStyle>
           <a:p>
             <a:r>
-              <a:rPr lang="en-US" smtClean="0"/>
+              <a:rPr lang="en-US"/>
               <a:t>Click to edit Master title style</a:t>
             </a:r>
             <a:endParaRPr lang="en-US" dirty="0"/>
@@ -6424,7 +6799,7 @@
           <a:p>
             <a:pPr lvl="0"/>
             <a:r>
-              <a:rPr lang="en-US" smtClean="0"/>
+              <a:rPr lang="en-US"/>
               <a:t>Edit Master text styles</a:t>
             </a:r>
           </a:p>
@@ -6452,7 +6827,7 @@
           <a:p>
             <a:fld id="{9334D819-9F07-4261-B09B-9E467E5D9002}" type="datetimeFigureOut">
               <a:rPr lang="en-US" dirty="0"/>
-              <a:t>3/16/2026</a:t>
+              <a:t>5/4/2026</a:t>
             </a:fld>
             <a:endParaRPr lang="en-US" dirty="0"/>
           </a:p>
@@ -6569,7 +6944,7 @@
           <a:lstStyle/>
           <a:p>
             <a:r>
-              <a:rPr lang="en-US" smtClean="0"/>
+              <a:rPr lang="en-US"/>
               <a:t>Click to edit Master title style</a:t>
             </a:r>
             <a:endParaRPr lang="en-US" dirty="0"/>
@@ -6603,35 +6978,35 @@
           <a:p>
             <a:pPr lvl="0"/>
             <a:r>
-              <a:rPr lang="en-US" smtClean="0"/>
+              <a:rPr lang="en-US"/>
               <a:t>Edit Master text styles</a:t>
             </a:r>
           </a:p>
           <a:p>
             <a:pPr lvl="1"/>
             <a:r>
-              <a:rPr lang="en-US" smtClean="0"/>
+              <a:rPr lang="en-US"/>
               <a:t>Second level</a:t>
             </a:r>
           </a:p>
           <a:p>
             <a:pPr lvl="2"/>
             <a:r>
-              <a:rPr lang="en-US" smtClean="0"/>
+              <a:rPr lang="en-US"/>
               <a:t>Third level</a:t>
             </a:r>
           </a:p>
           <a:p>
             <a:pPr lvl="3"/>
             <a:r>
-              <a:rPr lang="en-US" smtClean="0"/>
+              <a:rPr lang="en-US"/>
               <a:t>Fourth level</a:t>
             </a:r>
           </a:p>
           <a:p>
             <a:pPr lvl="4"/>
             <a:r>
-              <a:rPr lang="en-US" smtClean="0"/>
+              <a:rPr lang="en-US"/>
               <a:t>Fifth level</a:t>
             </a:r>
             <a:endParaRPr lang="en-US" dirty="0"/>
@@ -6675,7 +7050,7 @@
             <a:fld id="{9334D819-9F07-4261-B09B-9E467E5D9002}" type="datetimeFigureOut">
               <a:rPr lang="en-US" dirty="0"/>
               <a:pPr/>
-              <a:t>3/16/2026</a:t>
+              <a:t>5/4/2026</a:t>
             </a:fld>
             <a:endParaRPr lang="en-US" dirty="0"/>
           </a:p>
@@ -7225,6 +7600,13 @@
             <a:tailEnd/>
           </a:ln>
         </p:spPr>
+        <p:txBody>
+          <a:bodyPr/>
+          <a:lstStyle/>
+          <a:p>
+            <a:endParaRPr lang="en-IN"/>
+          </a:p>
+        </p:txBody>
       </p:sp>
       <p:sp>
         <p:nvSpPr>
@@ -7263,6 +7645,13 @@
             <a:schemeClr val="lt1"/>
           </a:fontRef>
         </p:style>
+        <p:txBody>
+          <a:bodyPr/>
+          <a:lstStyle/>
+          <a:p>
+            <a:endParaRPr lang="en-IN"/>
+          </a:p>
+        </p:txBody>
       </p:sp>
     </p:spTree>
   </p:cSld>
@@ -7615,7 +8004,7 @@
       </a:lvl9pPr>
     </p:otherStyle>
   </p:txStyles>
-  <p:extLst mod="1">
+  <p:extLst>
     <p:ext uri="{27BBF7A9-308A-43DC-89C8-2F10F3537804}">
       <p15:sldGuideLst xmlns:p15="http://schemas.microsoft.com/office/powerpoint/2012/main">
         <p15:guide id="1" pos="792">
@@ -7687,10 +8076,9 @@
           <a:lstStyle/>
           <a:p>
             <a:r>
-              <a:rPr lang="en-US" dirty="0" smtClean="0"/>
+              <a:rPr lang="en-US" dirty="0"/>
               <a:t>Stack &amp; Queue</a:t>
             </a:r>
-            <a:endParaRPr lang="en-US" dirty="0"/>
           </a:p>
         </p:txBody>
       </p:sp>
@@ -7710,10 +8098,9 @@
           <a:lstStyle/>
           <a:p>
             <a:r>
-              <a:rPr lang="en-US" dirty="0" smtClean="0"/>
+              <a:rPr lang="en-US" dirty="0"/>
               <a:t> </a:t>
             </a:r>
-            <a:endParaRPr lang="en-US" dirty="0"/>
           </a:p>
         </p:txBody>
       </p:sp>
@@ -7727,13 +8114,6 @@
   <p:clrMapOvr>
     <a:masterClrMapping/>
   </p:clrMapOvr>
-  <p:timing>
-    <p:tnLst>
-      <p:par>
-        <p:cTn id="1" dur="indefinite" restart="never" nodeType="tmRoot"/>
-      </p:par>
-    </p:tnLst>
-  </p:timing>
 </p:sld>
 </file>
 
@@ -7850,13 +8230,6 @@
   <p:clrMapOvr>
     <a:masterClrMapping/>
   </p:clrMapOvr>
-  <p:timing>
-    <p:tnLst>
-      <p:par>
-        <p:cTn id="1" dur="indefinite" restart="never" nodeType="tmRoot"/>
-      </p:par>
-    </p:tnLst>
-  </p:timing>
 </p:sld>
 </file>
 
@@ -7935,29 +8308,8 @@
                 <a:latin typeface="Times New Roman" panose="02020603050405020304" pitchFamily="18" charset="0"/>
                 <a:cs typeface="Times New Roman" panose="02020603050405020304" pitchFamily="18" charset="0"/>
               </a:rPr>
-              <a:t>If front=rear , the queue </a:t>
-            </a:r>
-            <a:r>
-              <a:rPr lang="en-US" sz="2400" dirty="0" smtClean="0">
-                <a:solidFill>
-                  <a:schemeClr val="bg2">
-                    <a:lumMod val="25000"/>
-                  </a:schemeClr>
-                </a:solidFill>
-                <a:latin typeface="Times New Roman" panose="02020603050405020304" pitchFamily="18" charset="0"/>
-                <a:cs typeface="Times New Roman" panose="02020603050405020304" pitchFamily="18" charset="0"/>
-              </a:rPr>
-              <a:t>will have a single element.</a:t>
-            </a:r>
-            <a:endParaRPr lang="en-US" sz="2400" dirty="0">
-              <a:solidFill>
-                <a:schemeClr val="bg2">
-                  <a:lumMod val="25000"/>
-                </a:schemeClr>
-              </a:solidFill>
-              <a:latin typeface="Times New Roman" panose="02020603050405020304" pitchFamily="18" charset="0"/>
-              <a:cs typeface="Times New Roman" panose="02020603050405020304" pitchFamily="18" charset="0"/>
-            </a:endParaRPr>
+              <a:t>If front=rear , the queue will have a single element.</a:t>
+            </a:r>
           </a:p>
           <a:p>
             <a:r>
@@ -8002,13 +8354,6 @@
   <p:clrMapOvr>
     <a:masterClrMapping/>
   </p:clrMapOvr>
-  <p:timing>
-    <p:tnLst>
-      <p:par>
-        <p:cTn id="1" dur="indefinite" restart="never" nodeType="tmRoot"/>
-      </p:par>
-    </p:tnLst>
-  </p:timing>
 </p:sld>
 </file>
 
@@ -8085,27 +8430,7 @@
                 <a:latin typeface="Times New Roman" panose="02020603050405020304" pitchFamily="18" charset="0"/>
                 <a:cs typeface="Times New Roman" panose="02020603050405020304" pitchFamily="18" charset="0"/>
               </a:rPr>
-              <a:t>Q</a:t>
-            </a:r>
-            <a:r>
-              <a:rPr lang="en-US" sz="2000" dirty="0" smtClean="0">
-                <a:solidFill>
-                  <a:schemeClr val="tx2"/>
-                </a:solidFill>
-                <a:latin typeface="Times New Roman" panose="02020603050405020304" pitchFamily="18" charset="0"/>
-                <a:cs typeface="Times New Roman" panose="02020603050405020304" pitchFamily="18" charset="0"/>
-              </a:rPr>
-              <a:t>ueues </a:t>
-            </a:r>
-            <a:r>
-              <a:rPr lang="en-US" sz="2000" dirty="0">
-                <a:solidFill>
-                  <a:schemeClr val="tx2"/>
-                </a:solidFill>
-                <a:latin typeface="Times New Roman" panose="02020603050405020304" pitchFamily="18" charset="0"/>
-                <a:cs typeface="Times New Roman" panose="02020603050405020304" pitchFamily="18" charset="0"/>
-              </a:rPr>
-              <a:t>that have a fixed capacity are called bounded queues. In practical usage queues are bounded.</a:t>
+              <a:t>Queues that have a fixed capacity are called bounded queues. In practical usage queues are bounded.</a:t>
             </a:r>
           </a:p>
           <a:p>
@@ -8114,24 +8439,14 @@
               <a:buChar char="Ø"/>
             </a:pPr>
             <a:r>
-              <a:rPr lang="en-US" sz="2000" dirty="0" smtClean="0">
+              <a:rPr lang="en-US" sz="2000" dirty="0">
                 <a:solidFill>
                   <a:schemeClr val="tx2"/>
                 </a:solidFill>
                 <a:latin typeface="Times New Roman" panose="02020603050405020304" pitchFamily="18" charset="0"/>
                 <a:cs typeface="Times New Roman" panose="02020603050405020304" pitchFamily="18" charset="0"/>
               </a:rPr>
-              <a:t>Circular </a:t>
-            </a:r>
-            <a:r>
-              <a:rPr lang="en-US" sz="2000" dirty="0">
-                <a:solidFill>
-                  <a:schemeClr val="tx2"/>
-                </a:solidFill>
-                <a:latin typeface="Times New Roman" panose="02020603050405020304" pitchFamily="18" charset="0"/>
-                <a:cs typeface="Times New Roman" panose="02020603050405020304" pitchFamily="18" charset="0"/>
-              </a:rPr>
-              <a:t>queues have a fixed size, like bounded queues.</a:t>
+              <a:t>Circular queues have a fixed size, like bounded queues.</a:t>
             </a:r>
           </a:p>
           <a:p>
@@ -8140,24 +8455,14 @@
               <a:buChar char="Ø"/>
             </a:pPr>
             <a:r>
-              <a:rPr lang="en-US" sz="2000" dirty="0" smtClean="0">
+              <a:rPr lang="en-US" sz="2000" dirty="0">
                 <a:solidFill>
                   <a:schemeClr val="tx2"/>
                 </a:solidFill>
                 <a:latin typeface="Times New Roman" panose="02020603050405020304" pitchFamily="18" charset="0"/>
                 <a:cs typeface="Times New Roman" panose="02020603050405020304" pitchFamily="18" charset="0"/>
               </a:rPr>
-              <a:t>The </a:t>
-            </a:r>
-            <a:r>
-              <a:rPr lang="en-US" sz="2000" dirty="0">
-                <a:solidFill>
-                  <a:schemeClr val="tx2"/>
-                </a:solidFill>
-                <a:latin typeface="Times New Roman" panose="02020603050405020304" pitchFamily="18" charset="0"/>
-                <a:cs typeface="Times New Roman" panose="02020603050405020304" pitchFamily="18" charset="0"/>
-              </a:rPr>
-              <a:t>end of a linear queue points to NULL indicating the end of the queue, while the end of a circular queue points to the beginning of the queue, thus completing the circle.</a:t>
+              <a:t>The end of a linear queue points to NULL indicating the end of the queue, while the end of a circular queue points to the beginning of the queue, thus completing the circle.</a:t>
             </a:r>
           </a:p>
           <a:p>
@@ -8166,24 +8471,14 @@
               <a:buChar char="Ø"/>
             </a:pPr>
             <a:r>
-              <a:rPr lang="en-US" sz="2000" dirty="0" smtClean="0">
+              <a:rPr lang="en-US" sz="2000" dirty="0">
                 <a:solidFill>
                   <a:schemeClr val="tx2"/>
                 </a:solidFill>
                 <a:latin typeface="Times New Roman" panose="02020603050405020304" pitchFamily="18" charset="0"/>
                 <a:cs typeface="Times New Roman" panose="02020603050405020304" pitchFamily="18" charset="0"/>
               </a:rPr>
-              <a:t>Linear </a:t>
-            </a:r>
-            <a:r>
-              <a:rPr lang="en-US" sz="2000" dirty="0">
-                <a:solidFill>
-                  <a:schemeClr val="tx2"/>
-                </a:solidFill>
-                <a:latin typeface="Times New Roman" panose="02020603050405020304" pitchFamily="18" charset="0"/>
-                <a:cs typeface="Times New Roman" panose="02020603050405020304" pitchFamily="18" charset="0"/>
-              </a:rPr>
-              <a:t>queues do not allow overwriting of existing data. When the queue is full, new data cannot be inserted until old data is freed. Linear queues must pass both “Queue Empty” test before </a:t>
+              <a:t>Linear queues do not allow overwriting of existing data. When the queue is full, new data cannot be inserted until old data is freed. Linear queues must pass both “Queue Empty” test before </a:t>
             </a:r>
             <a:r>
               <a:rPr lang="en-US" sz="2000" dirty="0" err="1">
@@ -8232,24 +8527,14 @@
               <a:buChar char="Ø"/>
             </a:pPr>
             <a:r>
-              <a:rPr lang="en-US" sz="2000" dirty="0" smtClean="0">
+              <a:rPr lang="en-US" sz="2000" dirty="0">
                 <a:solidFill>
                   <a:schemeClr val="tx2"/>
                 </a:solidFill>
                 <a:latin typeface="Times New Roman" panose="02020603050405020304" pitchFamily="18" charset="0"/>
                 <a:cs typeface="Times New Roman" panose="02020603050405020304" pitchFamily="18" charset="0"/>
               </a:rPr>
-              <a:t>Circular </a:t>
-            </a:r>
-            <a:r>
-              <a:rPr lang="en-US" sz="2000" dirty="0">
-                <a:solidFill>
-                  <a:schemeClr val="tx2"/>
-                </a:solidFill>
-                <a:latin typeface="Times New Roman" panose="02020603050405020304" pitchFamily="18" charset="0"/>
-                <a:cs typeface="Times New Roman" panose="02020603050405020304" pitchFamily="18" charset="0"/>
-              </a:rPr>
-              <a:t>queues are only required to pass “Queue Empty” test, and depending on the application the “Queue Full” test is optional. When new data is </a:t>
+              <a:t>Circular queues are only required to pass “Queue Empty” test, and depending on the application the “Queue Full” test is optional. When new data is </a:t>
             </a:r>
             <a:r>
               <a:rPr lang="en-US" sz="2000" dirty="0" err="1">
@@ -8287,13 +8572,6 @@
   <p:clrMapOvr>
     <a:masterClrMapping/>
   </p:clrMapOvr>
-  <p:timing>
-    <p:tnLst>
-      <p:par>
-        <p:cTn id="1" dur="indefinite" restart="never" nodeType="tmRoot"/>
-      </p:par>
-    </p:tnLst>
-  </p:timing>
 </p:sld>
 </file>
 
@@ -8388,13 +8666,6 @@
   <p:clrMapOvr>
     <a:masterClrMapping/>
   </p:clrMapOvr>
-  <p:timing>
-    <p:tnLst>
-      <p:par>
-        <p:cTn id="1" dur="indefinite" restart="never" nodeType="tmRoot"/>
-      </p:par>
-    </p:tnLst>
-  </p:timing>
 </p:sld>
 </file>
 
@@ -8433,11 +8704,11 @@
           <a:lstStyle/>
           <a:p>
             <a:r>
-              <a:rPr lang="en-US" dirty="0" smtClean="0"/>
+              <a:rPr lang="en-US" dirty="0"/>
               <a:t>Algorithm to insert an element in a circular queue</a:t>
             </a:r>
             <a:br>
-              <a:rPr lang="en-US" dirty="0" smtClean="0"/>
+              <a:rPr lang="en-US" dirty="0"/>
             </a:br>
             <a:endParaRPr lang="en-US" dirty="0"/>
           </a:p>
@@ -8460,11 +8731,11 @@
           </a:bodyPr>
           <a:lstStyle/>
           <a:p>
-            <a:endParaRPr lang="en-US" dirty="0" smtClean="0"/>
-          </a:p>
-          <a:p>
-            <a:r>
-              <a:rPr lang="en-US" dirty="0" smtClean="0">
+            <a:endParaRPr lang="en-US" dirty="0"/>
+          </a:p>
+          <a:p>
+            <a:r>
+              <a:rPr lang="en-US" dirty="0">
                 <a:solidFill>
                   <a:schemeClr val="tx2"/>
                 </a:solidFill>
@@ -8474,7 +8745,7 @@
               <a:t>Insert-Circular-Q(</a:t>
             </a:r>
             <a:r>
-              <a:rPr lang="en-US" dirty="0" err="1" smtClean="0">
+              <a:rPr lang="en-US" dirty="0" err="1">
                 <a:solidFill>
                   <a:schemeClr val="tx2"/>
                 </a:solidFill>
@@ -8484,7 +8755,7 @@
               <a:t>CQueue</a:t>
             </a:r>
             <a:r>
-              <a:rPr lang="en-US" dirty="0" smtClean="0">
+              <a:rPr lang="en-US" dirty="0">
                 <a:solidFill>
                   <a:schemeClr val="tx2"/>
                 </a:solidFill>
@@ -8496,7 +8767,7 @@
           </a:p>
           <a:p>
             <a:r>
-              <a:rPr lang="en-US" dirty="0" err="1" smtClean="0">
+              <a:rPr lang="en-US" dirty="0" err="1">
                 <a:solidFill>
                   <a:schemeClr val="tx2"/>
                 </a:solidFill>
@@ -8506,7 +8777,7 @@
               <a:t>CQueue</a:t>
             </a:r>
             <a:r>
-              <a:rPr lang="en-US" dirty="0" smtClean="0">
+              <a:rPr lang="en-US" dirty="0">
                 <a:solidFill>
                   <a:schemeClr val="tx2"/>
                 </a:solidFill>
@@ -8518,7 +8789,7 @@
           </a:p>
           <a:p>
             <a:r>
-              <a:rPr lang="en-US" dirty="0" smtClean="0">
+              <a:rPr lang="en-US" dirty="0">
                 <a:solidFill>
                   <a:schemeClr val="tx2"/>
                 </a:solidFill>
@@ -8530,7 +8801,7 @@
           </a:p>
           <a:p>
             <a:r>
-              <a:rPr lang="en-US" dirty="0" smtClean="0">
+              <a:rPr lang="en-US" dirty="0">
                 <a:solidFill>
                   <a:schemeClr val="tx2"/>
                 </a:solidFill>
@@ -8540,7 +8811,7 @@
               <a:t>Here N is the maximum size of </a:t>
             </a:r>
             <a:r>
-              <a:rPr lang="en-US" dirty="0" err="1" smtClean="0">
+              <a:rPr lang="en-US" dirty="0" err="1">
                 <a:solidFill>
                   <a:schemeClr val="tx2"/>
                 </a:solidFill>
@@ -8550,7 +8821,7 @@
               <a:t>CQueue</a:t>
             </a:r>
             <a:r>
-              <a:rPr lang="en-US" dirty="0" smtClean="0">
+              <a:rPr lang="en-US" dirty="0">
                 <a:solidFill>
                   <a:schemeClr val="tx2"/>
                 </a:solidFill>
@@ -8562,7 +8833,7 @@
           </a:p>
           <a:p>
             <a:r>
-              <a:rPr lang="en-US" dirty="0" err="1" smtClean="0">
+              <a:rPr lang="en-US" dirty="0" err="1">
                 <a:solidFill>
                   <a:schemeClr val="tx2"/>
                 </a:solidFill>
@@ -8572,7 +8843,7 @@
               <a:t>Initailly</a:t>
             </a:r>
             <a:r>
-              <a:rPr lang="en-US" dirty="0" smtClean="0">
+              <a:rPr lang="en-US" dirty="0">
                 <a:solidFill>
                   <a:schemeClr val="tx2"/>
                 </a:solidFill>
@@ -8587,94 +8858,14 @@
               <a:buNone/>
             </a:pPr>
             <a:r>
-              <a:rPr lang="en-US" dirty="0" smtClean="0">
+              <a:rPr lang="en-US" dirty="0">
                 <a:solidFill>
                   <a:schemeClr val="tx2"/>
                 </a:solidFill>
                 <a:latin typeface="Times New Roman" panose="02020603050405020304" pitchFamily="18" charset="0"/>
                 <a:cs typeface="Times New Roman" panose="02020603050405020304" pitchFamily="18" charset="0"/>
               </a:rPr>
-              <a:t>            </a:t>
-            </a:r>
-            <a:r>
-              <a:rPr lang="en-US" dirty="0">
-                <a:solidFill>
-                  <a:schemeClr val="tx2"/>
-                </a:solidFill>
-                <a:latin typeface="Times New Roman" panose="02020603050405020304" pitchFamily="18" charset="0"/>
-                <a:cs typeface="Times New Roman" panose="02020603050405020304" pitchFamily="18" charset="0"/>
-              </a:rPr>
-              <a:t>1.  If Front = </a:t>
-            </a:r>
-            <a:r>
-              <a:rPr lang="en-US" dirty="0" smtClean="0">
-                <a:solidFill>
-                  <a:schemeClr val="tx2"/>
-                </a:solidFill>
-                <a:latin typeface="Times New Roman" panose="02020603050405020304" pitchFamily="18" charset="0"/>
-                <a:cs typeface="Times New Roman" panose="02020603050405020304" pitchFamily="18" charset="0"/>
-              </a:rPr>
-              <a:t>-1 </a:t>
-            </a:r>
-            <a:r>
-              <a:rPr lang="en-US" dirty="0">
-                <a:solidFill>
-                  <a:schemeClr val="tx2"/>
-                </a:solidFill>
-                <a:latin typeface="Times New Roman" panose="02020603050405020304" pitchFamily="18" charset="0"/>
-                <a:cs typeface="Times New Roman" panose="02020603050405020304" pitchFamily="18" charset="0"/>
-              </a:rPr>
-              <a:t>and Rear = </a:t>
-            </a:r>
-            <a:r>
-              <a:rPr lang="en-US" dirty="0" smtClean="0">
-                <a:solidFill>
-                  <a:schemeClr val="tx2"/>
-                </a:solidFill>
-                <a:latin typeface="Times New Roman" panose="02020603050405020304" pitchFamily="18" charset="0"/>
-                <a:cs typeface="Times New Roman" panose="02020603050405020304" pitchFamily="18" charset="0"/>
-              </a:rPr>
-              <a:t>-1 </a:t>
-            </a:r>
-            <a:r>
-              <a:rPr lang="en-US" dirty="0">
-                <a:solidFill>
-                  <a:schemeClr val="tx2"/>
-                </a:solidFill>
-                <a:latin typeface="Times New Roman" panose="02020603050405020304" pitchFamily="18" charset="0"/>
-                <a:cs typeface="Times New Roman" panose="02020603050405020304" pitchFamily="18" charset="0"/>
-              </a:rPr>
-              <a:t>then Set Front := </a:t>
-            </a:r>
-            <a:r>
-              <a:rPr lang="en-US" dirty="0" smtClean="0">
-                <a:solidFill>
-                  <a:schemeClr val="tx2"/>
-                </a:solidFill>
-                <a:latin typeface="Times New Roman" panose="02020603050405020304" pitchFamily="18" charset="0"/>
-                <a:cs typeface="Times New Roman" panose="02020603050405020304" pitchFamily="18" charset="0"/>
-              </a:rPr>
-              <a:t>0 </a:t>
-            </a:r>
-            <a:r>
-              <a:rPr lang="en-US" dirty="0">
-                <a:solidFill>
-                  <a:schemeClr val="tx2"/>
-                </a:solidFill>
-                <a:latin typeface="Times New Roman" panose="02020603050405020304" pitchFamily="18" charset="0"/>
-                <a:cs typeface="Times New Roman" panose="02020603050405020304" pitchFamily="18" charset="0"/>
-              </a:rPr>
-              <a:t>and go to step </a:t>
-            </a:r>
-            <a:r>
-              <a:rPr lang="en-US" dirty="0" smtClean="0">
-                <a:solidFill>
-                  <a:schemeClr val="tx2"/>
-                </a:solidFill>
-                <a:latin typeface="Times New Roman" panose="02020603050405020304" pitchFamily="18" charset="0"/>
-                <a:cs typeface="Times New Roman" panose="02020603050405020304" pitchFamily="18" charset="0"/>
-              </a:rPr>
-              <a:t>3. </a:t>
+              <a:t>            1.  If Front = -1 and Rear = -1 then Set Front := 0 and go to step 3. </a:t>
             </a:r>
           </a:p>
           <a:p>
@@ -8689,95 +8880,8 @@
                 <a:latin typeface="Times New Roman" panose="02020603050405020304" pitchFamily="18" charset="0"/>
                 <a:cs typeface="Times New Roman" panose="02020603050405020304" pitchFamily="18" charset="0"/>
               </a:rPr>
-              <a:t> </a:t>
-            </a:r>
-            <a:r>
-              <a:rPr lang="en-US" dirty="0" smtClean="0">
-                <a:solidFill>
-                  <a:schemeClr val="tx2"/>
-                </a:solidFill>
-                <a:latin typeface="Times New Roman" panose="02020603050405020304" pitchFamily="18" charset="0"/>
-                <a:cs typeface="Times New Roman" panose="02020603050405020304" pitchFamily="18" charset="0"/>
-              </a:rPr>
-              <a:t>           2</a:t>
-            </a:r>
-            <a:r>
-              <a:rPr lang="en-US" dirty="0">
-                <a:solidFill>
-                  <a:schemeClr val="tx2"/>
-                </a:solidFill>
-                <a:latin typeface="Times New Roman" panose="02020603050405020304" pitchFamily="18" charset="0"/>
-                <a:cs typeface="Times New Roman" panose="02020603050405020304" pitchFamily="18" charset="0"/>
-              </a:rPr>
-              <a:t>.  If  </a:t>
-            </a:r>
-            <a:r>
-              <a:rPr lang="en-US" dirty="0" smtClean="0">
-                <a:solidFill>
-                  <a:schemeClr val="tx2"/>
-                </a:solidFill>
-                <a:latin typeface="Times New Roman" panose="02020603050405020304" pitchFamily="18" charset="0"/>
-                <a:cs typeface="Times New Roman" panose="02020603050405020304" pitchFamily="18" charset="0"/>
-              </a:rPr>
-              <a:t>Front </a:t>
-            </a:r>
-            <a:r>
-              <a:rPr lang="en-US" dirty="0">
-                <a:solidFill>
-                  <a:schemeClr val="tx2"/>
-                </a:solidFill>
-                <a:latin typeface="Times New Roman" panose="02020603050405020304" pitchFamily="18" charset="0"/>
-                <a:cs typeface="Times New Roman" panose="02020603050405020304" pitchFamily="18" charset="0"/>
-              </a:rPr>
-              <a:t>= </a:t>
-            </a:r>
-            <a:r>
-              <a:rPr lang="en-US" dirty="0" smtClean="0">
-                <a:solidFill>
-                  <a:schemeClr val="tx2"/>
-                </a:solidFill>
-                <a:latin typeface="Times New Roman" panose="02020603050405020304" pitchFamily="18" charset="0"/>
-                <a:cs typeface="Times New Roman" panose="02020603050405020304" pitchFamily="18" charset="0"/>
-              </a:rPr>
-              <a:t>(Rear </a:t>
-            </a:r>
-            <a:r>
-              <a:rPr lang="en-US" dirty="0">
-                <a:solidFill>
-                  <a:schemeClr val="tx2"/>
-                </a:solidFill>
-                <a:latin typeface="Times New Roman" panose="02020603050405020304" pitchFamily="18" charset="0"/>
-                <a:cs typeface="Times New Roman" panose="02020603050405020304" pitchFamily="18" charset="0"/>
-              </a:rPr>
-              <a:t>+ </a:t>
-            </a:r>
-            <a:r>
-              <a:rPr lang="en-US" dirty="0" smtClean="0">
-                <a:solidFill>
-                  <a:schemeClr val="tx2"/>
-                </a:solidFill>
-                <a:latin typeface="Times New Roman" panose="02020603050405020304" pitchFamily="18" charset="0"/>
-                <a:cs typeface="Times New Roman" panose="02020603050405020304" pitchFamily="18" charset="0"/>
-              </a:rPr>
-              <a:t>1)%size </a:t>
-            </a:r>
-            <a:r>
-              <a:rPr lang="en-US" dirty="0">
-                <a:solidFill>
-                  <a:schemeClr val="tx2"/>
-                </a:solidFill>
-                <a:latin typeface="Times New Roman" panose="02020603050405020304" pitchFamily="18" charset="0"/>
-                <a:cs typeface="Times New Roman" panose="02020603050405020304" pitchFamily="18" charset="0"/>
-              </a:rPr>
-              <a:t>then Print: “Circular Queue Overflow” and Return. </a:t>
-            </a:r>
-            <a:endParaRPr lang="en-US" dirty="0" smtClean="0">
-              <a:solidFill>
-                <a:schemeClr val="tx2"/>
-              </a:solidFill>
-              <a:latin typeface="Times New Roman" panose="02020603050405020304" pitchFamily="18" charset="0"/>
-              <a:cs typeface="Times New Roman" panose="02020603050405020304" pitchFamily="18" charset="0"/>
-            </a:endParaRPr>
+              <a:t>            2.  If  Front = (Rear + 1)%size then Print: “Circular Queue Overflow” and Return. </a:t>
+            </a:r>
           </a:p>
           <a:p>
             <a:pPr marL="0" indent="0">
@@ -8791,55 +8895,8 @@
                 <a:latin typeface="Times New Roman" panose="02020603050405020304" pitchFamily="18" charset="0"/>
                 <a:cs typeface="Times New Roman" panose="02020603050405020304" pitchFamily="18" charset="0"/>
               </a:rPr>
-              <a:t> </a:t>
-            </a:r>
-            <a:r>
-              <a:rPr lang="en-US" dirty="0" smtClean="0">
-                <a:solidFill>
-                  <a:schemeClr val="tx2"/>
-                </a:solidFill>
-                <a:latin typeface="Times New Roman" panose="02020603050405020304" pitchFamily="18" charset="0"/>
-                <a:cs typeface="Times New Roman" panose="02020603050405020304" pitchFamily="18" charset="0"/>
-              </a:rPr>
-              <a:t>           </a:t>
-            </a:r>
-            <a:r>
-              <a:rPr lang="en-US" dirty="0">
-                <a:solidFill>
-                  <a:schemeClr val="tx2"/>
-                </a:solidFill>
-                <a:latin typeface="Times New Roman" panose="02020603050405020304" pitchFamily="18" charset="0"/>
-                <a:cs typeface="Times New Roman" panose="02020603050405020304" pitchFamily="18" charset="0"/>
-              </a:rPr>
-              <a:t>3</a:t>
-            </a:r>
-            <a:r>
-              <a:rPr lang="en-US" dirty="0" smtClean="0">
-                <a:solidFill>
-                  <a:schemeClr val="tx2"/>
-                </a:solidFill>
-                <a:latin typeface="Times New Roman" panose="02020603050405020304" pitchFamily="18" charset="0"/>
-                <a:cs typeface="Times New Roman" panose="02020603050405020304" pitchFamily="18" charset="0"/>
-              </a:rPr>
-              <a:t>.  </a:t>
-            </a:r>
-            <a:r>
-              <a:rPr lang="en-US" dirty="0">
-                <a:solidFill>
-                  <a:schemeClr val="tx2"/>
-                </a:solidFill>
-                <a:latin typeface="Times New Roman" panose="02020603050405020304" pitchFamily="18" charset="0"/>
-                <a:cs typeface="Times New Roman" panose="02020603050405020304" pitchFamily="18" charset="0"/>
-              </a:rPr>
-              <a:t>Set Rear := Rear + 1 </a:t>
-            </a:r>
-            <a:endParaRPr lang="en-US" dirty="0" smtClean="0">
-              <a:solidFill>
-                <a:schemeClr val="tx2"/>
-              </a:solidFill>
-              <a:latin typeface="Times New Roman" panose="02020603050405020304" pitchFamily="18" charset="0"/>
-              <a:cs typeface="Times New Roman" panose="02020603050405020304" pitchFamily="18" charset="0"/>
-            </a:endParaRPr>
+              <a:t>            3.  Set Rear := Rear + 1 </a:t>
+            </a:r>
           </a:p>
           <a:p>
             <a:pPr marL="0" indent="0">
@@ -8853,17 +8910,17 @@
                 <a:latin typeface="Times New Roman" panose="02020603050405020304" pitchFamily="18" charset="0"/>
                 <a:cs typeface="Times New Roman" panose="02020603050405020304" pitchFamily="18" charset="0"/>
               </a:rPr>
-              <a:t> </a:t>
-            </a:r>
-            <a:r>
-              <a:rPr lang="en-US" dirty="0" smtClean="0">
+              <a:t>            4.  Set </a:t>
+            </a:r>
+            <a:r>
+              <a:rPr lang="en-US" dirty="0" err="1">
                 <a:solidFill>
                   <a:schemeClr val="tx2"/>
                 </a:solidFill>
                 <a:latin typeface="Times New Roman" panose="02020603050405020304" pitchFamily="18" charset="0"/>
                 <a:cs typeface="Times New Roman" panose="02020603050405020304" pitchFamily="18" charset="0"/>
               </a:rPr>
-              <a:t>           4.  </a:t>
+              <a:t>CQueue</a:t>
             </a:r>
             <a:r>
               <a:rPr lang="en-US" dirty="0">
@@ -8873,35 +8930,8 @@
                 <a:latin typeface="Times New Roman" panose="02020603050405020304" pitchFamily="18" charset="0"/>
                 <a:cs typeface="Times New Roman" panose="02020603050405020304" pitchFamily="18" charset="0"/>
               </a:rPr>
-              <a:t>Set </a:t>
-            </a:r>
-            <a:r>
-              <a:rPr lang="en-US" dirty="0" err="1">
-                <a:solidFill>
-                  <a:schemeClr val="tx2"/>
-                </a:solidFill>
-                <a:latin typeface="Times New Roman" panose="02020603050405020304" pitchFamily="18" charset="0"/>
-                <a:cs typeface="Times New Roman" panose="02020603050405020304" pitchFamily="18" charset="0"/>
-              </a:rPr>
-              <a:t>CQueue</a:t>
-            </a:r>
-            <a:r>
-              <a:rPr lang="en-US" dirty="0">
-                <a:solidFill>
-                  <a:schemeClr val="tx2"/>
-                </a:solidFill>
-                <a:latin typeface="Times New Roman" panose="02020603050405020304" pitchFamily="18" charset="0"/>
-                <a:cs typeface="Times New Roman" panose="02020603050405020304" pitchFamily="18" charset="0"/>
-              </a:rPr>
               <a:t> [Rear] := Item. </a:t>
             </a:r>
-            <a:endParaRPr lang="en-US" dirty="0" smtClean="0">
-              <a:solidFill>
-                <a:schemeClr val="tx2"/>
-              </a:solidFill>
-              <a:latin typeface="Times New Roman" panose="02020603050405020304" pitchFamily="18" charset="0"/>
-              <a:cs typeface="Times New Roman" panose="02020603050405020304" pitchFamily="18" charset="0"/>
-            </a:endParaRPr>
           </a:p>
           <a:p>
             <a:pPr marL="0" indent="0">
@@ -8915,27 +8945,7 @@
                 <a:latin typeface="Times New Roman" panose="02020603050405020304" pitchFamily="18" charset="0"/>
                 <a:cs typeface="Times New Roman" panose="02020603050405020304" pitchFamily="18" charset="0"/>
               </a:rPr>
-              <a:t> </a:t>
-            </a:r>
-            <a:r>
-              <a:rPr lang="en-US" dirty="0" smtClean="0">
-                <a:solidFill>
-                  <a:schemeClr val="tx2"/>
-                </a:solidFill>
-                <a:latin typeface="Times New Roman" panose="02020603050405020304" pitchFamily="18" charset="0"/>
-                <a:cs typeface="Times New Roman" panose="02020603050405020304" pitchFamily="18" charset="0"/>
-              </a:rPr>
-              <a:t>           5.  </a:t>
-            </a:r>
-            <a:r>
-              <a:rPr lang="en-US" dirty="0">
-                <a:solidFill>
-                  <a:schemeClr val="tx2"/>
-                </a:solidFill>
-                <a:latin typeface="Times New Roman" panose="02020603050405020304" pitchFamily="18" charset="0"/>
-                <a:cs typeface="Times New Roman" panose="02020603050405020304" pitchFamily="18" charset="0"/>
-              </a:rPr>
-              <a:t>Return</a:t>
+              <a:t>            5.  Return</a:t>
             </a:r>
           </a:p>
         </p:txBody>
@@ -8950,13 +8960,6 @@
   <p:clrMapOvr>
     <a:masterClrMapping/>
   </p:clrMapOvr>
-  <p:timing>
-    <p:tnLst>
-      <p:par>
-        <p:cTn id="1" dur="indefinite" restart="never" nodeType="tmRoot"/>
-      </p:par>
-    </p:tnLst>
-  </p:timing>
 </p:sld>
 </file>
 
@@ -8996,15 +8999,7 @@
           <a:p>
             <a:r>
               <a:rPr lang="en-US" dirty="0"/>
-              <a:t>Algorithm to </a:t>
-            </a:r>
-            <a:r>
-              <a:rPr lang="en-US" dirty="0" smtClean="0"/>
-              <a:t>Delete an </a:t>
-            </a:r>
-            <a:r>
-              <a:rPr lang="en-US" dirty="0"/>
-              <a:t>element in a circular queue</a:t>
+              <a:t>Algorithm to Delete an element in a circular queue</a:t>
             </a:r>
           </a:p>
         </p:txBody>
@@ -9024,7 +9019,7 @@
           <a:bodyPr/>
           <a:lstStyle/>
           <a:p>
-            <a:endParaRPr lang="en-US" dirty="0" smtClean="0"/>
+            <a:endParaRPr lang="en-US" dirty="0"/>
           </a:p>
           <a:p>
             <a:r>
@@ -9055,29 +9050,29 @@
                 <a:latin typeface="Times New Roman" panose="02020603050405020304" pitchFamily="18" charset="0"/>
                 <a:cs typeface="Times New Roman" panose="02020603050405020304" pitchFamily="18" charset="0"/>
               </a:rPr>
-              <a:t>, Front, Rear, Item</a:t>
-            </a:r>
-            <a:r>
-              <a:rPr lang="en-US" sz="2000" dirty="0" smtClean="0">
+              <a:t>, Front, Rear, Item)</a:t>
+            </a:r>
+          </a:p>
+          <a:p>
+            <a:r>
+              <a:rPr lang="en-US" sz="2000" dirty="0">
                 <a:solidFill>
                   <a:schemeClr val="tx2"/>
                 </a:solidFill>
                 <a:latin typeface="Times New Roman" panose="02020603050405020304" pitchFamily="18" charset="0"/>
                 <a:cs typeface="Times New Roman" panose="02020603050405020304" pitchFamily="18" charset="0"/>
               </a:rPr>
-              <a:t>)</a:t>
-            </a:r>
-          </a:p>
-          <a:p>
-            <a:r>
-              <a:rPr lang="en-US" sz="2000" dirty="0" smtClean="0">
+              <a:t>Here, </a:t>
+            </a:r>
+            <a:r>
+              <a:rPr lang="en-US" sz="2000" dirty="0" err="1">
                 <a:solidFill>
                   <a:schemeClr val="tx2"/>
                 </a:solidFill>
                 <a:latin typeface="Times New Roman" panose="02020603050405020304" pitchFamily="18" charset="0"/>
                 <a:cs typeface="Times New Roman" panose="02020603050405020304" pitchFamily="18" charset="0"/>
               </a:rPr>
-              <a:t>Here</a:t>
+              <a:t>CQueue</a:t>
             </a:r>
             <a:r>
               <a:rPr lang="en-US" sz="2000" dirty="0">
@@ -9087,47 +9082,7 @@
                 <a:latin typeface="Times New Roman" panose="02020603050405020304" pitchFamily="18" charset="0"/>
                 <a:cs typeface="Times New Roman" panose="02020603050405020304" pitchFamily="18" charset="0"/>
               </a:rPr>
-              <a:t>, </a:t>
-            </a:r>
-            <a:r>
-              <a:rPr lang="en-US" sz="2000" dirty="0" err="1">
-                <a:solidFill>
-                  <a:schemeClr val="tx2"/>
-                </a:solidFill>
-                <a:latin typeface="Times New Roman" panose="02020603050405020304" pitchFamily="18" charset="0"/>
-                <a:cs typeface="Times New Roman" panose="02020603050405020304" pitchFamily="18" charset="0"/>
-              </a:rPr>
-              <a:t>CQueue</a:t>
-            </a:r>
-            <a:r>
-              <a:rPr lang="en-US" sz="2000" dirty="0">
-                <a:solidFill>
-                  <a:schemeClr val="tx2"/>
-                </a:solidFill>
-                <a:latin typeface="Times New Roman" panose="02020603050405020304" pitchFamily="18" charset="0"/>
-                <a:cs typeface="Times New Roman" panose="02020603050405020304" pitchFamily="18" charset="0"/>
-              </a:rPr>
-              <a:t> is the place where data are stored. Rear represents the location in which the data element is to be inserted and Front represents the location from which the data element is to be removed. Front element is assigned to Item. Initially, Front = </a:t>
-            </a:r>
-            <a:r>
-              <a:rPr lang="en-US" sz="2000" dirty="0" smtClean="0">
-                <a:solidFill>
-                  <a:schemeClr val="tx2"/>
-                </a:solidFill>
-                <a:latin typeface="Times New Roman" panose="02020603050405020304" pitchFamily="18" charset="0"/>
-                <a:cs typeface="Times New Roman" panose="02020603050405020304" pitchFamily="18" charset="0"/>
-              </a:rPr>
-              <a:t>-1</a:t>
-            </a:r>
-            <a:r>
-              <a:rPr lang="en-US" sz="2000" dirty="0">
-                <a:solidFill>
-                  <a:schemeClr val="tx2"/>
-                </a:solidFill>
-                <a:latin typeface="Times New Roman" panose="02020603050405020304" pitchFamily="18" charset="0"/>
-                <a:cs typeface="Times New Roman" panose="02020603050405020304" pitchFamily="18" charset="0"/>
-              </a:rPr>
-              <a:t>.</a:t>
+              <a:t> is the place where data are stored. Rear represents the location in which the data element is to be inserted and Front represents the location from which the data element is to be removed. Front element is assigned to Item. Initially, Front = -1.</a:t>
             </a:r>
           </a:p>
           <a:p>
@@ -9135,52 +9090,15 @@
               <a:buNone/>
             </a:pPr>
             <a:r>
-              <a:rPr lang="en-US" sz="2000" dirty="0" smtClean="0">
+              <a:rPr lang="en-US" sz="2000" dirty="0">
                 <a:solidFill>
                   <a:schemeClr val="tx2"/>
                 </a:solidFill>
                 <a:latin typeface="Times New Roman" panose="02020603050405020304" pitchFamily="18" charset="0"/>
                 <a:cs typeface="Times New Roman" panose="02020603050405020304" pitchFamily="18" charset="0"/>
               </a:rPr>
-              <a:t>            1</a:t>
-            </a:r>
-            <a:r>
-              <a:rPr lang="en-US" sz="2000" dirty="0">
-                <a:solidFill>
-                  <a:schemeClr val="tx2"/>
-                </a:solidFill>
-                <a:latin typeface="Times New Roman" panose="02020603050405020304" pitchFamily="18" charset="0"/>
-                <a:cs typeface="Times New Roman" panose="02020603050405020304" pitchFamily="18" charset="0"/>
-              </a:rPr>
-              <a:t>. If Front = </a:t>
-            </a:r>
-            <a:r>
-              <a:rPr lang="en-US" sz="2000" dirty="0" smtClean="0">
-                <a:solidFill>
-                  <a:schemeClr val="tx2"/>
-                </a:solidFill>
-                <a:latin typeface="Times New Roman" panose="02020603050405020304" pitchFamily="18" charset="0"/>
-                <a:cs typeface="Times New Roman" panose="02020603050405020304" pitchFamily="18" charset="0"/>
-              </a:rPr>
-              <a:t>-1 </a:t>
-            </a:r>
-            <a:r>
-              <a:rPr lang="en-US" sz="2000" dirty="0">
-                <a:solidFill>
-                  <a:schemeClr val="tx2"/>
-                </a:solidFill>
-                <a:latin typeface="Times New Roman" panose="02020603050405020304" pitchFamily="18" charset="0"/>
-                <a:cs typeface="Times New Roman" panose="02020603050405020304" pitchFamily="18" charset="0"/>
-              </a:rPr>
-              <a:t>then Print: “Circular Queue Underflow” and Return.         /*..Delete without Insertion </a:t>
-            </a:r>
-            <a:endParaRPr lang="en-US" sz="2000" dirty="0" smtClean="0">
-              <a:solidFill>
-                <a:schemeClr val="tx2"/>
-              </a:solidFill>
-              <a:latin typeface="Times New Roman" panose="02020603050405020304" pitchFamily="18" charset="0"/>
-              <a:cs typeface="Times New Roman" panose="02020603050405020304" pitchFamily="18" charset="0"/>
-            </a:endParaRPr>
+              <a:t>            1. If Front = -1 then Print: “Circular Queue Underflow” and Return.         /*..Delete without Insertion </a:t>
+            </a:r>
           </a:p>
           <a:p>
             <a:pPr marL="0" indent="0">
@@ -9194,17 +9112,17 @@
                 <a:latin typeface="Times New Roman" panose="02020603050405020304" pitchFamily="18" charset="0"/>
                 <a:cs typeface="Times New Roman" panose="02020603050405020304" pitchFamily="18" charset="0"/>
               </a:rPr>
-              <a:t> </a:t>
-            </a:r>
-            <a:r>
-              <a:rPr lang="en-US" sz="2000" dirty="0" smtClean="0">
+              <a:t>            2. Set Item := </a:t>
+            </a:r>
+            <a:r>
+              <a:rPr lang="en-US" sz="2000" dirty="0" err="1">
                 <a:solidFill>
                   <a:schemeClr val="tx2"/>
                 </a:solidFill>
                 <a:latin typeface="Times New Roman" panose="02020603050405020304" pitchFamily="18" charset="0"/>
                 <a:cs typeface="Times New Roman" panose="02020603050405020304" pitchFamily="18" charset="0"/>
               </a:rPr>
-              <a:t>           2</a:t>
+              <a:t>CQueue</a:t>
             </a:r>
             <a:r>
               <a:rPr lang="en-US" sz="2000" dirty="0">
@@ -9214,35 +9132,8 @@
                 <a:latin typeface="Times New Roman" panose="02020603050405020304" pitchFamily="18" charset="0"/>
                 <a:cs typeface="Times New Roman" panose="02020603050405020304" pitchFamily="18" charset="0"/>
               </a:rPr>
-              <a:t>. Set Item := </a:t>
-            </a:r>
-            <a:r>
-              <a:rPr lang="en-US" sz="2000" dirty="0" err="1">
-                <a:solidFill>
-                  <a:schemeClr val="tx2"/>
-                </a:solidFill>
-                <a:latin typeface="Times New Roman" panose="02020603050405020304" pitchFamily="18" charset="0"/>
-                <a:cs typeface="Times New Roman" panose="02020603050405020304" pitchFamily="18" charset="0"/>
-              </a:rPr>
-              <a:t>CQueue</a:t>
-            </a:r>
-            <a:r>
-              <a:rPr lang="en-US" sz="2000" dirty="0">
-                <a:solidFill>
-                  <a:schemeClr val="tx2"/>
-                </a:solidFill>
-                <a:latin typeface="Times New Roman" panose="02020603050405020304" pitchFamily="18" charset="0"/>
-                <a:cs typeface="Times New Roman" panose="02020603050405020304" pitchFamily="18" charset="0"/>
-              </a:rPr>
               <a:t> [Front] </a:t>
             </a:r>
-            <a:endParaRPr lang="en-US" sz="2000" dirty="0" smtClean="0">
-              <a:solidFill>
-                <a:schemeClr val="tx2"/>
-              </a:solidFill>
-              <a:latin typeface="Times New Roman" panose="02020603050405020304" pitchFamily="18" charset="0"/>
-              <a:cs typeface="Times New Roman" panose="02020603050405020304" pitchFamily="18" charset="0"/>
-            </a:endParaRPr>
           </a:p>
           <a:p>
             <a:pPr marL="0" indent="0">
@@ -9256,75 +9147,8 @@
                 <a:latin typeface="Times New Roman" panose="02020603050405020304" pitchFamily="18" charset="0"/>
                 <a:cs typeface="Times New Roman" panose="02020603050405020304" pitchFamily="18" charset="0"/>
               </a:rPr>
-              <a:t> </a:t>
-            </a:r>
-            <a:r>
-              <a:rPr lang="en-US" sz="2000" dirty="0" smtClean="0">
-                <a:solidFill>
-                  <a:schemeClr val="tx2"/>
-                </a:solidFill>
-                <a:latin typeface="Times New Roman" panose="02020603050405020304" pitchFamily="18" charset="0"/>
-                <a:cs typeface="Times New Roman" panose="02020603050405020304" pitchFamily="18" charset="0"/>
-              </a:rPr>
-              <a:t>           3</a:t>
-            </a:r>
-            <a:r>
-              <a:rPr lang="en-US" sz="2000" dirty="0">
-                <a:solidFill>
-                  <a:schemeClr val="tx2"/>
-                </a:solidFill>
-                <a:latin typeface="Times New Roman" panose="02020603050405020304" pitchFamily="18" charset="0"/>
-                <a:cs typeface="Times New Roman" panose="02020603050405020304" pitchFamily="18" charset="0"/>
-              </a:rPr>
-              <a:t>. If Front = </a:t>
-            </a:r>
-            <a:r>
-              <a:rPr lang="en-US" sz="2000" dirty="0" smtClean="0">
-                <a:solidFill>
-                  <a:schemeClr val="tx2"/>
-                </a:solidFill>
-                <a:latin typeface="Times New Roman" panose="02020603050405020304" pitchFamily="18" charset="0"/>
-                <a:cs typeface="Times New Roman" panose="02020603050405020304" pitchFamily="18" charset="0"/>
-              </a:rPr>
-              <a:t>N-1 </a:t>
-            </a:r>
-            <a:r>
-              <a:rPr lang="en-US" sz="2000" dirty="0">
-                <a:solidFill>
-                  <a:schemeClr val="tx2"/>
-                </a:solidFill>
-                <a:latin typeface="Times New Roman" panose="02020603050405020304" pitchFamily="18" charset="0"/>
-                <a:cs typeface="Times New Roman" panose="02020603050405020304" pitchFamily="18" charset="0"/>
-              </a:rPr>
-              <a:t>then Set Front = 0</a:t>
-            </a:r>
-            <a:r>
-              <a:rPr lang="en-US" sz="2000" dirty="0" smtClean="0">
-                <a:solidFill>
-                  <a:schemeClr val="tx2"/>
-                </a:solidFill>
-                <a:latin typeface="Times New Roman" panose="02020603050405020304" pitchFamily="18" charset="0"/>
-                <a:cs typeface="Times New Roman" panose="02020603050405020304" pitchFamily="18" charset="0"/>
-              </a:rPr>
-              <a:t> </a:t>
-            </a:r>
-            <a:r>
-              <a:rPr lang="en-US" sz="2000" dirty="0">
-                <a:solidFill>
-                  <a:schemeClr val="tx2"/>
-                </a:solidFill>
-                <a:latin typeface="Times New Roman" panose="02020603050405020304" pitchFamily="18" charset="0"/>
-                <a:cs typeface="Times New Roman" panose="02020603050405020304" pitchFamily="18" charset="0"/>
-              </a:rPr>
-              <a:t>and Return. </a:t>
-            </a:r>
-            <a:endParaRPr lang="en-US" sz="2000" dirty="0" smtClean="0">
-              <a:solidFill>
-                <a:schemeClr val="tx2"/>
-              </a:solidFill>
-              <a:latin typeface="Times New Roman" panose="02020603050405020304" pitchFamily="18" charset="0"/>
-              <a:cs typeface="Times New Roman" panose="02020603050405020304" pitchFamily="18" charset="0"/>
-            </a:endParaRPr>
+              <a:t>            3. If Front = N-1 then Set Front = 0 and Return. </a:t>
+            </a:r>
           </a:p>
           <a:p>
             <a:pPr marL="0" indent="0">
@@ -9338,77 +9162,7 @@
                 <a:latin typeface="Times New Roman" panose="02020603050405020304" pitchFamily="18" charset="0"/>
                 <a:cs typeface="Times New Roman" panose="02020603050405020304" pitchFamily="18" charset="0"/>
               </a:rPr>
-              <a:t> </a:t>
-            </a:r>
-            <a:r>
-              <a:rPr lang="en-US" sz="2000" dirty="0" smtClean="0">
-                <a:solidFill>
-                  <a:schemeClr val="tx2"/>
-                </a:solidFill>
-                <a:latin typeface="Times New Roman" panose="02020603050405020304" pitchFamily="18" charset="0"/>
-                <a:cs typeface="Times New Roman" panose="02020603050405020304" pitchFamily="18" charset="0"/>
-              </a:rPr>
-              <a:t>           4</a:t>
-            </a:r>
-            <a:r>
-              <a:rPr lang="en-US" sz="2000" dirty="0">
-                <a:solidFill>
-                  <a:schemeClr val="tx2"/>
-                </a:solidFill>
-                <a:latin typeface="Times New Roman" panose="02020603050405020304" pitchFamily="18" charset="0"/>
-                <a:cs typeface="Times New Roman" panose="02020603050405020304" pitchFamily="18" charset="0"/>
-              </a:rPr>
-              <a:t>. If Front = Rear then Set Front = </a:t>
-            </a:r>
-            <a:r>
-              <a:rPr lang="en-US" sz="2000" dirty="0" smtClean="0">
-                <a:solidFill>
-                  <a:schemeClr val="tx2"/>
-                </a:solidFill>
-                <a:latin typeface="Times New Roman" panose="02020603050405020304" pitchFamily="18" charset="0"/>
-                <a:cs typeface="Times New Roman" panose="02020603050405020304" pitchFamily="18" charset="0"/>
-              </a:rPr>
-              <a:t>-1 </a:t>
-            </a:r>
-            <a:r>
-              <a:rPr lang="en-US" sz="2000" dirty="0">
-                <a:solidFill>
-                  <a:schemeClr val="tx2"/>
-                </a:solidFill>
-                <a:latin typeface="Times New Roman" panose="02020603050405020304" pitchFamily="18" charset="0"/>
-                <a:cs typeface="Times New Roman" panose="02020603050405020304" pitchFamily="18" charset="0"/>
-              </a:rPr>
-              <a:t>and Rear = </a:t>
-            </a:r>
-            <a:r>
-              <a:rPr lang="en-US" sz="2000" dirty="0" smtClean="0">
-                <a:solidFill>
-                  <a:schemeClr val="tx2"/>
-                </a:solidFill>
-                <a:latin typeface="Times New Roman" panose="02020603050405020304" pitchFamily="18" charset="0"/>
-                <a:cs typeface="Times New Roman" panose="02020603050405020304" pitchFamily="18" charset="0"/>
-              </a:rPr>
-              <a:t>-1 </a:t>
-            </a:r>
-            <a:r>
-              <a:rPr lang="en-US" sz="2000" dirty="0">
-                <a:solidFill>
-                  <a:schemeClr val="tx2"/>
-                </a:solidFill>
-                <a:latin typeface="Times New Roman" panose="02020603050405020304" pitchFamily="18" charset="0"/>
-                <a:cs typeface="Times New Roman" panose="02020603050405020304" pitchFamily="18" charset="0"/>
-              </a:rPr>
-              <a:t>and Return</a:t>
-            </a:r>
-            <a:r>
-              <a:rPr lang="en-US" sz="2000" dirty="0" smtClean="0">
-                <a:solidFill>
-                  <a:schemeClr val="tx2"/>
-                </a:solidFill>
-                <a:latin typeface="Times New Roman" panose="02020603050405020304" pitchFamily="18" charset="0"/>
-                <a:cs typeface="Times New Roman" panose="02020603050405020304" pitchFamily="18" charset="0"/>
-              </a:rPr>
-              <a:t>.</a:t>
+              <a:t>            4. If Front = Rear then Set Front = -1 and Rear = -1 and Return.</a:t>
             </a:r>
           </a:p>
           <a:p>
@@ -9423,35 +9177,8 @@
                 <a:latin typeface="Times New Roman" panose="02020603050405020304" pitchFamily="18" charset="0"/>
                 <a:cs typeface="Times New Roman" panose="02020603050405020304" pitchFamily="18" charset="0"/>
               </a:rPr>
-              <a:t> </a:t>
-            </a:r>
-            <a:r>
-              <a:rPr lang="en-US" sz="2000" dirty="0" smtClean="0">
-                <a:solidFill>
-                  <a:schemeClr val="tx2"/>
-                </a:solidFill>
-                <a:latin typeface="Times New Roman" panose="02020603050405020304" pitchFamily="18" charset="0"/>
-                <a:cs typeface="Times New Roman" panose="02020603050405020304" pitchFamily="18" charset="0"/>
-              </a:rPr>
-              <a:t>           </a:t>
-            </a:r>
-            <a:r>
-              <a:rPr lang="en-US" sz="2000" dirty="0">
-                <a:solidFill>
-                  <a:schemeClr val="tx2"/>
-                </a:solidFill>
-                <a:latin typeface="Times New Roman" panose="02020603050405020304" pitchFamily="18" charset="0"/>
-                <a:cs typeface="Times New Roman" panose="02020603050405020304" pitchFamily="18" charset="0"/>
-              </a:rPr>
-              <a:t>5. Set Front := Front + 1 </a:t>
-            </a:r>
-            <a:endParaRPr lang="en-US" sz="2000" dirty="0" smtClean="0">
-              <a:solidFill>
-                <a:schemeClr val="tx2"/>
-              </a:solidFill>
-              <a:latin typeface="Times New Roman" panose="02020603050405020304" pitchFamily="18" charset="0"/>
-              <a:cs typeface="Times New Roman" panose="02020603050405020304" pitchFamily="18" charset="0"/>
-            </a:endParaRPr>
+              <a:t>            5. Set Front := Front + 1 </a:t>
+            </a:r>
           </a:p>
           <a:p>
             <a:pPr marL="0" indent="0">
@@ -9465,27 +9192,7 @@
                 <a:latin typeface="Times New Roman" panose="02020603050405020304" pitchFamily="18" charset="0"/>
                 <a:cs typeface="Times New Roman" panose="02020603050405020304" pitchFamily="18" charset="0"/>
               </a:rPr>
-              <a:t> </a:t>
-            </a:r>
-            <a:r>
-              <a:rPr lang="en-US" sz="2000" dirty="0" smtClean="0">
-                <a:solidFill>
-                  <a:schemeClr val="tx2"/>
-                </a:solidFill>
-                <a:latin typeface="Times New Roman" panose="02020603050405020304" pitchFamily="18" charset="0"/>
-                <a:cs typeface="Times New Roman" panose="02020603050405020304" pitchFamily="18" charset="0"/>
-              </a:rPr>
-              <a:t>           6</a:t>
-            </a:r>
-            <a:r>
-              <a:rPr lang="en-US" sz="2000" dirty="0">
-                <a:solidFill>
-                  <a:schemeClr val="tx2"/>
-                </a:solidFill>
-                <a:latin typeface="Times New Roman" panose="02020603050405020304" pitchFamily="18" charset="0"/>
-                <a:cs typeface="Times New Roman" panose="02020603050405020304" pitchFamily="18" charset="0"/>
-              </a:rPr>
-              <a:t>. Return.</a:t>
+              <a:t>            6. Return.</a:t>
             </a:r>
           </a:p>
         </p:txBody>
@@ -9500,13 +9207,6 @@
   <p:clrMapOvr>
     <a:masterClrMapping/>
   </p:clrMapOvr>
-  <p:timing>
-    <p:tnLst>
-      <p:par>
-        <p:cTn id="1" dur="indefinite" restart="never" nodeType="tmRoot"/>
-      </p:par>
-    </p:tnLst>
-  </p:timing>
 </p:sld>
 </file>
 
@@ -9599,13 +9299,6 @@
   <p:clrMapOvr>
     <a:masterClrMapping/>
   </p:clrMapOvr>
-  <p:timing>
-    <p:tnLst>
-      <p:par>
-        <p:cTn id="1" dur="indefinite" restart="never" nodeType="tmRoot"/>
-      </p:par>
-    </p:tnLst>
-  </p:timing>
 </p:sld>
 </file>
 
@@ -9698,13 +9391,6 @@
   <p:clrMapOvr>
     <a:masterClrMapping/>
   </p:clrMapOvr>
-  <p:timing>
-    <p:tnLst>
-      <p:par>
-        <p:cTn id="1" dur="indefinite" restart="never" nodeType="tmRoot"/>
-      </p:par>
-    </p:tnLst>
-  </p:timing>
 </p:sld>
 </file>
 
@@ -9741,10 +9427,9 @@
           <a:lstStyle/>
           <a:p>
             <a:r>
-              <a:rPr lang="en-US" dirty="0" smtClean="0"/>
+              <a:rPr lang="en-US" dirty="0"/>
               <a:t>Insertion</a:t>
             </a:r>
-            <a:endParaRPr lang="en-US" dirty="0"/>
           </a:p>
         </p:txBody>
       </p:sp>
@@ -9795,18 +9480,22 @@
                 <a:latin typeface="Times New Roman" panose="02020603050405020304" pitchFamily="18" charset="0"/>
                 <a:cs typeface="Times New Roman" panose="02020603050405020304" pitchFamily="18" charset="0"/>
               </a:rPr>
-              <a:t>        </a:t>
-            </a:r>
-            <a:r>
-              <a:rPr lang="en-US" sz="1600" dirty="0" smtClean="0">
+              <a:t>        if(front==(rear+1)%size)                               /* why % size is required?  */</a:t>
+            </a:r>
+          </a:p>
+          <a:p>
+            <a:r>
+              <a:rPr lang="en-US" sz="1600" dirty="0">
                 <a:solidFill>
                   <a:schemeClr val="tx2"/>
                 </a:solidFill>
                 <a:latin typeface="Times New Roman" panose="02020603050405020304" pitchFamily="18" charset="0"/>
                 <a:cs typeface="Times New Roman" panose="02020603050405020304" pitchFamily="18" charset="0"/>
               </a:rPr>
-              <a:t>if(front</a:t>
-            </a:r>
+              <a:t>              return 1;</a:t>
+            </a:r>
+          </a:p>
+          <a:p>
             <a:r>
               <a:rPr lang="en-US" sz="1600" dirty="0">
                 <a:solidFill>
@@ -9815,25 +9504,20 @@
                 <a:latin typeface="Times New Roman" panose="02020603050405020304" pitchFamily="18" charset="0"/>
                 <a:cs typeface="Times New Roman" panose="02020603050405020304" pitchFamily="18" charset="0"/>
               </a:rPr>
-              <a:t>==(rear+1)%</a:t>
-            </a:r>
-            <a:r>
-              <a:rPr lang="en-US" sz="1600" dirty="0" smtClean="0">
+              <a:t> else </a:t>
+            </a:r>
+          </a:p>
+          <a:p>
+            <a:r>
+              <a:rPr lang="en-US" sz="1600" dirty="0">
                 <a:solidFill>
                   <a:schemeClr val="tx2"/>
                 </a:solidFill>
                 <a:latin typeface="Times New Roman" panose="02020603050405020304" pitchFamily="18" charset="0"/>
                 <a:cs typeface="Times New Roman" panose="02020603050405020304" pitchFamily="18" charset="0"/>
               </a:rPr>
-              <a:t>size)                               /* why % size is required?  */</a:t>
-            </a:r>
-            <a:endParaRPr lang="en-US" sz="1600" dirty="0">
-              <a:solidFill>
-                <a:schemeClr val="tx2"/>
-              </a:solidFill>
-              <a:latin typeface="Times New Roman" panose="02020603050405020304" pitchFamily="18" charset="0"/>
-              <a:cs typeface="Times New Roman" panose="02020603050405020304" pitchFamily="18" charset="0"/>
-            </a:endParaRPr>
+              <a:t>        return 0; </a:t>
+            </a:r>
           </a:p>
           <a:p>
             <a:r>
@@ -9844,22 +9528,20 @@
                 <a:latin typeface="Times New Roman" panose="02020603050405020304" pitchFamily="18" charset="0"/>
                 <a:cs typeface="Times New Roman" panose="02020603050405020304" pitchFamily="18" charset="0"/>
               </a:rPr>
-              <a:t>              return 1;</a:t>
-            </a:r>
-          </a:p>
-          <a:p>
-            <a:r>
-              <a:rPr lang="en-US" sz="1600" dirty="0">
+              <a:t>            }</a:t>
+            </a:r>
+          </a:p>
+          <a:p>
+            <a:r>
+              <a:rPr lang="en-US" sz="1600" dirty="0" err="1">
                 <a:solidFill>
                   <a:schemeClr val="tx2"/>
                 </a:solidFill>
                 <a:latin typeface="Times New Roman" panose="02020603050405020304" pitchFamily="18" charset="0"/>
                 <a:cs typeface="Times New Roman" panose="02020603050405020304" pitchFamily="18" charset="0"/>
               </a:rPr>
-              <a:t> else </a:t>
-            </a:r>
-          </a:p>
-          <a:p>
+              <a:t>int</a:t>
+            </a:r>
             <a:r>
               <a:rPr lang="en-US" sz="1600" dirty="0">
                 <a:solidFill>
@@ -9868,32 +9550,30 @@
                 <a:latin typeface="Times New Roman" panose="02020603050405020304" pitchFamily="18" charset="0"/>
                 <a:cs typeface="Times New Roman" panose="02020603050405020304" pitchFamily="18" charset="0"/>
               </a:rPr>
-              <a:t>        return 0; </a:t>
-            </a:r>
-          </a:p>
-          <a:p>
-            <a:r>
-              <a:rPr lang="en-US" sz="1600" dirty="0">
+              <a:t> insert(</a:t>
+            </a:r>
+            <a:r>
+              <a:rPr lang="en-US" sz="1600" dirty="0" err="1">
                 <a:solidFill>
                   <a:schemeClr val="tx2"/>
                 </a:solidFill>
                 <a:latin typeface="Times New Roman" panose="02020603050405020304" pitchFamily="18" charset="0"/>
                 <a:cs typeface="Times New Roman" panose="02020603050405020304" pitchFamily="18" charset="0"/>
               </a:rPr>
-              <a:t>            }</a:t>
-            </a:r>
-          </a:p>
-          <a:p>
-            <a:r>
-              <a:rPr lang="en-US" sz="1600" dirty="0" err="1">
+              <a:t>intitem</a:t>
+            </a:r>
+            <a:r>
+              <a:rPr lang="en-US" sz="1600" dirty="0">
                 <a:solidFill>
                   <a:schemeClr val="tx2"/>
                 </a:solidFill>
                 <a:latin typeface="Times New Roman" panose="02020603050405020304" pitchFamily="18" charset="0"/>
                 <a:cs typeface="Times New Roman" panose="02020603050405020304" pitchFamily="18" charset="0"/>
               </a:rPr>
-              <a:t>int</a:t>
-            </a:r>
+              <a:t>) {</a:t>
+            </a:r>
+          </a:p>
+          <a:p>
             <a:r>
               <a:rPr lang="en-US" sz="1600" dirty="0">
                 <a:solidFill>
@@ -9902,7 +9582,7 @@
                 <a:latin typeface="Times New Roman" panose="02020603050405020304" pitchFamily="18" charset="0"/>
                 <a:cs typeface="Times New Roman" panose="02020603050405020304" pitchFamily="18" charset="0"/>
               </a:rPr>
-              <a:t> insert(</a:t>
+              <a:t>         if(</a:t>
             </a:r>
             <a:r>
               <a:rPr lang="en-US" sz="1600" dirty="0" err="1">
@@ -9912,7 +9592,7 @@
                 <a:latin typeface="Times New Roman" panose="02020603050405020304" pitchFamily="18" charset="0"/>
                 <a:cs typeface="Times New Roman" panose="02020603050405020304" pitchFamily="18" charset="0"/>
               </a:rPr>
-              <a:t>intitem</a:t>
+              <a:t>qfull</a:t>
             </a:r>
             <a:r>
               <a:rPr lang="en-US" sz="1600" dirty="0">
@@ -9922,7 +9602,7 @@
                 <a:latin typeface="Times New Roman" panose="02020603050405020304" pitchFamily="18" charset="0"/>
                 <a:cs typeface="Times New Roman" panose="02020603050405020304" pitchFamily="18" charset="0"/>
               </a:rPr>
-              <a:t>) {</a:t>
+              <a:t>()) </a:t>
             </a:r>
           </a:p>
           <a:p>
@@ -9934,7 +9614,7 @@
                 <a:latin typeface="Times New Roman" panose="02020603050405020304" pitchFamily="18" charset="0"/>
                 <a:cs typeface="Times New Roman" panose="02020603050405020304" pitchFamily="18" charset="0"/>
               </a:rPr>
-              <a:t>         if(</a:t>
+              <a:t>                  </a:t>
             </a:r>
             <a:r>
               <a:rPr lang="en-US" sz="1600" dirty="0" err="1">
@@ -9944,7 +9624,7 @@
                 <a:latin typeface="Times New Roman" panose="02020603050405020304" pitchFamily="18" charset="0"/>
                 <a:cs typeface="Times New Roman" panose="02020603050405020304" pitchFamily="18" charset="0"/>
               </a:rPr>
-              <a:t>qfull</a:t>
+              <a:t>printf</a:t>
             </a:r>
             <a:r>
               <a:rPr lang="en-US" sz="1600" dirty="0">
@@ -9954,7 +9634,7 @@
                 <a:latin typeface="Times New Roman" panose="02020603050405020304" pitchFamily="18" charset="0"/>
                 <a:cs typeface="Times New Roman" panose="02020603050405020304" pitchFamily="18" charset="0"/>
               </a:rPr>
-              <a:t>()) </a:t>
+              <a:t>("circular q is full"); </a:t>
             </a:r>
           </a:p>
           <a:p>
@@ -9966,71 +9646,19 @@
                 <a:latin typeface="Times New Roman" panose="02020603050405020304" pitchFamily="18" charset="0"/>
                 <a:cs typeface="Times New Roman" panose="02020603050405020304" pitchFamily="18" charset="0"/>
               </a:rPr>
-              <a:t>                  </a:t>
-            </a:r>
-            <a:r>
-              <a:rPr lang="en-US" sz="1600" dirty="0" err="1">
+              <a:t>         else { </a:t>
+            </a:r>
+          </a:p>
+          <a:p>
+            <a:r>
+              <a:rPr lang="en-US" sz="1600" dirty="0">
                 <a:solidFill>
                   <a:schemeClr val="tx2"/>
                 </a:solidFill>
                 <a:latin typeface="Times New Roman" panose="02020603050405020304" pitchFamily="18" charset="0"/>
                 <a:cs typeface="Times New Roman" panose="02020603050405020304" pitchFamily="18" charset="0"/>
               </a:rPr>
-              <a:t>printf</a:t>
-            </a:r>
-            <a:r>
-              <a:rPr lang="en-US" sz="1600" dirty="0">
-                <a:solidFill>
-                  <a:schemeClr val="tx2"/>
-                </a:solidFill>
-                <a:latin typeface="Times New Roman" panose="02020603050405020304" pitchFamily="18" charset="0"/>
-                <a:cs typeface="Times New Roman" panose="02020603050405020304" pitchFamily="18" charset="0"/>
-              </a:rPr>
-              <a:t>("circular q is full"); </a:t>
-            </a:r>
-          </a:p>
-          <a:p>
-            <a:r>
-              <a:rPr lang="en-US" sz="1600" dirty="0">
-                <a:solidFill>
-                  <a:schemeClr val="tx2"/>
-                </a:solidFill>
-                <a:latin typeface="Times New Roman" panose="02020603050405020304" pitchFamily="18" charset="0"/>
-                <a:cs typeface="Times New Roman" panose="02020603050405020304" pitchFamily="18" charset="0"/>
-              </a:rPr>
-              <a:t>         else { </a:t>
-            </a:r>
-          </a:p>
-          <a:p>
-            <a:r>
-              <a:rPr lang="en-US" sz="1600" dirty="0">
-                <a:solidFill>
-                  <a:schemeClr val="tx2"/>
-                </a:solidFill>
-                <a:latin typeface="Times New Roman" panose="02020603050405020304" pitchFamily="18" charset="0"/>
-                <a:cs typeface="Times New Roman" panose="02020603050405020304" pitchFamily="18" charset="0"/>
-              </a:rPr>
-              <a:t>               </a:t>
-            </a:r>
-            <a:r>
-              <a:rPr lang="en-US" sz="1600" dirty="0" smtClean="0">
-                <a:solidFill>
-                  <a:schemeClr val="tx2"/>
-                </a:solidFill>
-                <a:latin typeface="Times New Roman" panose="02020603050405020304" pitchFamily="18" charset="0"/>
-                <a:cs typeface="Times New Roman" panose="02020603050405020304" pitchFamily="18" charset="0"/>
-              </a:rPr>
-              <a:t>if(front = = -</a:t>
-            </a:r>
-            <a:r>
-              <a:rPr lang="en-US" sz="1600" dirty="0">
-                <a:solidFill>
-                  <a:schemeClr val="tx2"/>
-                </a:solidFill>
-                <a:latin typeface="Times New Roman" panose="02020603050405020304" pitchFamily="18" charset="0"/>
-                <a:cs typeface="Times New Roman" panose="02020603050405020304" pitchFamily="18" charset="0"/>
-              </a:rPr>
-              <a:t>1) </a:t>
+              <a:t>               if(front = = -1) </a:t>
             </a:r>
           </a:p>
           <a:p>
@@ -10093,13 +9721,6 @@
   <p:clrMapOvr>
     <a:masterClrMapping/>
   </p:clrMapOvr>
-  <p:timing>
-    <p:tnLst>
-      <p:par>
-        <p:cTn id="1" dur="indefinite" restart="never" nodeType="tmRoot"/>
-      </p:par>
-    </p:tnLst>
-  </p:timing>
 </p:sld>
 </file>
 
@@ -10136,10 +9757,9 @@
           <a:lstStyle/>
           <a:p>
             <a:r>
-              <a:rPr lang="en-US" dirty="0" smtClean="0"/>
+              <a:rPr lang="en-US" dirty="0"/>
               <a:t>Deletion</a:t>
             </a:r>
-            <a:endParaRPr lang="en-US" dirty="0"/>
           </a:p>
         </p:txBody>
       </p:sp>
@@ -10176,186 +9796,132 @@
               <a:rPr lang="en-US" dirty="0"/>
               <a:t>() { </a:t>
             </a:r>
-            <a:endParaRPr lang="en-US" dirty="0" smtClean="0"/>
-          </a:p>
-          <a:p>
-            <a:r>
-              <a:rPr lang="en-US" dirty="0" smtClean="0"/>
-              <a:t>                 if(front</a:t>
-            </a:r>
+          </a:p>
+          <a:p>
             <a:r>
               <a:rPr lang="en-US" dirty="0"/>
-              <a:t>==-1) </a:t>
-            </a:r>
-            <a:endParaRPr lang="en-US" dirty="0" smtClean="0"/>
-          </a:p>
-          <a:p>
-            <a:r>
-              <a:rPr lang="en-US" dirty="0" smtClean="0"/>
-              <a:t>                               return </a:t>
-            </a:r>
+              <a:t>                 if(front==-1) </a:t>
+            </a:r>
+          </a:p>
+          <a:p>
             <a:r>
               <a:rPr lang="en-US" dirty="0"/>
-              <a:t>1; </a:t>
-            </a:r>
-            <a:endParaRPr lang="en-US" dirty="0" smtClean="0"/>
-          </a:p>
-          <a:p>
-            <a:r>
-              <a:rPr lang="en-US" dirty="0" smtClean="0"/>
+              <a:t>                               return 1; </a:t>
+            </a:r>
+          </a:p>
+          <a:p>
+            <a:r>
+              <a:rPr lang="en-US" dirty="0"/>
               <a:t>                 else</a:t>
             </a:r>
           </a:p>
           <a:p>
             <a:r>
               <a:rPr lang="en-US" dirty="0"/>
-              <a:t> </a:t>
-            </a:r>
-            <a:r>
-              <a:rPr lang="en-US" dirty="0" smtClean="0"/>
-              <a:t>                           </a:t>
-            </a:r>
+              <a:t>                            return 0;</a:t>
+            </a:r>
+          </a:p>
+          <a:p>
             <a:r>
               <a:rPr lang="en-US" dirty="0"/>
-              <a:t>return 0</a:t>
-            </a:r>
-            <a:r>
-              <a:rPr lang="en-US" dirty="0" smtClean="0"/>
-              <a:t>;</a:t>
-            </a:r>
-          </a:p>
-          <a:p>
-            <a:r>
-              <a:rPr lang="en-US" dirty="0" smtClean="0"/>
               <a:t>                         } </a:t>
             </a:r>
           </a:p>
           <a:p>
-            <a:r>
-              <a:rPr lang="en-US" dirty="0" err="1" smtClean="0"/>
-              <a:t>int</a:t>
-            </a:r>
-            <a:r>
-              <a:rPr lang="en-US" dirty="0" smtClean="0"/>
-              <a:t> </a:t>
-            </a:r>
-            <a:r>
-              <a:rPr lang="en-US" dirty="0"/>
-              <a:t>delete() </a:t>
-            </a:r>
-            <a:r>
-              <a:rPr lang="en-US" dirty="0" smtClean="0"/>
-              <a:t>{</a:t>
-            </a:r>
-          </a:p>
-          <a:p>
-            <a:r>
-              <a:rPr lang="en-US" dirty="0" smtClean="0"/>
-              <a:t>            </a:t>
-            </a:r>
             <a:r>
               <a:rPr lang="en-US" dirty="0" err="1"/>
               <a:t>int</a:t>
             </a:r>
             <a:r>
               <a:rPr lang="en-US" dirty="0"/>
+              <a:t> delete() {</a:t>
+            </a:r>
+          </a:p>
+          <a:p>
+            <a:r>
+              <a:rPr lang="en-US" dirty="0"/>
+              <a:t>            </a:t>
+            </a:r>
+            <a:r>
+              <a:rPr lang="en-US" dirty="0" err="1"/>
+              <a:t>int</a:t>
+            </a:r>
+            <a:r>
+              <a:rPr lang="en-US" dirty="0"/>
               <a:t> item; </a:t>
             </a:r>
-            <a:endParaRPr lang="en-US" dirty="0" smtClean="0"/>
-          </a:p>
-          <a:p>
-            <a:r>
-              <a:rPr lang="en-US" dirty="0" smtClean="0"/>
+          </a:p>
+          <a:p>
+            <a:r>
+              <a:rPr lang="en-US" dirty="0"/>
               <a:t>            if(</a:t>
             </a:r>
             <a:r>
-              <a:rPr lang="en-US" dirty="0" err="1" smtClean="0"/>
+              <a:rPr lang="en-US" dirty="0" err="1"/>
               <a:t>qempty</a:t>
             </a:r>
             <a:r>
               <a:rPr lang="en-US" dirty="0"/>
               <a:t>()) </a:t>
             </a:r>
-            <a:endParaRPr lang="en-US" dirty="0" smtClean="0"/>
-          </a:p>
-          <a:p>
-            <a:r>
-              <a:rPr lang="en-US" dirty="0" smtClean="0"/>
+          </a:p>
+          <a:p>
+            <a:r>
+              <a:rPr lang="en-US" dirty="0"/>
               <a:t>                        </a:t>
             </a:r>
             <a:r>
-              <a:rPr lang="en-US" dirty="0" err="1" smtClean="0"/>
+              <a:rPr lang="en-US" dirty="0" err="1"/>
               <a:t>printf</a:t>
             </a:r>
             <a:r>
               <a:rPr lang="en-US" dirty="0"/>
               <a:t>("queue is empty"); </a:t>
             </a:r>
-            <a:endParaRPr lang="en-US" dirty="0" smtClean="0"/>
-          </a:p>
-          <a:p>
-            <a:r>
-              <a:rPr lang="en-US" dirty="0" smtClean="0"/>
-              <a:t>             else </a:t>
-            </a:r>
+          </a:p>
+          <a:p>
             <a:r>
               <a:rPr lang="en-US" dirty="0"/>
-              <a:t>{ </a:t>
-            </a:r>
-            <a:endParaRPr lang="en-US" dirty="0" smtClean="0"/>
-          </a:p>
-          <a:p>
-            <a:r>
-              <a:rPr lang="en-US" dirty="0" smtClean="0"/>
+              <a:t>             else { </a:t>
+            </a:r>
+          </a:p>
+          <a:p>
+            <a:r>
+              <a:rPr lang="en-US" dirty="0"/>
               <a:t>                        item=que[front];</a:t>
             </a:r>
           </a:p>
           <a:p>
             <a:r>
-              <a:rPr lang="en-US" dirty="0" smtClean="0"/>
-              <a:t>                   </a:t>
-            </a:r>
-            <a:r>
               <a:rPr lang="en-US" dirty="0"/>
-              <a:t>if(front==rear)  </a:t>
-            </a:r>
-            <a:endParaRPr lang="en-US" dirty="0" smtClean="0"/>
-          </a:p>
-          <a:p>
-            <a:r>
-              <a:rPr lang="en-US" dirty="0" smtClean="0"/>
-              <a:t>                            front=rear</a:t>
-            </a:r>
+              <a:t>                   if(front==rear)  </a:t>
+            </a:r>
+          </a:p>
+          <a:p>
             <a:r>
               <a:rPr lang="en-US" dirty="0"/>
-              <a:t>=-1; </a:t>
-            </a:r>
-            <a:endParaRPr lang="en-US" dirty="0" smtClean="0"/>
-          </a:p>
-          <a:p>
-            <a:r>
-              <a:rPr lang="en-US" dirty="0" smtClean="0"/>
+              <a:t>                            front=rear=-1; </a:t>
+            </a:r>
+          </a:p>
+          <a:p>
+            <a:r>
+              <a:rPr lang="en-US" dirty="0"/>
               <a:t>                   else </a:t>
             </a:r>
           </a:p>
           <a:p>
             <a:r>
-              <a:rPr lang="en-US" dirty="0" smtClean="0"/>
-              <a:t>                            front</a:t>
-            </a:r>
-            <a:r>
               <a:rPr lang="en-US" dirty="0"/>
-              <a:t>=(front+1)%size; </a:t>
-            </a:r>
-            <a:endParaRPr lang="en-US" dirty="0" smtClean="0"/>
-          </a:p>
-          <a:p>
-            <a:r>
-              <a:rPr lang="en-US" dirty="0" smtClean="0"/>
+              <a:t>                            front=(front+1)%size; </a:t>
+            </a:r>
+          </a:p>
+          <a:p>
+            <a:r>
+              <a:rPr lang="en-US" dirty="0"/>
               <a:t>             </a:t>
             </a:r>
             <a:r>
-              <a:rPr lang="en-US" dirty="0" err="1" smtClean="0"/>
+              <a:rPr lang="en-US" dirty="0" err="1"/>
               <a:t>printf</a:t>
             </a:r>
             <a:r>
@@ -10368,38 +9934,20 @@
             </a:r>
             <a:r>
               <a:rPr lang="en-US" dirty="0"/>
-              <a:t> ",item</a:t>
-            </a:r>
-            <a:r>
-              <a:rPr lang="en-US" dirty="0" smtClean="0"/>
-              <a:t>);</a:t>
+              <a:t> ",item);</a:t>
             </a:r>
           </a:p>
           <a:p>
             <a:r>
               <a:rPr lang="en-US" dirty="0"/>
-              <a:t> </a:t>
-            </a:r>
-            <a:r>
-              <a:rPr lang="en-US" dirty="0" smtClean="0"/>
-              <a:t>                    </a:t>
-            </a:r>
+              <a:t>                     } </a:t>
+            </a:r>
+          </a:p>
+          <a:p>
             <a:r>
               <a:rPr lang="en-US" dirty="0"/>
-              <a:t>} </a:t>
-            </a:r>
-            <a:endParaRPr lang="en-US" dirty="0" smtClean="0"/>
-          </a:p>
-          <a:p>
-            <a:r>
-              <a:rPr lang="en-US" dirty="0"/>
-              <a:t> </a:t>
-            </a:r>
-            <a:r>
-              <a:rPr lang="en-US" dirty="0" smtClean="0"/>
-              <a:t>                 }</a:t>
-            </a:r>
-            <a:endParaRPr lang="en-US" dirty="0"/>
+              <a:t>                  }</a:t>
+            </a:r>
           </a:p>
         </p:txBody>
       </p:sp>
@@ -10413,13 +9961,6 @@
   <p:clrMapOvr>
     <a:masterClrMapping/>
   </p:clrMapOvr>
-  <p:timing>
-    <p:tnLst>
-      <p:par>
-        <p:cTn id="1" dur="indefinite" restart="never" nodeType="tmRoot"/>
-      </p:par>
-    </p:tnLst>
-  </p:timing>
 </p:sld>
 </file>
 
@@ -10458,7 +9999,7 @@
           <a:lstStyle/>
           <a:p>
             <a:r>
-              <a:rPr lang="en-US" sz="3600" dirty="0" smtClean="0"/>
+              <a:rPr lang="en-US" sz="3600" dirty="0"/>
               <a:t>queue data structure</a:t>
             </a:r>
             <a:endParaRPr lang="en-US" sz="3200" dirty="0"/>
@@ -10489,15 +10030,15 @@
                   <a:schemeClr val="tx1"/>
                 </a:solidFill>
               </a:rPr>
-              <a:t>Like </a:t>
-            </a:r>
-            <a:r>
-              <a:rPr lang="en-US" dirty="0" smtClean="0">
+              <a:t>Like Stack, Queue is a linear structure which follows a particular order in which the operations are performed. The order is </a:t>
+            </a:r>
+            <a:r>
+              <a:rPr lang="en-US" b="1" dirty="0">
                 <a:solidFill>
                   <a:schemeClr val="tx1"/>
                 </a:solidFill>
               </a:rPr>
-              <a:t>Stack</a:t>
+              <a:t>F</a:t>
             </a:r>
             <a:r>
               <a:rPr lang="en-US" dirty="0">
@@ -10505,7 +10046,7 @@
                   <a:schemeClr val="tx1"/>
                 </a:solidFill>
               </a:rPr>
-              <a:t>, Queue is a linear structure which follows a particular order in which the operations are performed. The order is </a:t>
+              <a:t>irst </a:t>
             </a:r>
             <a:r>
               <a:rPr lang="en-US" b="1" dirty="0">
@@ -10513,6 +10054,22 @@
                   <a:schemeClr val="tx1"/>
                 </a:solidFill>
               </a:rPr>
+              <a:t>I</a:t>
+            </a:r>
+            <a:r>
+              <a:rPr lang="en-US" dirty="0">
+                <a:solidFill>
+                  <a:schemeClr val="tx1"/>
+                </a:solidFill>
+              </a:rPr>
+              <a:t>n </a:t>
+            </a:r>
+            <a:r>
+              <a:rPr lang="en-US" b="1" dirty="0">
+                <a:solidFill>
+                  <a:schemeClr val="tx1"/>
+                </a:solidFill>
+              </a:rPr>
               <a:t>F</a:t>
             </a:r>
             <a:r>
@@ -10529,7 +10086,7 @@
                   <a:schemeClr val="tx1"/>
                 </a:solidFill>
               </a:rPr>
-              <a:t>I</a:t>
+              <a:t>O</a:t>
             </a:r>
             <a:r>
               <a:rPr lang="en-US" dirty="0">
@@ -10537,73 +10094,20 @@
                   <a:schemeClr val="tx1"/>
                 </a:solidFill>
               </a:rPr>
-              <a:t>n </a:t>
-            </a:r>
-            <a:r>
-              <a:rPr lang="en-US" b="1" dirty="0">
-                <a:solidFill>
-                  <a:schemeClr val="tx1"/>
-                </a:solidFill>
-              </a:rPr>
-              <a:t>F</a:t>
-            </a:r>
-            <a:r>
-              <a:rPr lang="en-US" dirty="0">
-                <a:solidFill>
-                  <a:schemeClr val="tx1"/>
-                </a:solidFill>
-              </a:rPr>
-              <a:t>irst </a:t>
-            </a:r>
-            <a:r>
-              <a:rPr lang="en-US" b="1" dirty="0">
-                <a:solidFill>
-                  <a:schemeClr val="tx1"/>
-                </a:solidFill>
-              </a:rPr>
-              <a:t>O</a:t>
-            </a:r>
-            <a:r>
-              <a:rPr lang="en-US" dirty="0">
-                <a:solidFill>
-                  <a:schemeClr val="tx1"/>
-                </a:solidFill>
-              </a:rPr>
               <a:t>ut (FIFO).  </a:t>
             </a:r>
-            <a:endParaRPr lang="en-US" dirty="0" smtClean="0">
-              <a:solidFill>
-                <a:schemeClr val="tx1"/>
-              </a:solidFill>
-            </a:endParaRPr>
           </a:p>
           <a:p>
             <a:pPr marL="0" indent="0">
               <a:buNone/>
             </a:pPr>
             <a:r>
-              <a:rPr lang="en-US" dirty="0" smtClean="0">
+              <a:rPr lang="en-US" dirty="0">
                 <a:solidFill>
                   <a:schemeClr val="tx1"/>
                 </a:solidFill>
               </a:rPr>
-              <a:t>A </a:t>
-            </a:r>
-            <a:r>
-              <a:rPr lang="en-US" dirty="0">
-                <a:solidFill>
-                  <a:schemeClr val="tx1"/>
-                </a:solidFill>
-              </a:rPr>
-              <a:t>good example of queue is any queue of consumers for a resource where the consumer that came first is served </a:t>
-            </a:r>
-            <a:r>
-              <a:rPr lang="en-US" dirty="0" smtClean="0">
-                <a:solidFill>
-                  <a:schemeClr val="tx1"/>
-                </a:solidFill>
-              </a:rPr>
-              <a:t>first.</a:t>
+              <a:t>A good example of queue is any queue of consumers for a resource where the consumer that came first is served first.</a:t>
             </a:r>
           </a:p>
           <a:p>
@@ -10611,28 +10115,12 @@
               <a:buNone/>
             </a:pPr>
             <a:r>
-              <a:rPr lang="en-US" dirty="0" smtClean="0">
+              <a:rPr lang="en-US" dirty="0">
                 <a:solidFill>
                   <a:schemeClr val="tx1"/>
                 </a:solidFill>
               </a:rPr>
-              <a:t>The </a:t>
-            </a:r>
-            <a:r>
-              <a:rPr lang="en-US" dirty="0">
-                <a:solidFill>
-                  <a:schemeClr val="tx1"/>
-                </a:solidFill>
-              </a:rPr>
-              <a:t>difference between stacks and queues is in removing. In a stack we remove the item the most recently added; in a queue, we remove the item the least recently added</a:t>
-            </a:r>
-            <a:r>
-              <a:rPr lang="en-US" dirty="0" smtClean="0">
-                <a:solidFill>
-                  <a:schemeClr val="tx1"/>
-                </a:solidFill>
-              </a:rPr>
-              <a:t>.</a:t>
+              <a:t>The difference between stacks and queues is in removing. In a stack we remove the item the most recently added; in a queue, we remove the item the least recently added.</a:t>
             </a:r>
           </a:p>
           <a:p>
@@ -10646,14 +10134,6 @@
                 </a:solidFill>
               </a:rPr>
               <a:t>Operations on Queue:</a:t>
-            </a:r>
-            <a:r>
-              <a:rPr lang="en-US" dirty="0">
-                <a:solidFill>
-                  <a:schemeClr val="tx1"/>
-                </a:solidFill>
-              </a:rPr>
-              <a:t/>
             </a:r>
             <a:br>
               <a:rPr lang="en-US" dirty="0">
@@ -10812,13 +10292,6 @@
   <p:clrMapOvr>
     <a:masterClrMapping/>
   </p:clrMapOvr>
-  <p:timing>
-    <p:tnLst>
-      <p:par>
-        <p:cTn id="1" dur="indefinite" restart="never" nodeType="tmRoot"/>
-      </p:par>
-    </p:tnLst>
-  </p:timing>
 </p:sld>
 </file>
 
@@ -10855,10 +10328,9 @@
           <a:lstStyle/>
           <a:p>
             <a:r>
-              <a:rPr lang="en-US" dirty="0" smtClean="0"/>
+              <a:rPr lang="en-US" dirty="0"/>
               <a:t>Display</a:t>
             </a:r>
-            <a:endParaRPr lang="en-US" dirty="0"/>
           </a:p>
         </p:txBody>
       </p:sp>
@@ -10881,86 +10353,78 @@
               <a:rPr lang="en-US" dirty="0"/>
               <a:t>void display() { </a:t>
             </a:r>
-            <a:endParaRPr lang="en-US" dirty="0" smtClean="0"/>
-          </a:p>
-          <a:p>
-            <a:r>
-              <a:rPr lang="en-US" dirty="0" smtClean="0"/>
+          </a:p>
+          <a:p>
+            <a:r>
+              <a:rPr lang="en-US" dirty="0"/>
               <a:t>if(</a:t>
             </a:r>
             <a:r>
-              <a:rPr lang="en-US" dirty="0" err="1" smtClean="0"/>
+              <a:rPr lang="en-US" dirty="0" err="1"/>
               <a:t>qempty</a:t>
             </a:r>
             <a:r>
               <a:rPr lang="en-US" dirty="0"/>
               <a:t>()) { </a:t>
             </a:r>
-            <a:endParaRPr lang="en-US" dirty="0" smtClean="0"/>
-          </a:p>
-          <a:p>
-            <a:r>
-              <a:rPr lang="en-US" dirty="0" err="1" smtClean="0"/>
+          </a:p>
+          <a:p>
+            <a:r>
+              <a:rPr lang="en-US" dirty="0" err="1"/>
               <a:t>printf</a:t>
             </a:r>
             <a:r>
               <a:rPr lang="en-US" dirty="0"/>
               <a:t>("queue is empty"); </a:t>
             </a:r>
-            <a:endParaRPr lang="en-US" dirty="0" smtClean="0"/>
-          </a:p>
-          <a:p>
-            <a:r>
-              <a:rPr lang="en-US" dirty="0" smtClean="0"/>
+          </a:p>
+          <a:p>
+            <a:r>
+              <a:rPr lang="en-US" dirty="0"/>
               <a:t>return;</a:t>
             </a:r>
           </a:p>
           <a:p>
             <a:r>
-              <a:rPr lang="en-US" dirty="0" smtClean="0"/>
+              <a:rPr lang="en-US" dirty="0"/>
               <a:t> }</a:t>
             </a:r>
           </a:p>
           <a:p>
             <a:r>
-              <a:rPr lang="en-US" dirty="0" err="1" smtClean="0"/>
+              <a:rPr lang="en-US" dirty="0" err="1"/>
               <a:t>Int</a:t>
             </a:r>
             <a:r>
-              <a:rPr lang="en-US" dirty="0" smtClean="0"/>
+              <a:rPr lang="en-US" dirty="0"/>
               <a:t> </a:t>
             </a:r>
             <a:r>
-              <a:rPr lang="en-US" dirty="0" err="1" smtClean="0"/>
+              <a:rPr lang="en-US" dirty="0" err="1"/>
               <a:t>i</a:t>
             </a:r>
             <a:r>
-              <a:rPr lang="en-US" dirty="0" smtClean="0"/>
+              <a:rPr lang="en-US" dirty="0"/>
               <a:t>=front</a:t>
             </a:r>
           </a:p>
           <a:p>
             <a:r>
-              <a:rPr lang="en-US" dirty="0" smtClean="0"/>
+              <a:rPr lang="en-US" dirty="0"/>
               <a:t>while(</a:t>
             </a:r>
             <a:r>
-              <a:rPr lang="en-US" dirty="0" err="1" smtClean="0"/>
+              <a:rPr lang="en-US" dirty="0" err="1"/>
               <a:t>i</a:t>
             </a:r>
             <a:r>
-              <a:rPr lang="en-US" dirty="0" smtClean="0"/>
-              <a:t>!=</a:t>
-            </a:r>
-            <a:r>
               <a:rPr lang="en-US" dirty="0"/>
-              <a:t>rear) { </a:t>
-            </a:r>
-            <a:endParaRPr lang="en-US" dirty="0" smtClean="0"/>
-          </a:p>
-          <a:p>
-            <a:r>
-              <a:rPr lang="en-US" dirty="0" err="1" smtClean="0"/>
+              <a:t>!=rear) { </a:t>
+            </a:r>
+          </a:p>
+          <a:p>
+            <a:r>
+              <a:rPr lang="en-US" dirty="0" err="1"/>
               <a:t>printf</a:t>
             </a:r>
             <a:r>
@@ -10969,57 +10433,40 @@
             </a:r>
             <a:r>
               <a:rPr lang="en-US" dirty="0" err="1"/>
-              <a:t>d”,</a:t>
-            </a:r>
-            <a:r>
-              <a:rPr lang="en-US" dirty="0" err="1" smtClean="0"/>
-              <a:t>que</a:t>
-            </a:r>
-            <a:r>
-              <a:rPr lang="en-US" dirty="0" smtClean="0"/>
+              <a:t>d”,que</a:t>
+            </a:r>
+            <a:r>
+              <a:rPr lang="en-US" dirty="0"/>
               <a:t>[</a:t>
             </a:r>
-            <a:r>
-              <a:rPr lang="en-US" dirty="0" err="1" smtClean="0"/>
-              <a:t>i</a:t>
-            </a:r>
-            <a:r>
-              <a:rPr lang="en-US" dirty="0" smtClean="0"/>
-              <a:t>]); </a:t>
-            </a:r>
-          </a:p>
-          <a:p>
             <a:r>
               <a:rPr lang="en-US" dirty="0" err="1"/>
               <a:t>i</a:t>
             </a:r>
             <a:r>
-              <a:rPr lang="en-US" dirty="0" smtClean="0"/>
-              <a:t>=(</a:t>
-            </a:r>
-            <a:r>
               <a:rPr lang="en-US" dirty="0"/>
+              <a:t>]); </a:t>
+            </a:r>
+          </a:p>
+          <a:p>
+            <a:r>
+              <a:rPr lang="en-US" dirty="0" err="1"/>
               <a:t>i</a:t>
             </a:r>
             <a:r>
-              <a:rPr lang="en-US" dirty="0" smtClean="0"/>
-              <a:t>+1</a:t>
-            </a:r>
-            <a:r>
               <a:rPr lang="en-US" dirty="0"/>
-              <a:t>)%size; </a:t>
-            </a:r>
-            <a:endParaRPr lang="en-US" dirty="0" smtClean="0"/>
-          </a:p>
-          <a:p>
-            <a:r>
-              <a:rPr lang="en-US" dirty="0" smtClean="0"/>
+              <a:t>=(i+1)%size; </a:t>
+            </a:r>
+          </a:p>
+          <a:p>
+            <a:r>
+              <a:rPr lang="en-US" dirty="0"/>
               <a:t>} </a:t>
             </a:r>
           </a:p>
           <a:p>
             <a:r>
-              <a:rPr lang="en-US" dirty="0" err="1" smtClean="0"/>
+              <a:rPr lang="en-US" dirty="0" err="1"/>
               <a:t>Printf</a:t>
             </a:r>
             <a:r>
@@ -11028,31 +10475,26 @@
             </a:r>
             <a:r>
               <a:rPr lang="en-US" dirty="0" err="1"/>
-              <a:t>d”,</a:t>
-            </a:r>
-            <a:r>
-              <a:rPr lang="en-US" dirty="0" err="1" smtClean="0"/>
-              <a:t>que</a:t>
-            </a:r>
-            <a:r>
-              <a:rPr lang="en-US" dirty="0" smtClean="0"/>
+              <a:t>d”,que</a:t>
+            </a:r>
+            <a:r>
+              <a:rPr lang="en-US" dirty="0"/>
               <a:t>[</a:t>
             </a:r>
             <a:r>
-              <a:rPr lang="en-US" dirty="0" err="1" smtClean="0"/>
+              <a:rPr lang="en-US" dirty="0" err="1"/>
               <a:t>i</a:t>
             </a:r>
             <a:r>
-              <a:rPr lang="en-US" dirty="0" smtClean="0"/>
+              <a:rPr lang="en-US" dirty="0"/>
               <a:t>]); </a:t>
             </a:r>
           </a:p>
           <a:p>
             <a:r>
-              <a:rPr lang="en-US" dirty="0" smtClean="0"/>
+              <a:rPr lang="en-US" dirty="0"/>
               <a:t>}</a:t>
             </a:r>
-            <a:endParaRPr lang="en-US" dirty="0"/>
           </a:p>
         </p:txBody>
       </p:sp>
@@ -11066,13 +10508,6 @@
   <p:clrMapOvr>
     <a:masterClrMapping/>
   </p:clrMapOvr>
-  <p:timing>
-    <p:tnLst>
-      <p:par>
-        <p:cTn id="1" dur="indefinite" restart="never" nodeType="tmRoot"/>
-      </p:par>
-    </p:tnLst>
-  </p:timing>
 </p:sld>
 </file>
 
@@ -11122,7 +10557,7 @@
             <p:ph idx="1"/>
             <p:extLst>
               <p:ext uri="{D42A27DB-BD31-4B8C-83A1-F6EECF244321}">
-                <p14:modId xmlns:p14="http://schemas.microsoft.com/office/powerpoint/2010/main" val="1122965097"/>
+                <p14:modId xmlns:p14="http://schemas.microsoft.com/office/powerpoint/2010/main" val="2679791079"/>
               </p:ext>
             </p:extLst>
           </p:nvPr>
@@ -11135,21 +10570,21 @@
           <a:graphicData uri="http://schemas.openxmlformats.org/presentationml/2006/ole">
             <mc:AlternateContent xmlns:mc="http://schemas.openxmlformats.org/markup-compatibility/2006">
               <mc:Choice xmlns:v="urn:schemas-microsoft-com:vml" Requires="v">
-                <p:oleObj spid="_x0000_s10259" name="Packager Shell Object" showAsIcon="1" r:id="rId3" imgW="1079525" imgH="526962" progId="Package">
+                <p:oleObj name="Packager Shell Object" showAsIcon="1" r:id="rId2" imgW="1079525" imgH="526962" progId="Package">
                   <p:embed/>
                 </p:oleObj>
               </mc:Choice>
               <mc:Fallback>
-                <p:oleObj name="Packager Shell Object" showAsIcon="1" r:id="rId3" imgW="1079525" imgH="526962" progId="Package">
+                <p:oleObj name="Packager Shell Object" showAsIcon="1" r:id="rId2" imgW="1079525" imgH="526962" progId="Package">
                   <p:embed/>
                   <p:pic>
                     <p:nvPicPr>
-                      <p:cNvPr id="0" name=""/>
+                      <p:cNvPr id="4" name="Content Placeholder 3"/>
                       <p:cNvPicPr/>
                       <p:nvPr/>
                     </p:nvPicPr>
                     <p:blipFill>
-                      <a:blip r:embed="rId4"/>
+                      <a:blip r:embed="rId3"/>
                       <a:stretch>
                         <a:fillRect/>
                       </a:stretch>
@@ -11180,13 +10615,6 @@
   <p:clrMapOvr>
     <a:masterClrMapping/>
   </p:clrMapOvr>
-  <p:timing>
-    <p:tnLst>
-      <p:par>
-        <p:cTn id="1" dur="indefinite" restart="never" nodeType="tmRoot"/>
-      </p:par>
-    </p:tnLst>
-  </p:timing>
 </p:sld>
 </file>
 
@@ -11223,10 +10651,9 @@
           <a:lstStyle/>
           <a:p>
             <a:r>
-              <a:rPr lang="en-US" dirty="0" smtClean="0"/>
+              <a:rPr lang="en-US" dirty="0"/>
               <a:t>Double ended queue</a:t>
             </a:r>
-            <a:endParaRPr lang="en-US" dirty="0"/>
           </a:p>
         </p:txBody>
       </p:sp>
@@ -11283,13 +10710,6 @@
   <p:clrMapOvr>
     <a:masterClrMapping/>
   </p:clrMapOvr>
-  <p:timing>
-    <p:tnLst>
-      <p:par>
-        <p:cTn id="1" dur="indefinite" restart="never" nodeType="tmRoot"/>
-      </p:par>
-    </p:tnLst>
-  </p:timing>
 </p:sld>
 </file>
 
@@ -11399,13 +10819,6 @@
   <p:clrMapOvr>
     <a:masterClrMapping/>
   </p:clrMapOvr>
-  <p:timing>
-    <p:tnLst>
-      <p:par>
-        <p:cTn id="1" dur="indefinite" restart="never" nodeType="tmRoot"/>
-      </p:par>
-    </p:tnLst>
-  </p:timing>
 </p:sld>
 </file>
 
@@ -11498,13 +10911,6 @@
   <p:clrMapOvr>
     <a:masterClrMapping/>
   </p:clrMapOvr>
-  <p:timing>
-    <p:tnLst>
-      <p:par>
-        <p:cTn id="1" dur="indefinite" restart="never" nodeType="tmRoot"/>
-      </p:par>
-    </p:tnLst>
-  </p:timing>
 </p:sld>
 </file>
 
@@ -11614,13 +11020,6 @@
   <p:clrMapOvr>
     <a:masterClrMapping/>
   </p:clrMapOvr>
-  <p:timing>
-    <p:tnLst>
-      <p:par>
-        <p:cTn id="1" dur="indefinite" restart="never" nodeType="tmRoot"/>
-      </p:par>
-    </p:tnLst>
-  </p:timing>
 </p:sld>
 </file>
 
@@ -11688,7 +11087,7 @@
           <p:nvPr/>
         </p:nvPicPr>
         <p:blipFill>
-          <a:blip r:embed="rId2">
+          <a:blip r:embed="rId3">
             <a:extLst>
               <a:ext uri="{28A0092B-C50C-407E-A947-70E740481C1C}">
                 <a14:useLocalDpi xmlns:a14="http://schemas.microsoft.com/office/drawing/2010/main" val="0"/>
@@ -11755,10 +11154,9 @@
           <a:p>
             <a:pPr algn="ctr"/>
             <a:r>
-              <a:rPr lang="en-US" dirty="0" smtClean="0"/>
+              <a:rPr lang="en-US" dirty="0"/>
               <a:t>If queue is empty then we can insert otherwise it will give overflow error</a:t>
             </a:r>
-            <a:endParaRPr lang="en-US" dirty="0"/>
           </a:p>
         </p:txBody>
       </p:sp>
@@ -11772,13 +11170,6 @@
   <p:clrMapOvr>
     <a:masterClrMapping/>
   </p:clrMapOvr>
-  <p:timing>
-    <p:tnLst>
-      <p:par>
-        <p:cTn id="1" dur="indefinite" restart="never" nodeType="tmRoot"/>
-      </p:par>
-    </p:tnLst>
-  </p:timing>
 </p:sld>
 </file>
 
@@ -11846,7 +11237,7 @@
           <p:nvPr/>
         </p:nvPicPr>
         <p:blipFill>
-          <a:blip r:embed="rId2">
+          <a:blip r:embed="rId3">
             <a:extLst>
               <a:ext uri="{28A0092B-C50C-407E-A947-70E740481C1C}">
                 <a14:useLocalDpi xmlns:a14="http://schemas.microsoft.com/office/drawing/2010/main" val="0"/>
@@ -11888,13 +11279,6 @@
   <p:clrMapOvr>
     <a:masterClrMapping/>
   </p:clrMapOvr>
-  <p:timing>
-    <p:tnLst>
-      <p:par>
-        <p:cTn id="1" dur="indefinite" restart="never" nodeType="tmRoot"/>
-      </p:par>
-    </p:tnLst>
-  </p:timing>
 </p:sld>
 </file>
 
@@ -11962,7 +11346,7 @@
           <p:nvPr/>
         </p:nvPicPr>
         <p:blipFill>
-          <a:blip r:embed="rId2">
+          <a:blip r:embed="rId3">
             <a:extLst>
               <a:ext uri="{28A0092B-C50C-407E-A947-70E740481C1C}">
                 <a14:useLocalDpi xmlns:a14="http://schemas.microsoft.com/office/drawing/2010/main" val="0"/>
@@ -12004,13 +11388,6 @@
   <p:clrMapOvr>
     <a:masterClrMapping/>
   </p:clrMapOvr>
-  <p:timing>
-    <p:tnLst>
-      <p:par>
-        <p:cTn id="1" dur="indefinite" restart="never" nodeType="tmRoot"/>
-      </p:par>
-    </p:tnLst>
-  </p:timing>
 </p:sld>
 </file>
 
@@ -12061,7 +11438,7 @@
           </p:nvPr>
         </p:nvPicPr>
         <p:blipFill>
-          <a:blip r:embed="rId2">
+          <a:blip r:embed="rId3">
             <a:extLst>
               <a:ext uri="{28A0092B-C50C-407E-A947-70E740481C1C}">
                 <a14:useLocalDpi xmlns:a14="http://schemas.microsoft.com/office/drawing/2010/main" val="0"/>
@@ -12088,7 +11465,7 @@
           <p:nvPr/>
         </p:nvPicPr>
         <p:blipFill>
-          <a:blip r:embed="rId3">
+          <a:blip r:embed="rId4">
             <a:extLst>
               <a:ext uri="{28A0092B-C50C-407E-A947-70E740481C1C}">
                 <a14:useLocalDpi xmlns:a14="http://schemas.microsoft.com/office/drawing/2010/main" val="0"/>
@@ -12152,22 +11529,21 @@
           <a:p>
             <a:pPr algn="ctr"/>
             <a:r>
-              <a:rPr lang="en-US" dirty="0" err="1" smtClean="0"/>
+              <a:rPr lang="en-US" dirty="0" err="1"/>
               <a:t>Remove_back</a:t>
             </a:r>
             <a:r>
-              <a:rPr lang="en-US" dirty="0" smtClean="0"/>
+              <a:rPr lang="en-US" dirty="0"/>
               <a:t>() is an operation used to pop an element at back of the </a:t>
             </a:r>
             <a:r>
-              <a:rPr lang="en-US" dirty="0" err="1" smtClean="0"/>
+              <a:rPr lang="en-US" dirty="0" err="1"/>
               <a:t>Deque</a:t>
             </a:r>
             <a:r>
-              <a:rPr lang="en-US" dirty="0" smtClean="0"/>
+              <a:rPr lang="en-US" dirty="0"/>
               <a:t>.</a:t>
             </a:r>
-            <a:endParaRPr lang="en-US" dirty="0"/>
           </a:p>
         </p:txBody>
       </p:sp>
@@ -12181,13 +11557,6 @@
   <p:clrMapOvr>
     <a:masterClrMapping/>
   </p:clrMapOvr>
-  <p:timing>
-    <p:tnLst>
-      <p:par>
-        <p:cTn id="1" dur="indefinite" restart="never" nodeType="tmRoot"/>
-      </p:par>
-    </p:tnLst>
-  </p:timing>
 </p:sld>
 </file>
 
@@ -13766,13 +13135,6 @@
   <p:clrMapOvr>
     <a:masterClrMapping/>
   </p:clrMapOvr>
-  <p:timing>
-    <p:tnLst>
-      <p:par>
-        <p:cTn id="1" dur="indefinite" restart="never" nodeType="tmRoot"/>
-      </p:par>
-    </p:tnLst>
-  </p:timing>
 </p:sld>
 </file>
 
@@ -13882,13 +13244,6 @@
   <p:clrMapOvr>
     <a:masterClrMapping/>
   </p:clrMapOvr>
-  <p:timing>
-    <p:tnLst>
-      <p:par>
-        <p:cTn id="1" dur="indefinite" restart="never" nodeType="tmRoot"/>
-      </p:par>
-    </p:tnLst>
-  </p:timing>
 </p:sld>
 </file>
 
@@ -13925,10 +13280,9 @@
           <a:lstStyle/>
           <a:p>
             <a:r>
-              <a:rPr lang="en-US" dirty="0" smtClean="0"/>
+              <a:rPr lang="en-US" dirty="0"/>
               <a:t>C Program</a:t>
             </a:r>
-            <a:endParaRPr lang="en-US" dirty="0"/>
           </a:p>
         </p:txBody>
       </p:sp>
@@ -13942,42 +13296,42 @@
             <p:ph idx="1"/>
             <p:extLst>
               <p:ext uri="{D42A27DB-BD31-4B8C-83A1-F6EECF244321}">
-                <p14:modId xmlns:p14="http://schemas.microsoft.com/office/powerpoint/2010/main" val="3403932153"/>
+                <p14:modId xmlns:p14="http://schemas.microsoft.com/office/powerpoint/2010/main" val="1208319759"/>
               </p:ext>
             </p:extLst>
           </p:nvPr>
         </p:nvGraphicFramePr>
         <p:xfrm>
-          <a:off x="2141538" y="1828800"/>
-          <a:ext cx="3646487" cy="2303463"/>
+          <a:off x="1966913" y="1719263"/>
+          <a:ext cx="3995737" cy="2524125"/>
         </p:xfrm>
         <a:graphic>
           <a:graphicData uri="http://schemas.openxmlformats.org/presentationml/2006/ole">
             <mc:AlternateContent xmlns:mc="http://schemas.openxmlformats.org/markup-compatibility/2006">
               <mc:Choice xmlns:v="urn:schemas-microsoft-com:vml" Requires="v">
-                <p:oleObj spid="_x0000_s9316" name="Packager Shell Object" showAsIcon="1" r:id="rId3" imgW="677880" imgH="481320" progId="Package">
+                <p:oleObj name="Packager Shell Object" showAsIcon="1" r:id="rId2" imgW="742962" imgH="526962" progId="Package">
                   <p:embed/>
                 </p:oleObj>
               </mc:Choice>
               <mc:Fallback>
-                <p:oleObj name="Packager Shell Object" showAsIcon="1" r:id="rId3" imgW="677880" imgH="481320" progId="Package">
+                <p:oleObj name="Packager Shell Object" showAsIcon="1" r:id="rId2" imgW="742962" imgH="526962" progId="Package">
                   <p:embed/>
                   <p:pic>
                     <p:nvPicPr>
-                      <p:cNvPr id="0" name=""/>
+                      <p:cNvPr id="4" name="Content Placeholder 3"/>
                       <p:cNvPicPr/>
                       <p:nvPr/>
                     </p:nvPicPr>
                     <p:blipFill>
-                      <a:blip r:embed="rId4"/>
+                      <a:blip r:embed="rId3"/>
                       <a:stretch>
                         <a:fillRect/>
                       </a:stretch>
                     </p:blipFill>
                     <p:spPr>
                       <a:xfrm>
-                        <a:off x="2141538" y="1828800"/>
-                        <a:ext cx="3646487" cy="2303463"/>
+                        <a:off x="1966913" y="1719263"/>
+                        <a:ext cx="3995737" cy="2524125"/>
                       </a:xfrm>
                       <a:prstGeom prst="rect">
                         <a:avLst/>
@@ -14000,13 +13354,6 @@
   <p:clrMapOvr>
     <a:masterClrMapping/>
   </p:clrMapOvr>
-  <p:timing>
-    <p:tnLst>
-      <p:par>
-        <p:cTn id="1" dur="indefinite" restart="never" nodeType="tmRoot"/>
-      </p:par>
-    </p:tnLst>
-  </p:timing>
 </p:sld>
 </file>
 
@@ -14043,10 +13390,9 @@
           <a:lstStyle/>
           <a:p>
             <a:r>
-              <a:rPr lang="en-US" dirty="0" smtClean="0"/>
+              <a:rPr lang="en-US" dirty="0"/>
               <a:t>Priority Queue</a:t>
             </a:r>
-            <a:endParaRPr lang="en-US" dirty="0"/>
           </a:p>
         </p:txBody>
       </p:sp>
@@ -14068,13 +13414,8 @@
             <a:pPr algn="just"/>
             <a:r>
               <a:rPr lang="en-US" dirty="0"/>
-              <a:t>A priority queue is a type of queue that arranges elements based on their priority values. Elements with higher priority values are typically retrieved before elements with lower priority values</a:t>
-            </a:r>
-            <a:r>
-              <a:rPr lang="en-US" dirty="0" smtClean="0"/>
-              <a:t>.</a:t>
-            </a:r>
-            <a:endParaRPr lang="en-US" dirty="0"/>
+              <a:t>A priority queue is a type of queue that arranges elements based on their priority values. Elements with higher priority values are typically retrieved before elements with lower priority values.</a:t>
+            </a:r>
           </a:p>
           <a:p>
             <a:pPr algn="just"/>
@@ -14088,7 +13429,7 @@
               <a:buNone/>
               <a:defRPr/>
             </a:pPr>
-            <a:endParaRPr lang="en-US" dirty="0" smtClean="0">
+            <a:endParaRPr lang="en-US" dirty="0">
               <a:solidFill>
                 <a:schemeClr val="tx1">
                   <a:lumMod val="85000"/>
@@ -14105,7 +13446,7 @@
               <a:defRPr/>
             </a:pPr>
             <a:r>
-              <a:rPr lang="en-US" dirty="0" smtClean="0">
+              <a:rPr lang="en-US" dirty="0">
                 <a:solidFill>
                   <a:schemeClr val="tx1">
                     <a:lumMod val="85000"/>
@@ -14115,20 +13456,7 @@
                 <a:latin typeface="Times New Roman" panose="02020603050405020304" pitchFamily="18" charset="0"/>
                 <a:cs typeface="Times New Roman" panose="02020603050405020304" pitchFamily="18" charset="0"/>
               </a:rPr>
-              <a:t>Key </a:t>
-            </a:r>
-            <a:r>
-              <a:rPr lang="en-US" dirty="0">
-                <a:solidFill>
-                  <a:schemeClr val="tx1">
-                    <a:lumMod val="85000"/>
-                    <a:lumOff val="15000"/>
-                  </a:schemeClr>
-                </a:solidFill>
-                <a:latin typeface="Times New Roman" panose="02020603050405020304" pitchFamily="18" charset="0"/>
-                <a:cs typeface="Times New Roman" panose="02020603050405020304" pitchFamily="18" charset="0"/>
-              </a:rPr>
-              <a:t>Characteristics of a Priority Queue:</a:t>
+              <a:t>Key Characteristics of a Priority Queue:</a:t>
             </a:r>
           </a:p>
           <a:p>
@@ -14186,7 +13514,7 @@
               <a:defRPr/>
             </a:pPr>
             <a:r>
-              <a:rPr lang="en-US" b="1" dirty="0" smtClean="0">
+              <a:rPr lang="en-US" b="1" dirty="0">
                 <a:solidFill>
                   <a:schemeClr val="tx1">
                     <a:lumMod val="85000"/>
@@ -14196,10 +13524,10 @@
                 <a:latin typeface="Times New Roman" panose="02020603050405020304" pitchFamily="18" charset="0"/>
                 <a:cs typeface="Times New Roman" panose="02020603050405020304" pitchFamily="18" charset="0"/>
               </a:rPr>
-              <a:t>No </a:t>
-            </a:r>
-            <a:r>
-              <a:rPr lang="en-US" b="1" dirty="0">
+              <a:t>No Fixed Order:</a:t>
+            </a:r>
+            <a:r>
+              <a:rPr lang="en-US" dirty="0">
                 <a:solidFill>
                   <a:schemeClr val="tx1">
                     <a:lumMod val="85000"/>
@@ -14209,25 +13537,12 @@
                 <a:latin typeface="Times New Roman" panose="02020603050405020304" pitchFamily="18" charset="0"/>
                 <a:cs typeface="Times New Roman" panose="02020603050405020304" pitchFamily="18" charset="0"/>
               </a:rPr>
-              <a:t>Fixed Order:</a:t>
-            </a:r>
-            <a:r>
-              <a:rPr lang="en-US" dirty="0">
-                <a:solidFill>
-                  <a:schemeClr val="tx1">
-                    <a:lumMod val="85000"/>
-                    <a:lumOff val="15000"/>
-                  </a:schemeClr>
-                </a:solidFill>
-                <a:latin typeface="Times New Roman" panose="02020603050405020304" pitchFamily="18" charset="0"/>
-                <a:cs typeface="Times New Roman" panose="02020603050405020304" pitchFamily="18" charset="0"/>
-              </a:rPr>
               <a:t> Unlike a regular queue, there is no fixed order (e.g., First-In-First-Out or Last-In-First-Out) for removing elements. The removal is based on the priority of the elements.</a:t>
             </a:r>
           </a:p>
           <a:p>
             <a:pPr algn="just"/>
-            <a:endParaRPr lang="en-US" dirty="0" smtClean="0"/>
+            <a:endParaRPr lang="en-US" dirty="0"/>
           </a:p>
         </p:txBody>
       </p:sp>
@@ -14241,13 +13556,6 @@
   <p:clrMapOvr>
     <a:masterClrMapping/>
   </p:clrMapOvr>
-  <p:timing>
-    <p:tnLst>
-      <p:par>
-        <p:cTn id="1" dur="indefinite" restart="never" nodeType="tmRoot"/>
-      </p:par>
-    </p:tnLst>
-  </p:timing>
 </p:sld>
 </file>
 
@@ -14322,12 +13630,8 @@
               <a:buNone/>
             </a:pPr>
             <a:r>
-              <a:rPr lang="en-US" dirty="0" smtClean="0"/>
-              <a:t>So</a:t>
-            </a:r>
-            <a:r>
               <a:rPr lang="en-US" dirty="0"/>
-              <a:t>, a priority Queue is an extension of the queue with the following properties. </a:t>
+              <a:t>So, a priority Queue is an extension of the queue with the following properties. </a:t>
             </a:r>
           </a:p>
           <a:p>
@@ -14415,13 +13719,6 @@
   <p:clrMapOvr>
     <a:masterClrMapping/>
   </p:clrMapOvr>
-  <p:timing>
-    <p:tnLst>
-      <p:par>
-        <p:cTn id="1" dur="indefinite" restart="never" nodeType="tmRoot"/>
-      </p:par>
-    </p:tnLst>
-  </p:timing>
 </p:sld>
 </file>
 
@@ -14810,13 +14107,6 @@
   <p:clrMapOvr>
     <a:masterClrMapping/>
   </p:clrMapOvr>
-  <p:timing>
-    <p:tnLst>
-      <p:par>
-        <p:cTn id="1" dur="indefinite" restart="never" nodeType="tmRoot"/>
-      </p:par>
-    </p:tnLst>
-  </p:timing>
 </p:sld>
 </file>
 
@@ -14886,16 +14176,8 @@
               <a:buNone/>
             </a:pPr>
             <a:r>
-              <a:rPr lang="en-US" dirty="0" smtClean="0"/>
-              <a:t>A </a:t>
-            </a:r>
-            <a:r>
               <a:rPr lang="en-US" dirty="0"/>
-              <a:t>typical priority queue supports the following </a:t>
-            </a:r>
-            <a:r>
-              <a:rPr lang="en-US" dirty="0" smtClean="0"/>
-              <a:t>operations:</a:t>
+              <a:t>A typical priority queue supports the following operations:</a:t>
             </a:r>
           </a:p>
           <a:p>
@@ -14903,7 +14185,7 @@
               <a:buNone/>
             </a:pPr>
             <a:r>
-              <a:rPr lang="en-US" b="1" dirty="0" smtClean="0"/>
+              <a:rPr lang="en-US" b="1" dirty="0"/>
               <a:t>1) Insertion in a Priority Queue</a:t>
             </a:r>
             <a:endParaRPr lang="en-US" dirty="0"/>
@@ -14916,7 +14198,6 @@
               <a:rPr lang="en-US" b="1" dirty="0"/>
               <a:t>2) Deletion in a Priority Queue  </a:t>
             </a:r>
-            <a:endParaRPr lang="en-US" b="1" dirty="0" smtClean="0"/>
           </a:p>
           <a:p>
             <a:pPr marL="0" indent="0" algn="just" fontAlgn="base">
@@ -14945,13 +14226,6 @@
   <p:clrMapOvr>
     <a:masterClrMapping/>
   </p:clrMapOvr>
-  <p:timing>
-    <p:tnLst>
-      <p:par>
-        <p:cTn id="1" dur="indefinite" restart="never" nodeType="tmRoot"/>
-      </p:par>
-    </p:tnLst>
-  </p:timing>
 </p:sld>
 </file>
 
@@ -15017,12 +14291,8 @@
           <a:p>
             <a:pPr fontAlgn="base"/>
             <a:r>
-              <a:rPr lang="en-US" dirty="0" smtClean="0"/>
-              <a:t>There </a:t>
-            </a:r>
-            <a:r>
               <a:rPr lang="en-US" dirty="0"/>
-              <a:t>is no priority attached to elements in a queue, the rule of first-in-first-out(FIFO) is implemented whereas, in a priority queue, the elements have a priority. The elements with higher priority are served first.</a:t>
+              <a:t>There is no priority attached to elements in a queue, the rule of first-in-first-out(FIFO) is implemented whereas, in a priority queue, the elements have a priority. The elements with higher priority are served first.</a:t>
             </a:r>
           </a:p>
           <a:p>
@@ -15040,13 +14310,6 @@
   <p:clrMapOvr>
     <a:masterClrMapping/>
   </p:clrMapOvr>
-  <p:timing>
-    <p:tnLst>
-      <p:par>
-        <p:cTn id="1" dur="indefinite" restart="never" nodeType="tmRoot"/>
-      </p:par>
-    </p:tnLst>
-  </p:timing>
 </p:sld>
 </file>
 
@@ -15103,16 +14366,6 @@
                 <a:cs typeface="Times New Roman" panose="02020603050405020304" pitchFamily="18" charset="0"/>
               </a:rPr>
               <a:t> </a:t>
-            </a:r>
-            <a:r>
-              <a:rPr lang="en-US" altLang="en-US" b="1" cap="none" dirty="0">
-                <a:solidFill>
-                  <a:srgbClr val="273239"/>
-                </a:solidFill>
-                <a:latin typeface="Times New Roman" panose="02020603050405020304" pitchFamily="18" charset="0"/>
-                <a:cs typeface="Times New Roman" panose="02020603050405020304" pitchFamily="18" charset="0"/>
-              </a:rPr>
-              <a:t/>
             </a:r>
             <a:br>
               <a:rPr lang="en-US" altLang="en-US" b="1" cap="none" dirty="0">
@@ -15826,7 +15079,7 @@
               <a:tabLst/>
             </a:pPr>
             <a:r>
-              <a:rPr kumimoji="0" lang="en-US" altLang="en-US" b="0" i="0" u="none" strike="noStrike" cap="none" normalizeH="0" baseline="0" dirty="0" smtClean="0">
+              <a:rPr kumimoji="0" lang="en-US" altLang="en-US" b="0" i="0" u="none" strike="noStrike" cap="none" normalizeH="0" baseline="0" dirty="0">
                 <a:ln>
                   <a:noFill/>
                 </a:ln>
@@ -15839,7 +15092,7 @@
               </a:rPr>
               <a:t>A simple implementation is to use an array of the following structure. </a:t>
             </a:r>
-            <a:endParaRPr kumimoji="0" lang="en-US" altLang="en-US" b="0" i="0" u="none" strike="noStrike" cap="none" normalizeH="0" baseline="0" dirty="0" smtClean="0">
+            <a:endParaRPr kumimoji="0" lang="en-US" altLang="en-US" b="0" i="0" u="none" strike="noStrike" cap="none" normalizeH="0" baseline="0" dirty="0">
               <a:ln>
                 <a:noFill/>
               </a:ln>
@@ -15869,7 +15122,7 @@
               <a:tabLst/>
             </a:pPr>
             <a:r>
-              <a:rPr kumimoji="0" lang="en-US" altLang="en-US" b="0" i="0" u="none" strike="noStrike" cap="none" normalizeH="0" baseline="0" dirty="0" err="1" smtClean="0">
+              <a:rPr kumimoji="0" lang="en-US" altLang="en-US" b="0" i="0" u="none" strike="noStrike" cap="none" normalizeH="0" baseline="0" dirty="0" err="1">
                 <a:ln>
                   <a:noFill/>
                 </a:ln>
@@ -15883,7 +15136,7 @@
               <a:t>struct</a:t>
             </a:r>
             <a:r>
-              <a:rPr kumimoji="0" lang="en-US" altLang="en-US" b="0" i="0" u="none" strike="noStrike" cap="none" normalizeH="0" baseline="0" dirty="0" smtClean="0">
+              <a:rPr kumimoji="0" lang="en-US" altLang="en-US" b="0" i="0" u="none" strike="noStrike" cap="none" normalizeH="0" baseline="0" dirty="0">
                 <a:ln>
                   <a:noFill/>
                 </a:ln>
@@ -15897,7 +15150,7 @@
               <a:t> item {</a:t>
             </a:r>
             <a:br>
-              <a:rPr kumimoji="0" lang="en-US" altLang="en-US" b="0" i="0" u="none" strike="noStrike" cap="none" normalizeH="0" baseline="0" dirty="0" smtClean="0">
+              <a:rPr kumimoji="0" lang="en-US" altLang="en-US" b="0" i="0" u="none" strike="noStrike" cap="none" normalizeH="0" baseline="0" dirty="0">
                 <a:ln>
                   <a:noFill/>
                 </a:ln>
@@ -15910,7 +15163,7 @@
               </a:rPr>
             </a:br>
             <a:r>
-              <a:rPr kumimoji="0" lang="en-US" altLang="en-US" b="0" i="0" u="none" strike="noStrike" cap="none" normalizeH="0" baseline="0" dirty="0" smtClean="0">
+              <a:rPr kumimoji="0" lang="en-US" altLang="en-US" b="0" i="0" u="none" strike="noStrike" cap="none" normalizeH="0" baseline="0" dirty="0">
                 <a:ln>
                   <a:noFill/>
                 </a:ln>
@@ -15924,7 +15177,7 @@
               <a:t>        </a:t>
             </a:r>
             <a:r>
-              <a:rPr kumimoji="0" lang="en-US" altLang="en-US" b="0" i="0" u="none" strike="noStrike" cap="none" normalizeH="0" baseline="0" dirty="0" err="1" smtClean="0">
+              <a:rPr kumimoji="0" lang="en-US" altLang="en-US" b="0" i="0" u="none" strike="noStrike" cap="none" normalizeH="0" baseline="0" dirty="0" err="1">
                 <a:ln>
                   <a:noFill/>
                 </a:ln>
@@ -15938,7 +15191,7 @@
               <a:t>int</a:t>
             </a:r>
             <a:r>
-              <a:rPr kumimoji="0" lang="en-US" altLang="en-US" b="0" i="0" u="none" strike="noStrike" cap="none" normalizeH="0" baseline="0" dirty="0" smtClean="0">
+              <a:rPr kumimoji="0" lang="en-US" altLang="en-US" b="0" i="0" u="none" strike="noStrike" cap="none" normalizeH="0" baseline="0" dirty="0">
                 <a:ln>
                   <a:noFill/>
                 </a:ln>
@@ -15952,7 +15205,7 @@
               <a:t> item;</a:t>
             </a:r>
             <a:br>
-              <a:rPr kumimoji="0" lang="en-US" altLang="en-US" b="0" i="0" u="none" strike="noStrike" cap="none" normalizeH="0" baseline="0" dirty="0" smtClean="0">
+              <a:rPr kumimoji="0" lang="en-US" altLang="en-US" b="0" i="0" u="none" strike="noStrike" cap="none" normalizeH="0" baseline="0" dirty="0">
                 <a:ln>
                   <a:noFill/>
                 </a:ln>
@@ -15965,7 +15218,7 @@
               </a:rPr>
             </a:br>
             <a:r>
-              <a:rPr kumimoji="0" lang="en-US" altLang="en-US" b="0" i="0" u="none" strike="noStrike" cap="none" normalizeH="0" baseline="0" dirty="0" smtClean="0">
+              <a:rPr kumimoji="0" lang="en-US" altLang="en-US" b="0" i="0" u="none" strike="noStrike" cap="none" normalizeH="0" baseline="0" dirty="0">
                 <a:ln>
                   <a:noFill/>
                 </a:ln>
@@ -15979,7 +15232,7 @@
               <a:t>        </a:t>
             </a:r>
             <a:r>
-              <a:rPr kumimoji="0" lang="en-US" altLang="en-US" b="0" i="0" u="none" strike="noStrike" cap="none" normalizeH="0" baseline="0" dirty="0" err="1" smtClean="0">
+              <a:rPr kumimoji="0" lang="en-US" altLang="en-US" b="0" i="0" u="none" strike="noStrike" cap="none" normalizeH="0" baseline="0" dirty="0" err="1">
                 <a:ln>
                   <a:noFill/>
                 </a:ln>
@@ -15993,7 +15246,7 @@
               <a:t>int</a:t>
             </a:r>
             <a:r>
-              <a:rPr kumimoji="0" lang="en-US" altLang="en-US" b="0" i="0" u="none" strike="noStrike" cap="none" normalizeH="0" baseline="0" dirty="0" smtClean="0">
+              <a:rPr kumimoji="0" lang="en-US" altLang="en-US" b="0" i="0" u="none" strike="noStrike" cap="none" normalizeH="0" baseline="0" dirty="0">
                 <a:ln>
                   <a:noFill/>
                 </a:ln>
@@ -16007,7 +15260,7 @@
               <a:t> priority;</a:t>
             </a:r>
             <a:br>
-              <a:rPr kumimoji="0" lang="en-US" altLang="en-US" b="0" i="0" u="none" strike="noStrike" cap="none" normalizeH="0" baseline="0" dirty="0" smtClean="0">
+              <a:rPr kumimoji="0" lang="en-US" altLang="en-US" b="0" i="0" u="none" strike="noStrike" cap="none" normalizeH="0" baseline="0" dirty="0">
                 <a:ln>
                   <a:noFill/>
                 </a:ln>
@@ -16020,7 +15273,7 @@
               </a:rPr>
             </a:br>
             <a:r>
-              <a:rPr kumimoji="0" lang="en-US" altLang="en-US" b="0" i="0" u="none" strike="noStrike" cap="none" normalizeH="0" baseline="0" dirty="0" smtClean="0">
+              <a:rPr kumimoji="0" lang="en-US" altLang="en-US" b="0" i="0" u="none" strike="noStrike" cap="none" normalizeH="0" baseline="0" dirty="0">
                 <a:ln>
                   <a:noFill/>
                 </a:ln>
@@ -16052,7 +15305,7 @@
               <a:tabLst/>
             </a:pPr>
             <a:r>
-              <a:rPr kumimoji="0" lang="en-US" altLang="en-US" b="1" i="0" u="none" strike="noStrike" cap="none" normalizeH="0" baseline="0" dirty="0" err="1" smtClean="0">
+              <a:rPr kumimoji="0" lang="en-US" altLang="en-US" b="1" i="0" u="none" strike="noStrike" cap="none" normalizeH="0" baseline="0" dirty="0" err="1">
                 <a:ln>
                   <a:noFill/>
                 </a:ln>
@@ -16066,7 +15319,7 @@
               <a:t>enqueue</a:t>
             </a:r>
             <a:r>
-              <a:rPr kumimoji="0" lang="en-US" altLang="en-US" b="1" i="0" u="none" strike="noStrike" cap="none" normalizeH="0" baseline="0" dirty="0" smtClean="0">
+              <a:rPr kumimoji="0" lang="en-US" altLang="en-US" b="1" i="0" u="none" strike="noStrike" cap="none" normalizeH="0" baseline="0" dirty="0">
                 <a:ln>
                   <a:noFill/>
                 </a:ln>
@@ -16080,7 +15333,7 @@
               <a:t>():</a:t>
             </a:r>
             <a:r>
-              <a:rPr kumimoji="0" lang="en-US" altLang="en-US" b="0" i="0" u="none" strike="noStrike" cap="none" normalizeH="0" baseline="0" dirty="0" smtClean="0">
+              <a:rPr kumimoji="0" lang="en-US" altLang="en-US" b="0" i="0" u="none" strike="noStrike" cap="none" normalizeH="0" baseline="0" dirty="0">
                 <a:ln>
                   <a:noFill/>
                 </a:ln>
@@ -16112,7 +15365,7 @@
               <a:tabLst/>
             </a:pPr>
             <a:r>
-              <a:rPr kumimoji="0" lang="en-US" altLang="en-US" b="1" i="0" u="none" strike="noStrike" cap="none" normalizeH="0" baseline="0" dirty="0" err="1" smtClean="0">
+              <a:rPr kumimoji="0" lang="en-US" altLang="en-US" b="1" i="0" u="none" strike="noStrike" cap="none" normalizeH="0" baseline="0" dirty="0" err="1">
                 <a:ln>
                   <a:noFill/>
                 </a:ln>
@@ -16126,7 +15379,7 @@
               <a:t>dequeue</a:t>
             </a:r>
             <a:r>
-              <a:rPr kumimoji="0" lang="en-US" altLang="en-US" b="1" i="0" u="none" strike="noStrike" cap="none" normalizeH="0" baseline="0" dirty="0" smtClean="0">
+              <a:rPr kumimoji="0" lang="en-US" altLang="en-US" b="1" i="0" u="none" strike="noStrike" cap="none" normalizeH="0" baseline="0" dirty="0">
                 <a:ln>
                   <a:noFill/>
                 </a:ln>
@@ -16140,7 +15393,7 @@
               <a:t>():</a:t>
             </a:r>
             <a:r>
-              <a:rPr kumimoji="0" lang="en-US" altLang="en-US" b="0" i="0" u="none" strike="noStrike" cap="none" normalizeH="0" baseline="0" dirty="0" smtClean="0">
+              <a:rPr kumimoji="0" lang="en-US" altLang="en-US" b="0" i="0" u="none" strike="noStrike" cap="none" normalizeH="0" baseline="0" dirty="0">
                 <a:ln>
                   <a:noFill/>
                 </a:ln>
@@ -16172,7 +15425,7 @@
               <a:tabLst/>
             </a:pPr>
             <a:r>
-              <a:rPr kumimoji="0" lang="en-US" altLang="en-US" b="1" i="0" u="none" strike="noStrike" cap="none" normalizeH="0" baseline="0" dirty="0" smtClean="0">
+              <a:rPr kumimoji="0" lang="en-US" altLang="en-US" b="1" i="0" u="none" strike="noStrike" cap="none" normalizeH="0" baseline="0" dirty="0">
                 <a:ln>
                   <a:noFill/>
                 </a:ln>
@@ -16186,7 +15439,7 @@
               <a:t>peek()/top():</a:t>
             </a:r>
             <a:r>
-              <a:rPr kumimoji="0" lang="en-US" altLang="en-US" b="0" i="0" u="none" strike="noStrike" cap="none" normalizeH="0" baseline="0" dirty="0" smtClean="0">
+              <a:rPr kumimoji="0" lang="en-US" altLang="en-US" b="0" i="0" u="none" strike="noStrike" cap="none" normalizeH="0" baseline="0" dirty="0">
                 <a:ln>
                   <a:noFill/>
                 </a:ln>
@@ -16217,7 +15470,7 @@
               <a:buNone/>
               <a:tabLst/>
             </a:pPr>
-            <a:endParaRPr kumimoji="0" lang="en-US" altLang="en-US" b="0" i="0" u="none" strike="noStrike" cap="none" normalizeH="0" baseline="0" dirty="0" smtClean="0">
+            <a:endParaRPr kumimoji="0" lang="en-US" altLang="en-US" b="0" i="0" u="none" strike="noStrike" cap="none" normalizeH="0" baseline="0" dirty="0">
               <a:ln>
                 <a:noFill/>
               </a:ln>
@@ -16241,13 +15494,6 @@
   <p:clrMapOvr>
     <a:masterClrMapping/>
   </p:clrMapOvr>
-  <p:timing>
-    <p:tnLst>
-      <p:par>
-        <p:cTn id="1" dur="indefinite" restart="never" nodeType="tmRoot"/>
-      </p:par>
-    </p:tnLst>
-  </p:timing>
 </p:sld>
 </file>
 
@@ -16996,7 +16242,7 @@
               <a:tabLst/>
             </a:pPr>
             <a:r>
-              <a:rPr kumimoji="0" lang="en-US" altLang="en-US" sz="1600" b="0" i="0" u="none" strike="noStrike" cap="none" normalizeH="0" baseline="0" dirty="0" smtClean="0">
+              <a:rPr kumimoji="0" lang="en-US" altLang="en-US" sz="1600" b="0" i="0" u="none" strike="noStrike" cap="none" normalizeH="0" baseline="0" dirty="0">
                 <a:ln>
                   <a:noFill/>
                 </a:ln>
@@ -17010,7 +16256,7 @@
               <a:t>In a Linked List implementation, the entries are sorted in descending order based on their priority. The highest priority element is always added to the front of the priority queue, which is formed using linked lists. The functions like </a:t>
             </a:r>
             <a:r>
-              <a:rPr kumimoji="0" lang="en-US" altLang="en-US" sz="1600" b="1" i="0" u="none" strike="noStrike" cap="none" normalizeH="0" baseline="0" dirty="0" smtClean="0">
+              <a:rPr kumimoji="0" lang="en-US" altLang="en-US" sz="1600" b="1" i="0" u="none" strike="noStrike" cap="none" normalizeH="0" baseline="0" dirty="0">
                 <a:ln>
                   <a:noFill/>
                 </a:ln>
@@ -17024,7 +16270,7 @@
               <a:t>push()</a:t>
             </a:r>
             <a:r>
-              <a:rPr kumimoji="0" lang="en-US" altLang="en-US" sz="1600" b="0" i="0" u="none" strike="noStrike" cap="none" normalizeH="0" baseline="0" dirty="0" smtClean="0">
+              <a:rPr kumimoji="0" lang="en-US" altLang="en-US" sz="1600" b="0" i="0" u="none" strike="noStrike" cap="none" normalizeH="0" baseline="0" dirty="0">
                 <a:ln>
                   <a:noFill/>
                 </a:ln>
@@ -17038,7 +16284,7 @@
               <a:t>, </a:t>
             </a:r>
             <a:r>
-              <a:rPr kumimoji="0" lang="en-US" altLang="en-US" sz="1600" b="1" i="0" u="none" strike="noStrike" cap="none" normalizeH="0" baseline="0" dirty="0" smtClean="0">
+              <a:rPr kumimoji="0" lang="en-US" altLang="en-US" sz="1600" b="1" i="0" u="none" strike="noStrike" cap="none" normalizeH="0" baseline="0" dirty="0">
                 <a:ln>
                   <a:noFill/>
                 </a:ln>
@@ -17052,7 +16298,7 @@
               <a:t>pop()</a:t>
             </a:r>
             <a:r>
-              <a:rPr kumimoji="0" lang="en-US" altLang="en-US" sz="1600" b="0" i="0" u="none" strike="noStrike" cap="none" normalizeH="0" baseline="0" dirty="0" smtClean="0">
+              <a:rPr kumimoji="0" lang="en-US" altLang="en-US" sz="1600" b="0" i="0" u="none" strike="noStrike" cap="none" normalizeH="0" baseline="0" dirty="0">
                 <a:ln>
                   <a:noFill/>
                 </a:ln>
@@ -17066,7 +16312,7 @@
               <a:t>, and</a:t>
             </a:r>
             <a:r>
-              <a:rPr kumimoji="0" lang="en-US" altLang="en-US" sz="1600" b="1" i="0" u="none" strike="noStrike" cap="none" normalizeH="0" baseline="0" dirty="0" smtClean="0">
+              <a:rPr kumimoji="0" lang="en-US" altLang="en-US" sz="1600" b="1" i="0" u="none" strike="noStrike" cap="none" normalizeH="0" baseline="0" dirty="0">
                 <a:ln>
                   <a:noFill/>
                 </a:ln>
@@ -17080,7 +16326,7 @@
               <a:t> peek()</a:t>
             </a:r>
             <a:r>
-              <a:rPr kumimoji="0" lang="en-US" altLang="en-US" sz="1600" b="0" i="0" u="none" strike="noStrike" cap="none" normalizeH="0" baseline="0" dirty="0" smtClean="0">
+              <a:rPr kumimoji="0" lang="en-US" altLang="en-US" sz="1600" b="0" i="0" u="none" strike="noStrike" cap="none" normalizeH="0" baseline="0" dirty="0">
                 <a:ln>
                   <a:noFill/>
                 </a:ln>
@@ -17093,7 +16339,7 @@
               </a:rPr>
               <a:t> are used to implement a priority queue using a linked list and are explained as follows:</a:t>
             </a:r>
-            <a:endParaRPr kumimoji="0" lang="en-US" altLang="en-US" sz="1600" b="0" i="0" u="none" strike="noStrike" cap="none" normalizeH="0" baseline="0" dirty="0" smtClean="0">
+            <a:endParaRPr kumimoji="0" lang="en-US" altLang="en-US" sz="1600" b="0" i="0" u="none" strike="noStrike" cap="none" normalizeH="0" baseline="0" dirty="0">
               <a:ln>
                 <a:noFill/>
               </a:ln>
@@ -17123,7 +16369,7 @@
               <a:tabLst/>
             </a:pPr>
             <a:r>
-              <a:rPr kumimoji="0" lang="en-US" altLang="en-US" sz="1600" b="1" i="0" u="none" strike="noStrike" cap="none" normalizeH="0" baseline="0" dirty="0" smtClean="0">
+              <a:rPr kumimoji="0" lang="en-US" altLang="en-US" sz="1600" b="1" i="0" u="none" strike="noStrike" cap="none" normalizeH="0" baseline="0" dirty="0">
                 <a:ln>
                   <a:noFill/>
                 </a:ln>
@@ -17137,7 +16383,7 @@
               <a:t>push(): </a:t>
             </a:r>
             <a:r>
-              <a:rPr kumimoji="0" lang="en-US" altLang="en-US" sz="1600" b="0" i="0" u="none" strike="noStrike" cap="none" normalizeH="0" baseline="0" dirty="0" smtClean="0">
+              <a:rPr kumimoji="0" lang="en-US" altLang="en-US" sz="1600" b="0" i="0" u="none" strike="noStrike" cap="none" normalizeH="0" baseline="0" dirty="0">
                 <a:ln>
                   <a:noFill/>
                 </a:ln>
@@ -17169,7 +16415,7 @@
               <a:tabLst/>
             </a:pPr>
             <a:r>
-              <a:rPr kumimoji="0" lang="en-US" altLang="en-US" sz="1600" b="1" i="0" u="none" strike="noStrike" cap="none" normalizeH="0" baseline="0" dirty="0" smtClean="0">
+              <a:rPr kumimoji="0" lang="en-US" altLang="en-US" sz="1600" b="1" i="0" u="none" strike="noStrike" cap="none" normalizeH="0" baseline="0" dirty="0">
                 <a:ln>
                   <a:noFill/>
                 </a:ln>
@@ -17183,7 +16429,7 @@
               <a:t>pop(): </a:t>
             </a:r>
             <a:r>
-              <a:rPr kumimoji="0" lang="en-US" altLang="en-US" sz="1600" b="0" i="0" u="none" strike="noStrike" cap="none" normalizeH="0" baseline="0" dirty="0" smtClean="0">
+              <a:rPr kumimoji="0" lang="en-US" altLang="en-US" sz="1600" b="0" i="0" u="none" strike="noStrike" cap="none" normalizeH="0" baseline="0" dirty="0">
                 <a:ln>
                   <a:noFill/>
                 </a:ln>
@@ -17215,7 +16461,7 @@
               <a:tabLst/>
             </a:pPr>
             <a:r>
-              <a:rPr kumimoji="0" lang="en-US" altLang="en-US" sz="1600" b="1" i="0" u="none" strike="noStrike" cap="none" normalizeH="0" baseline="0" dirty="0" smtClean="0">
+              <a:rPr kumimoji="0" lang="en-US" altLang="en-US" sz="1600" b="1" i="0" u="none" strike="noStrike" cap="none" normalizeH="0" baseline="0" dirty="0">
                 <a:ln>
                   <a:noFill/>
                 </a:ln>
@@ -17229,7 +16475,7 @@
               <a:t>peek() / top(): </a:t>
             </a:r>
             <a:r>
-              <a:rPr kumimoji="0" lang="en-US" altLang="en-US" sz="1600" b="0" i="0" u="none" strike="noStrike" cap="none" normalizeH="0" baseline="0" dirty="0" smtClean="0">
+              <a:rPr kumimoji="0" lang="en-US" altLang="en-US" sz="1600" b="0" i="0" u="none" strike="noStrike" cap="none" normalizeH="0" baseline="0" dirty="0">
                 <a:ln>
                   <a:noFill/>
                 </a:ln>
@@ -17260,7 +16506,7 @@
               <a:buNone/>
               <a:tabLst/>
             </a:pPr>
-            <a:endParaRPr kumimoji="0" lang="en-US" altLang="en-US" sz="1600" b="0" i="0" u="none" strike="noStrike" cap="none" normalizeH="0" baseline="0" dirty="0" smtClean="0">
+            <a:endParaRPr kumimoji="0" lang="en-US" altLang="en-US" sz="1600" b="0" i="0" u="none" strike="noStrike" cap="none" normalizeH="0" baseline="0" dirty="0">
               <a:ln>
                 <a:noFill/>
               </a:ln>
@@ -17284,13 +16530,6 @@
   <p:clrMapOvr>
     <a:masterClrMapping/>
   </p:clrMapOvr>
-  <p:timing>
-    <p:tnLst>
-      <p:par>
-        <p:cTn id="1" dur="indefinite" restart="never" nodeType="tmRoot"/>
-      </p:par>
-    </p:tnLst>
-  </p:timing>
 </p:sld>
 </file>
 
@@ -18042,7 +17281,7 @@
               <a:tabLst/>
             </a:pPr>
             <a:r>
-              <a:rPr kumimoji="0" lang="en-US" altLang="en-US" sz="1400" b="0" i="0" u="none" strike="noStrike" cap="none" normalizeH="0" baseline="0" dirty="0" smtClean="0">
+              <a:rPr kumimoji="0" lang="en-US" altLang="en-US" sz="1400" b="0" i="0" u="none" strike="noStrike" cap="none" normalizeH="0" baseline="0" dirty="0">
                 <a:ln>
                   <a:noFill/>
                 </a:ln>
@@ -18056,7 +17295,7 @@
               <a:t>Binary Heap is generally preferred for priority queue implementation because heaps provide better performance compared to arrays or </a:t>
             </a:r>
             <a:r>
-              <a:rPr kumimoji="0" lang="en-US" altLang="en-US" sz="1400" b="0" i="0" u="none" strike="noStrike" cap="none" normalizeH="0" baseline="0" dirty="0" err="1" smtClean="0">
+              <a:rPr kumimoji="0" lang="en-US" altLang="en-US" sz="1400" b="0" i="0" u="none" strike="noStrike" cap="none" normalizeH="0" baseline="0" dirty="0" err="1">
                 <a:ln>
                   <a:noFill/>
                 </a:ln>
@@ -18070,7 +17309,7 @@
               <a:t>LinkedList</a:t>
             </a:r>
             <a:r>
-              <a:rPr kumimoji="0" lang="en-US" altLang="en-US" sz="1400" b="0" i="0" u="none" strike="noStrike" cap="none" normalizeH="0" baseline="0" dirty="0" smtClean="0">
+              <a:rPr kumimoji="0" lang="en-US" altLang="en-US" sz="1400" b="0" i="0" u="none" strike="noStrike" cap="none" normalizeH="0" baseline="0" dirty="0">
                 <a:ln>
                   <a:noFill/>
                 </a:ln>
@@ -18084,7 +17323,7 @@
               <a:t>. Considering </a:t>
             </a:r>
             <a:r>
-              <a:rPr kumimoji="0" lang="en-US" altLang="en-US" sz="1400" b="0" i="0" u="none" strike="noStrike" cap="none" normalizeH="0" dirty="0" smtClean="0">
+              <a:rPr kumimoji="0" lang="en-US" altLang="en-US" sz="1400" b="0" i="0" u="none" strike="noStrike" cap="none" normalizeH="0" dirty="0">
                 <a:ln>
                   <a:noFill/>
                 </a:ln>
@@ -18098,7 +17337,7 @@
               <a:t> </a:t>
             </a:r>
             <a:r>
-              <a:rPr kumimoji="0" lang="en-US" altLang="en-US" sz="1400" b="0" i="0" u="none" strike="noStrike" cap="none" normalizeH="0" baseline="0" dirty="0" smtClean="0">
+              <a:rPr kumimoji="0" lang="en-US" altLang="en-US" sz="1400" b="0" i="0" u="none" strike="noStrike" cap="none" normalizeH="0" baseline="0" dirty="0">
                 <a:ln>
                   <a:noFill/>
                 </a:ln>
@@ -18112,7 +17351,7 @@
               <a:t>the properties of a heap, The entry with the largest key is on the top and can be removed immediately. It will, however, take time O(log n) to restore the heap</a:t>
             </a:r>
             <a:r>
-              <a:rPr kumimoji="0" lang="en-US" altLang="en-US" sz="1400" b="0" i="0" u="none" strike="noStrike" cap="none" normalizeH="0" dirty="0" smtClean="0">
+              <a:rPr kumimoji="0" lang="en-US" altLang="en-US" sz="1400" b="0" i="0" u="none" strike="noStrike" cap="none" normalizeH="0" dirty="0">
                 <a:ln>
                   <a:noFill/>
                 </a:ln>
@@ -18126,7 +17365,7 @@
               <a:t> </a:t>
             </a:r>
             <a:r>
-              <a:rPr kumimoji="0" lang="en-US" altLang="en-US" sz="1400" b="0" i="0" u="none" strike="noStrike" cap="none" normalizeH="0" baseline="0" dirty="0" smtClean="0">
+              <a:rPr kumimoji="0" lang="en-US" altLang="en-US" sz="1400" b="0" i="0" u="none" strike="noStrike" cap="none" normalizeH="0" baseline="0" dirty="0">
                 <a:ln>
                   <a:noFill/>
                 </a:ln>
@@ -18183,7 +17422,7 @@
               <a:tabLst/>
             </a:pPr>
             <a:r>
-              <a:rPr kumimoji="0" lang="en-US" altLang="en-US" sz="1400" b="0" i="0" u="none" strike="noStrike" cap="none" normalizeH="0" baseline="0" dirty="0" smtClean="0">
+              <a:rPr kumimoji="0" lang="en-US" altLang="en-US" sz="1400" b="0" i="0" u="none" strike="noStrike" cap="none" normalizeH="0" baseline="0" dirty="0">
                 <a:ln>
                   <a:noFill/>
                 </a:ln>
@@ -18196,7 +17435,7 @@
               </a:rPr>
               <a:t>Operations on Binary Heap are as follows: </a:t>
             </a:r>
-            <a:endParaRPr kumimoji="0" lang="en-US" altLang="en-US" sz="1400" b="0" i="0" u="none" strike="noStrike" cap="none" normalizeH="0" baseline="0" dirty="0" smtClean="0">
+            <a:endParaRPr kumimoji="0" lang="en-US" altLang="en-US" sz="1400" b="0" i="0" u="none" strike="noStrike" cap="none" normalizeH="0" baseline="0" dirty="0">
               <a:ln>
                 <a:noFill/>
               </a:ln>
@@ -18236,7 +17475,7 @@
               <a:t>I</a:t>
             </a:r>
             <a:r>
-              <a:rPr kumimoji="0" lang="en-US" altLang="en-US" sz="1400" b="1" i="0" u="none" strike="noStrike" cap="none" normalizeH="0" baseline="0" dirty="0" smtClean="0">
+              <a:rPr kumimoji="0" lang="en-US" altLang="en-US" sz="1400" b="1" i="0" u="none" strike="noStrike" cap="none" normalizeH="0" baseline="0" dirty="0">
                 <a:ln>
                   <a:noFill/>
                 </a:ln>
@@ -18250,7 +17489,7 @@
               <a:t>nsert(p):</a:t>
             </a:r>
             <a:r>
-              <a:rPr kumimoji="0" lang="en-US" altLang="en-US" sz="1400" b="0" i="0" u="none" strike="noStrike" cap="none" normalizeH="0" baseline="0" dirty="0" smtClean="0">
+              <a:rPr kumimoji="0" lang="en-US" altLang="en-US" sz="1400" b="0" i="0" u="none" strike="noStrike" cap="none" normalizeH="0" baseline="0" dirty="0">
                 <a:ln>
                   <a:noFill/>
                 </a:ln>
@@ -18282,7 +17521,7 @@
               <a:tabLst/>
             </a:pPr>
             <a:r>
-              <a:rPr kumimoji="0" lang="en-US" altLang="en-US" sz="1400" b="1" i="0" u="none" strike="noStrike" cap="none" normalizeH="0" baseline="0" dirty="0" err="1" smtClean="0">
+              <a:rPr kumimoji="0" lang="en-US" altLang="en-US" sz="1400" b="1" i="0" u="none" strike="noStrike" cap="none" normalizeH="0" baseline="0" dirty="0" err="1">
                 <a:ln>
                   <a:noFill/>
                 </a:ln>
@@ -18296,7 +17535,7 @@
               <a:t>extractMax</a:t>
             </a:r>
             <a:r>
-              <a:rPr kumimoji="0" lang="en-US" altLang="en-US" sz="1400" b="1" i="0" u="none" strike="noStrike" cap="none" normalizeH="0" baseline="0" dirty="0" smtClean="0">
+              <a:rPr kumimoji="0" lang="en-US" altLang="en-US" sz="1400" b="1" i="0" u="none" strike="noStrike" cap="none" normalizeH="0" baseline="0" dirty="0">
                 <a:ln>
                   <a:noFill/>
                 </a:ln>
@@ -18310,7 +17549,7 @@
               <a:t>():</a:t>
             </a:r>
             <a:r>
-              <a:rPr kumimoji="0" lang="en-US" altLang="en-US" sz="1400" b="0" i="0" u="none" strike="noStrike" cap="none" normalizeH="0" baseline="0" dirty="0" smtClean="0">
+              <a:rPr kumimoji="0" lang="en-US" altLang="en-US" sz="1400" b="0" i="0" u="none" strike="noStrike" cap="none" normalizeH="0" baseline="0" dirty="0">
                 <a:ln>
                   <a:noFill/>
                 </a:ln>
@@ -18342,7 +17581,7 @@
               <a:tabLst/>
             </a:pPr>
             <a:r>
-              <a:rPr kumimoji="0" lang="en-US" altLang="en-US" sz="1400" b="1" i="0" u="none" strike="noStrike" cap="none" normalizeH="0" baseline="0" dirty="0" err="1" smtClean="0">
+              <a:rPr kumimoji="0" lang="en-US" altLang="en-US" sz="1400" b="1" i="0" u="none" strike="noStrike" cap="none" normalizeH="0" baseline="0" dirty="0" err="1">
                 <a:ln>
                   <a:noFill/>
                 </a:ln>
@@ -18356,7 +17595,7 @@
               <a:t>getMax</a:t>
             </a:r>
             <a:r>
-              <a:rPr kumimoji="0" lang="en-US" altLang="en-US" sz="1400" b="1" i="0" u="none" strike="noStrike" cap="none" normalizeH="0" baseline="0" dirty="0" smtClean="0">
+              <a:rPr kumimoji="0" lang="en-US" altLang="en-US" sz="1400" b="1" i="0" u="none" strike="noStrike" cap="none" normalizeH="0" baseline="0" dirty="0">
                 <a:ln>
                   <a:noFill/>
                 </a:ln>
@@ -18370,7 +17609,7 @@
               <a:t>():</a:t>
             </a:r>
             <a:r>
-              <a:rPr kumimoji="0" lang="en-US" altLang="en-US" sz="1400" b="0" i="0" u="none" strike="noStrike" cap="none" normalizeH="0" baseline="0" dirty="0" smtClean="0">
+              <a:rPr kumimoji="0" lang="en-US" altLang="en-US" sz="1400" b="0" i="0" u="none" strike="noStrike" cap="none" normalizeH="0" baseline="0" dirty="0">
                 <a:ln>
                   <a:noFill/>
                 </a:ln>
@@ -18401,7 +17640,7 @@
               <a:buNone/>
               <a:tabLst/>
             </a:pPr>
-            <a:endParaRPr kumimoji="0" lang="en-US" altLang="en-US" sz="1800" b="0" i="0" u="none" strike="noStrike" cap="none" normalizeH="0" baseline="0" dirty="0" smtClean="0">
+            <a:endParaRPr kumimoji="0" lang="en-US" altLang="en-US" sz="1800" b="0" i="0" u="none" strike="noStrike" cap="none" normalizeH="0" baseline="0" dirty="0">
               <a:ln>
                 <a:noFill/>
               </a:ln>
@@ -18423,7 +17662,7 @@
           <p:nvPr>
             <p:extLst>
               <p:ext uri="{D42A27DB-BD31-4B8C-83A1-F6EECF244321}">
-                <p14:modId xmlns:p14="http://schemas.microsoft.com/office/powerpoint/2010/main" val="1659784081"/>
+                <p14:modId xmlns:p14="http://schemas.microsoft.com/office/powerpoint/2010/main" val="2118927588"/>
               </p:ext>
             </p:extLst>
           </p:nvPr>
@@ -18436,21 +17675,21 @@
           <a:graphicData uri="http://schemas.openxmlformats.org/presentationml/2006/ole">
             <mc:AlternateContent xmlns:mc="http://schemas.openxmlformats.org/markup-compatibility/2006">
               <mc:Choice xmlns:v="urn:schemas-microsoft-com:vml" Requires="v">
-                <p:oleObj spid="_x0000_s11267" name="Packager Shell Object" showAsIcon="1" r:id="rId3" imgW="1085838" imgH="526962" progId="Package">
+                <p:oleObj name="Packager Shell Object" showAsIcon="1" r:id="rId2" imgW="1085838" imgH="526962" progId="Package">
                   <p:embed/>
                 </p:oleObj>
               </mc:Choice>
               <mc:Fallback>
-                <p:oleObj name="Packager Shell Object" showAsIcon="1" r:id="rId3" imgW="1085838" imgH="526962" progId="Package">
+                <p:oleObj name="Packager Shell Object" showAsIcon="1" r:id="rId2" imgW="1085838" imgH="526962" progId="Package">
                   <p:embed/>
                   <p:pic>
                     <p:nvPicPr>
-                      <p:cNvPr id="0" name=""/>
+                      <p:cNvPr id="3" name="Object 2"/>
                       <p:cNvPicPr/>
                       <p:nvPr/>
                     </p:nvPicPr>
                     <p:blipFill>
-                      <a:blip r:embed="rId4"/>
+                      <a:blip r:embed="rId3"/>
                       <a:stretch>
                         <a:fillRect/>
                       </a:stretch>
@@ -18481,13 +17720,6 @@
   <p:clrMapOvr>
     <a:masterClrMapping/>
   </p:clrMapOvr>
-  <p:timing>
-    <p:tnLst>
-      <p:par>
-        <p:cTn id="1" dur="indefinite" restart="never" nodeType="tmRoot"/>
-      </p:par>
-    </p:tnLst>
-  </p:timing>
 </p:sld>
 </file>
 
@@ -18879,13 +18111,6 @@
   <p:clrMapOvr>
     <a:masterClrMapping/>
   </p:clrMapOvr>
-  <p:timing>
-    <p:tnLst>
-      <p:par>
-        <p:cTn id="1" dur="indefinite" restart="never" nodeType="tmRoot"/>
-      </p:par>
-    </p:tnLst>
-  </p:timing>
 </p:sld>
 </file>
 
@@ -18922,10 +18147,9 @@
           <a:lstStyle/>
           <a:p>
             <a:r>
-              <a:rPr lang="en-US" dirty="0" smtClean="0"/>
+              <a:rPr lang="en-US" dirty="0"/>
               <a:t>Heap</a:t>
             </a:r>
-            <a:endParaRPr lang="en-US" dirty="0"/>
           </a:p>
         </p:txBody>
       </p:sp>
@@ -18945,70 +18169,50 @@
           <a:lstStyle/>
           <a:p>
             <a:r>
-              <a:rPr lang="en-US" dirty="0" smtClean="0"/>
+              <a:rPr lang="en-US" dirty="0"/>
               <a:t>Heap is a complete binary tree.</a:t>
             </a:r>
           </a:p>
           <a:p>
             <a:r>
-              <a:rPr lang="en-US" dirty="0" smtClean="0"/>
+              <a:rPr lang="en-US" dirty="0"/>
               <a:t>Parent will be greater than their child.</a:t>
             </a:r>
           </a:p>
           <a:p>
             <a:r>
-              <a:rPr lang="en-US" dirty="0" smtClean="0"/>
+              <a:rPr lang="en-US" dirty="0"/>
               <a:t>In max heap, maximum element is at the root</a:t>
             </a:r>
           </a:p>
           <a:p>
             <a:r>
               <a:rPr lang="en-US" dirty="0"/>
-              <a:t>In </a:t>
-            </a:r>
-            <a:r>
-              <a:rPr lang="en-US" dirty="0" smtClean="0"/>
-              <a:t>min </a:t>
-            </a:r>
-            <a:r>
-              <a:rPr lang="en-US" dirty="0"/>
-              <a:t>heap, </a:t>
-            </a:r>
-            <a:r>
-              <a:rPr lang="en-US" dirty="0" smtClean="0"/>
-              <a:t>minimum </a:t>
-            </a:r>
-            <a:r>
-              <a:rPr lang="en-US" dirty="0"/>
-              <a:t>element is at the </a:t>
-            </a:r>
-            <a:r>
-              <a:rPr lang="en-US" dirty="0" smtClean="0"/>
-              <a:t>root</a:t>
+              <a:t>In min heap, minimum element is at the root</a:t>
             </a:r>
           </a:p>
           <a:p>
             <a:endParaRPr lang="en-US" dirty="0"/>
           </a:p>
           <a:p>
-            <a:endParaRPr lang="en-US" dirty="0" smtClean="0"/>
+            <a:endParaRPr lang="en-US" dirty="0"/>
           </a:p>
           <a:p>
             <a:pPr marL="0" indent="0">
               <a:buNone/>
             </a:pPr>
             <a:r>
-              <a:rPr lang="en-US" dirty="0" smtClean="0"/>
+              <a:rPr lang="en-US" dirty="0"/>
               <a:t>* Detailed discussion on Heaps will be </a:t>
             </a:r>
             <a:r>
-              <a:rPr lang="en-US" smtClean="0"/>
+              <a:rPr lang="en-US"/>
               <a:t>in Unit 4</a:t>
             </a:r>
             <a:endParaRPr lang="en-US" dirty="0"/>
           </a:p>
           <a:p>
-            <a:endParaRPr lang="en-US" dirty="0" smtClean="0"/>
+            <a:endParaRPr lang="en-US" dirty="0"/>
           </a:p>
           <a:p>
             <a:endParaRPr lang="en-US" dirty="0"/>
@@ -19025,13 +18229,6 @@
   <p:clrMapOvr>
     <a:masterClrMapping/>
   </p:clrMapOvr>
-  <p:timing>
-    <p:tnLst>
-      <p:par>
-        <p:cTn id="1" dur="indefinite" restart="never" nodeType="tmRoot"/>
-      </p:par>
-    </p:tnLst>
-  </p:timing>
 </p:sld>
 </file>
 
@@ -19068,10 +18265,9 @@
           <a:lstStyle/>
           <a:p>
             <a:r>
-              <a:rPr lang="en-US" dirty="0" smtClean="0"/>
+              <a:rPr lang="en-US" dirty="0"/>
               <a:t>Gate 2009</a:t>
             </a:r>
-            <a:endParaRPr lang="en-US" dirty="0"/>
           </a:p>
         </p:txBody>
       </p:sp>
@@ -19114,13 +18310,6 @@
   <p:clrMapOvr>
     <a:masterClrMapping/>
   </p:clrMapOvr>
-  <p:timing>
-    <p:tnLst>
-      <p:par>
-        <p:cTn id="1" dur="indefinite" restart="never" nodeType="tmRoot"/>
-      </p:par>
-    </p:tnLst>
-  </p:timing>
 </p:sld>
 </file>
 
@@ -19159,10 +18348,9 @@
           <a:lstStyle/>
           <a:p>
             <a:r>
-              <a:rPr lang="en-US" dirty="0" smtClean="0"/>
+              <a:rPr lang="en-US" dirty="0"/>
               <a:t>Implement Stack Using 2 Queues</a:t>
             </a:r>
-            <a:endParaRPr lang="en-US" dirty="0"/>
           </a:p>
         </p:txBody>
       </p:sp>
@@ -19182,25 +18370,25 @@
           <a:lstStyle/>
           <a:p>
             <a:r>
-              <a:rPr lang="en-US" dirty="0" smtClean="0"/>
+              <a:rPr lang="en-US" dirty="0"/>
               <a:t>Push (x)</a:t>
             </a:r>
           </a:p>
           <a:p>
             <a:r>
-              <a:rPr lang="en-US" dirty="0" smtClean="0">
+              <a:rPr lang="en-US" dirty="0">
                 <a:sym typeface="Wingdings" panose="05000000000000000000" pitchFamily="2" charset="2"/>
               </a:rPr>
               <a:t> </a:t>
             </a:r>
             <a:r>
-              <a:rPr lang="en-US" dirty="0" err="1" smtClean="0">
+              <a:rPr lang="en-US" dirty="0" err="1">
                 <a:sym typeface="Wingdings" panose="05000000000000000000" pitchFamily="2" charset="2"/>
               </a:rPr>
               <a:t>enqueue</a:t>
             </a:r>
             <a:r>
-              <a:rPr lang="en-US" dirty="0" smtClean="0">
+              <a:rPr lang="en-US" dirty="0">
                 <a:sym typeface="Wingdings" panose="05000000000000000000" pitchFamily="2" charset="2"/>
               </a:rPr>
               <a:t> x to Q2</a:t>
@@ -19208,7 +18396,7 @@
           </a:p>
           <a:p>
             <a:r>
-              <a:rPr lang="en-US" dirty="0" smtClean="0">
+              <a:rPr lang="en-US" dirty="0">
                 <a:sym typeface="Wingdings" panose="05000000000000000000" pitchFamily="2" charset="2"/>
               </a:rPr>
               <a:t> Copy element by element from Q1 to Q2</a:t>
@@ -19216,70 +18404,67 @@
           </a:p>
           <a:p>
             <a:r>
-              <a:rPr lang="en-US" dirty="0" smtClean="0">
+              <a:rPr lang="en-US" dirty="0">
                 <a:sym typeface="Wingdings" panose="05000000000000000000" pitchFamily="2" charset="2"/>
               </a:rPr>
               <a:t> </a:t>
             </a:r>
             <a:r>
-              <a:rPr lang="en-US" dirty="0" err="1" smtClean="0">
+              <a:rPr lang="en-US" dirty="0" err="1">
                 <a:sym typeface="Wingdings" panose="05000000000000000000" pitchFamily="2" charset="2"/>
               </a:rPr>
               <a:t>enqueue</a:t>
             </a:r>
             <a:r>
-              <a:rPr lang="en-US" dirty="0" smtClean="0">
+              <a:rPr lang="en-US" dirty="0">
                 <a:sym typeface="Wingdings" panose="05000000000000000000" pitchFamily="2" charset="2"/>
               </a:rPr>
               <a:t> Q2Q1</a:t>
             </a:r>
+          </a:p>
+          <a:p>
+            <a:pPr marL="0" indent="0">
+              <a:buNone/>
+            </a:pPr>
+            <a:r>
+              <a:rPr lang="en-US" dirty="0">
+                <a:sym typeface="Wingdings" panose="05000000000000000000" pitchFamily="2" charset="2"/>
+              </a:rPr>
+              <a:t>Time: O(n)</a:t>
+            </a:r>
+          </a:p>
+          <a:p>
             <a:endParaRPr lang="en-US" dirty="0">
               <a:sym typeface="Wingdings" panose="05000000000000000000" pitchFamily="2" charset="2"/>
             </a:endParaRPr>
           </a:p>
           <a:p>
+            <a:r>
+              <a:rPr lang="en-US" dirty="0">
+                <a:sym typeface="Wingdings" panose="05000000000000000000" pitchFamily="2" charset="2"/>
+              </a:rPr>
+              <a:t>Pop</a:t>
+            </a:r>
+          </a:p>
+          <a:p>
+            <a:r>
+              <a:rPr lang="en-US" dirty="0">
+                <a:sym typeface="Wingdings" panose="05000000000000000000" pitchFamily="2" charset="2"/>
+              </a:rPr>
+              <a:t> Remove the top from Q1</a:t>
+            </a:r>
+          </a:p>
+          <a:p>
+            <a:endParaRPr lang="en-US" dirty="0">
+              <a:sym typeface="Wingdings" panose="05000000000000000000" pitchFamily="2" charset="2"/>
+            </a:endParaRPr>
+          </a:p>
+          <a:p>
             <a:pPr marL="0" indent="0">
               <a:buNone/>
             </a:pPr>
             <a:r>
-              <a:rPr lang="en-US" dirty="0" smtClean="0">
-                <a:sym typeface="Wingdings" panose="05000000000000000000" pitchFamily="2" charset="2"/>
-              </a:rPr>
-              <a:t>Time: O(n)</a:t>
-            </a:r>
-          </a:p>
-          <a:p>
-            <a:endParaRPr lang="en-US" dirty="0">
-              <a:sym typeface="Wingdings" panose="05000000000000000000" pitchFamily="2" charset="2"/>
-            </a:endParaRPr>
-          </a:p>
-          <a:p>
-            <a:r>
-              <a:rPr lang="en-US" dirty="0" smtClean="0">
-                <a:sym typeface="Wingdings" panose="05000000000000000000" pitchFamily="2" charset="2"/>
-              </a:rPr>
-              <a:t>Pop</a:t>
-            </a:r>
-          </a:p>
-          <a:p>
-            <a:r>
-              <a:rPr lang="en-US" dirty="0" smtClean="0">
-                <a:sym typeface="Wingdings" panose="05000000000000000000" pitchFamily="2" charset="2"/>
-              </a:rPr>
-              <a:t> Remove the top from Q1</a:t>
-            </a:r>
-          </a:p>
-          <a:p>
-            <a:endParaRPr lang="en-US" dirty="0">
-              <a:sym typeface="Wingdings" panose="05000000000000000000" pitchFamily="2" charset="2"/>
-            </a:endParaRPr>
-          </a:p>
-          <a:p>
-            <a:pPr marL="0" indent="0">
-              <a:buNone/>
-            </a:pPr>
-            <a:r>
-              <a:rPr lang="en-US" dirty="0" smtClean="0">
+              <a:rPr lang="en-US" dirty="0">
                 <a:sym typeface="Wingdings" panose="05000000000000000000" pitchFamily="2" charset="2"/>
               </a:rPr>
               <a:t>Time: O(1)</a:t>
@@ -19297,7 +18482,7 @@
             <a:pPr marL="0" indent="0">
               <a:buNone/>
             </a:pPr>
-            <a:endParaRPr lang="en-US" dirty="0" smtClean="0">
+            <a:endParaRPr lang="en-US" dirty="0">
               <a:sym typeface="Wingdings" panose="05000000000000000000" pitchFamily="2" charset="2"/>
             </a:endParaRPr>
           </a:p>
@@ -19306,7 +18491,7 @@
               <a:buNone/>
             </a:pPr>
             <a:r>
-              <a:rPr lang="en-US" dirty="0" smtClean="0">
+              <a:rPr lang="en-US" dirty="0">
                 <a:sym typeface="Wingdings" panose="05000000000000000000" pitchFamily="2" charset="2"/>
               </a:rPr>
               <a:t>Space complexity overall: O(n)</a:t>
@@ -19324,13 +18509,6 @@
   <p:clrMapOvr>
     <a:masterClrMapping/>
   </p:clrMapOvr>
-  <p:timing>
-    <p:tnLst>
-      <p:par>
-        <p:cTn id="1" dur="indefinite" restart="never" nodeType="tmRoot"/>
-      </p:par>
-    </p:tnLst>
-  </p:timing>
 </p:sld>
 </file>
 
@@ -19369,10 +18547,9 @@
           <a:lstStyle/>
           <a:p>
             <a:r>
-              <a:rPr lang="en-US" dirty="0" smtClean="0"/>
+              <a:rPr lang="en-US" dirty="0"/>
               <a:t>Implement Stack using single queue</a:t>
             </a:r>
-            <a:endParaRPr lang="en-US" dirty="0"/>
           </a:p>
         </p:txBody>
       </p:sp>
@@ -19391,7 +18568,7 @@
           <a:bodyPr/>
           <a:lstStyle/>
           <a:p>
-            <a:endParaRPr lang="en-US" dirty="0" smtClean="0"/>
+            <a:endParaRPr lang="en-US" dirty="0"/>
           </a:p>
           <a:p>
             <a:endParaRPr lang="en-US" dirty="0"/>
@@ -19401,48 +18578,42 @@
               <a:rPr lang="en-US" dirty="0">
                 <a:hlinkClick r:id="rId2"/>
               </a:rPr>
-              <a:t>https://www.geeksforgeeks.org/implement-a-stack-using-single-queue</a:t>
-            </a:r>
-            <a:r>
-              <a:rPr lang="en-US" dirty="0" smtClean="0">
-                <a:hlinkClick r:id="rId2"/>
-              </a:rPr>
-              <a:t>/</a:t>
-            </a:r>
-            <a:endParaRPr lang="en-US" dirty="0" smtClean="0"/>
-          </a:p>
-          <a:p>
+              <a:t>https://www.geeksforgeeks.org/implement-a-stack-using-single-queue/</a:t>
+            </a:r>
             <a:endParaRPr lang="en-US" dirty="0"/>
           </a:p>
           <a:p>
-            <a:endParaRPr lang="en-US" dirty="0" smtClean="0"/>
+            <a:endParaRPr lang="en-US" dirty="0"/>
+          </a:p>
+          <a:p>
+            <a:endParaRPr lang="en-US" dirty="0"/>
           </a:p>
           <a:p>
             <a:pPr marL="0" indent="0">
               <a:buNone/>
             </a:pPr>
             <a:r>
-              <a:rPr lang="en-US" b="1" dirty="0" smtClean="0"/>
+              <a:rPr lang="en-US" b="1" dirty="0"/>
               <a:t>Drawbacks</a:t>
             </a:r>
           </a:p>
           <a:p>
             <a:r>
-              <a:rPr lang="en-US" dirty="0" smtClean="0"/>
+              <a:rPr lang="en-US" dirty="0"/>
               <a:t>Memory wastage</a:t>
             </a:r>
           </a:p>
           <a:p>
             <a:r>
-              <a:rPr lang="en-US" dirty="0" smtClean="0"/>
+              <a:rPr lang="en-US" dirty="0"/>
               <a:t>Time complexity will be O(n</a:t>
             </a:r>
             <a:r>
-              <a:rPr lang="en-US" baseline="30000" dirty="0" smtClean="0"/>
+              <a:rPr lang="en-US" baseline="30000" dirty="0"/>
               <a:t>2</a:t>
             </a:r>
             <a:r>
-              <a:rPr lang="en-US" dirty="0" smtClean="0"/>
+              <a:rPr lang="en-US" dirty="0"/>
               <a:t>)</a:t>
             </a:r>
           </a:p>
@@ -19458,13 +18629,6 @@
   <p:clrMapOvr>
     <a:masterClrMapping/>
   </p:clrMapOvr>
-  <p:timing>
-    <p:tnLst>
-      <p:par>
-        <p:cTn id="1" dur="indefinite" restart="never" nodeType="tmRoot"/>
-      </p:par>
-    </p:tnLst>
-  </p:timing>
 </p:sld>
 </file>
 
@@ -19501,10 +18665,9 @@
           <a:lstStyle/>
           <a:p>
             <a:r>
-              <a:rPr lang="en-US" dirty="0" smtClean="0"/>
+              <a:rPr lang="en-US" dirty="0"/>
               <a:t>Implement Queue using Stacks</a:t>
             </a:r>
-            <a:endParaRPr lang="en-US" dirty="0"/>
           </a:p>
         </p:txBody>
       </p:sp>
@@ -19529,17 +18692,17 @@
               <a:buNone/>
             </a:pPr>
             <a:r>
-              <a:rPr lang="en-US" dirty="0" smtClean="0"/>
+              <a:rPr lang="en-US" dirty="0"/>
               <a:t>Push (X)</a:t>
             </a:r>
           </a:p>
           <a:p>
             <a:r>
-              <a:rPr lang="en-US" dirty="0" smtClean="0"/>
+              <a:rPr lang="en-US" dirty="0"/>
               <a:t>Transfer S1</a:t>
             </a:r>
             <a:r>
-              <a:rPr lang="en-US" dirty="0" smtClean="0">
+              <a:rPr lang="en-US" dirty="0">
                 <a:sym typeface="Wingdings" panose="05000000000000000000" pitchFamily="2" charset="2"/>
               </a:rPr>
               <a:t>S2</a:t>
@@ -19547,7 +18710,7 @@
           </a:p>
           <a:p>
             <a:r>
-              <a:rPr lang="en-US" dirty="0" smtClean="0">
+              <a:rPr lang="en-US" dirty="0">
                 <a:sym typeface="Wingdings" panose="05000000000000000000" pitchFamily="2" charset="2"/>
               </a:rPr>
               <a:t>XS1</a:t>
@@ -19555,7 +18718,7 @@
           </a:p>
           <a:p>
             <a:r>
-              <a:rPr lang="en-US" dirty="0" smtClean="0">
+              <a:rPr lang="en-US" dirty="0">
                 <a:sym typeface="Wingdings" panose="05000000000000000000" pitchFamily="2" charset="2"/>
               </a:rPr>
               <a:t>Transfer S2S1</a:t>
@@ -19581,21 +18744,21 @@
             <a:pPr marL="0" indent="0">
               <a:buNone/>
             </a:pPr>
-            <a:endParaRPr lang="en-US" dirty="0" smtClean="0">
-              <a:sym typeface="Wingdings" panose="05000000000000000000" pitchFamily="2" charset="2"/>
-            </a:endParaRPr>
-          </a:p>
-          <a:p>
             <a:endParaRPr lang="en-US" dirty="0">
               <a:sym typeface="Wingdings" panose="05000000000000000000" pitchFamily="2" charset="2"/>
             </a:endParaRPr>
           </a:p>
           <a:p>
+            <a:endParaRPr lang="en-US" dirty="0">
+              <a:sym typeface="Wingdings" panose="05000000000000000000" pitchFamily="2" charset="2"/>
+            </a:endParaRPr>
+          </a:p>
+          <a:p>
             <a:pPr marL="0" indent="0">
               <a:buNone/>
             </a:pPr>
             <a:r>
-              <a:rPr lang="en-US" dirty="0" smtClean="0">
+              <a:rPr lang="en-US" dirty="0">
                 <a:sym typeface="Wingdings" panose="05000000000000000000" pitchFamily="2" charset="2"/>
               </a:rPr>
               <a:t>Pop (X)</a:t>
@@ -19603,7 +18766,7 @@
           </a:p>
           <a:p>
             <a:r>
-              <a:rPr lang="en-US" dirty="0" smtClean="0">
+              <a:rPr lang="en-US" dirty="0">
                 <a:sym typeface="Wingdings" panose="05000000000000000000" pitchFamily="2" charset="2"/>
               </a:rPr>
               <a:t>Remove the top from S1</a:t>
@@ -19613,7 +18776,7 @@
             <a:pPr marL="0" indent="0">
               <a:buNone/>
             </a:pPr>
-            <a:endParaRPr lang="en-US" dirty="0" smtClean="0">
+            <a:endParaRPr lang="en-US" dirty="0">
               <a:sym typeface="Wingdings" panose="05000000000000000000" pitchFamily="2" charset="2"/>
             </a:endParaRPr>
           </a:p>
@@ -19622,22 +18785,10 @@
               <a:buNone/>
             </a:pPr>
             <a:r>
-              <a:rPr lang="en-US" dirty="0" smtClean="0">
-                <a:sym typeface="Wingdings" panose="05000000000000000000" pitchFamily="2" charset="2"/>
-              </a:rPr>
-              <a:t>Time</a:t>
-            </a:r>
-            <a:r>
               <a:rPr lang="en-US" dirty="0">
                 <a:sym typeface="Wingdings" panose="05000000000000000000" pitchFamily="2" charset="2"/>
               </a:rPr>
-              <a:t>: </a:t>
-            </a:r>
-            <a:r>
-              <a:rPr lang="en-US" dirty="0" smtClean="0">
-                <a:sym typeface="Wingdings" panose="05000000000000000000" pitchFamily="2" charset="2"/>
-              </a:rPr>
-              <a:t>O(1)</a:t>
+              <a:t>Time: O(1)</a:t>
             </a:r>
           </a:p>
           <a:p>
@@ -19646,7 +18797,7 @@
             </a:endParaRPr>
           </a:p>
           <a:p>
-            <a:endParaRPr lang="en-US" dirty="0" smtClean="0">
+            <a:endParaRPr lang="en-US" dirty="0">
               <a:sym typeface="Wingdings" panose="05000000000000000000" pitchFamily="2" charset="2"/>
             </a:endParaRPr>
           </a:p>
@@ -19665,7 +18816,7 @@
             <a:pPr marL="0" indent="0">
               <a:buNone/>
             </a:pPr>
-            <a:endParaRPr lang="en-US" dirty="0" smtClean="0">
+            <a:endParaRPr lang="en-US" dirty="0">
               <a:sym typeface="Wingdings" panose="05000000000000000000" pitchFamily="2" charset="2"/>
             </a:endParaRPr>
           </a:p>
@@ -19684,13 +18835,6 @@
   <p:clrMapOvr>
     <a:masterClrMapping/>
   </p:clrMapOvr>
-  <p:timing>
-    <p:tnLst>
-      <p:par>
-        <p:cTn id="1" dur="indefinite" restart="never" nodeType="tmRoot"/>
-      </p:par>
-    </p:tnLst>
-  </p:timing>
 </p:sld>
 </file>
 
@@ -19727,10 +18871,9 @@
           <a:lstStyle/>
           <a:p>
             <a:r>
-              <a:rPr lang="en-US" dirty="0" smtClean="0"/>
+              <a:rPr lang="en-US" dirty="0"/>
               <a:t>Lab Experiments</a:t>
             </a:r>
-            <a:endParaRPr lang="en-US" dirty="0"/>
           </a:p>
         </p:txBody>
       </p:sp>
@@ -19755,27 +18898,19 @@
               <a:t>Using array and </a:t>
             </a:r>
             <a:r>
-              <a:rPr lang="en-US" dirty="0" err="1" smtClean="0"/>
+              <a:rPr lang="en-US" dirty="0" err="1"/>
               <a:t>linkedlist</a:t>
             </a:r>
             <a:r>
-              <a:rPr lang="en-US" dirty="0" smtClean="0"/>
-              <a:t> </a:t>
-            </a:r>
-            <a:r>
               <a:rPr lang="en-US" dirty="0"/>
-              <a:t>implement Queue data structure and its operations like insert, delete, and display.</a:t>
+              <a:t> implement Queue data structure and its operations like insert, delete, and display.</a:t>
             </a:r>
           </a:p>
           <a:p>
             <a:pPr lvl="0" algn="just"/>
             <a:r>
               <a:rPr lang="en-US" dirty="0"/>
-              <a:t>Check whether the string is palindrome or not using array and Queue</a:t>
-            </a:r>
-            <a:r>
-              <a:rPr lang="en-US" dirty="0" smtClean="0"/>
-              <a:t>.</a:t>
+              <a:t>Check whether the string is palindrome or not using array and Queue.</a:t>
             </a:r>
           </a:p>
           <a:p>
@@ -19789,13 +18924,8 @@
             <a:pPr lvl="0"/>
             <a:r>
               <a:rPr lang="en-US" dirty="0"/>
-              <a:t>Using array and functions implement a Stack using Queues</a:t>
-            </a:r>
-            <a:r>
-              <a:rPr lang="en-US" dirty="0" smtClean="0"/>
-              <a:t>.</a:t>
-            </a:r>
-            <a:endParaRPr lang="en-US" dirty="0"/>
+              <a:t>Using array and functions implement a Stack using Queues.</a:t>
+            </a:r>
           </a:p>
           <a:p>
             <a:pPr marL="0" indent="0" algn="just">
@@ -19818,13 +18948,6 @@
   <p:clrMapOvr>
     <a:masterClrMapping/>
   </p:clrMapOvr>
-  <p:timing>
-    <p:tnLst>
-      <p:par>
-        <p:cTn id="1" dur="indefinite" restart="never" nodeType="tmRoot"/>
-      </p:par>
-    </p:tnLst>
-  </p:timing>
 </p:sld>
 </file>
 
@@ -19861,10 +18984,9 @@
           <a:lstStyle/>
           <a:p>
             <a:r>
-              <a:rPr lang="en-US" dirty="0" smtClean="0"/>
+              <a:rPr lang="en-US" dirty="0"/>
               <a:t>Practice Questions</a:t>
             </a:r>
-            <a:endParaRPr lang="en-US" dirty="0"/>
           </a:p>
         </p:txBody>
       </p:sp>
@@ -19887,15 +19009,9 @@
               <a:rPr lang="en-US" dirty="0">
                 <a:hlinkClick r:id="rId2"/>
               </a:rPr>
-              <a:t>https://www.geeksforgeeks.org/quizzes/top-mcqs-on-queue-data-structure-with-answers</a:t>
-            </a:r>
-            <a:r>
-              <a:rPr lang="en-US" dirty="0" smtClean="0">
-                <a:hlinkClick r:id="rId2"/>
-              </a:rPr>
-              <a:t>/</a:t>
-            </a:r>
-            <a:endParaRPr lang="en-US" dirty="0" smtClean="0"/>
+              <a:t>https://www.geeksforgeeks.org/quizzes/top-mcqs-on-queue-data-structure-with-answers/</a:t>
+            </a:r>
+            <a:endParaRPr lang="en-US" dirty="0"/>
           </a:p>
           <a:p>
             <a:endParaRPr lang="en-US" dirty="0"/>
@@ -19912,13 +19028,6 @@
   <p:clrMapOvr>
     <a:masterClrMapping/>
   </p:clrMapOvr>
-  <p:timing>
-    <p:tnLst>
-      <p:par>
-        <p:cTn id="1" dur="indefinite" restart="never" nodeType="tmRoot"/>
-      </p:par>
-    </p:tnLst>
-  </p:timing>
 </p:sld>
 </file>
 
@@ -19964,10 +19073,6 @@
               <a:rPr lang="en-US" b="1" dirty="0"/>
               <a:t> Interview Questions on Stack and Queue</a:t>
             </a:r>
-            <a:r>
-              <a:rPr lang="en-US" dirty="0"/>
-              <a:t/>
-            </a:r>
             <a:br>
               <a:rPr lang="en-US" dirty="0"/>
             </a:br>
@@ -19993,12 +19098,8 @@
           <a:lstStyle/>
           <a:p>
             <a:r>
-              <a:rPr lang="en-US" dirty="0" smtClean="0"/>
-              <a:t>Stack </a:t>
-            </a:r>
-            <a:r>
               <a:rPr lang="en-US" dirty="0"/>
-              <a:t>and queue are two different elements in computer programming. Static is usually a container of objects that are supposed to be inserted or removed according to the LIFO principle. While queue is a container of objects in a linear collection that is supposed to be inserted and removed according to the FIFO principle. Here are some commonly asked data structure </a:t>
+              <a:t>Stack and queue are two different elements in computer programming. Static is usually a container of objects that are supposed to be inserted or removed according to the LIFO principle. While queue is a container of objects in a linear collection that is supposed to be inserted and removed according to the FIFO principle. Here are some commonly asked data structure </a:t>
             </a:r>
             <a:r>
               <a:rPr lang="en-US" dirty="0" err="1"/>
@@ -20017,12 +19118,8 @@
           </a:p>
           <a:p>
             <a:r>
-              <a:rPr lang="en-US" b="1" dirty="0" smtClean="0"/>
-              <a:t>Creation </a:t>
-            </a:r>
-            <a:r>
               <a:rPr lang="en-US" b="1" dirty="0"/>
-              <a:t>of a queue using two stacks</a:t>
+              <a:t>Creation of a queue using two stacks</a:t>
             </a:r>
           </a:p>
           <a:p>
@@ -20037,10 +19134,9 @@
           </a:p>
           <a:p>
             <a:r>
-              <a:rPr lang="en-US" dirty="0" smtClean="0"/>
+              <a:rPr lang="en-US" dirty="0"/>
               <a:t>Deletion of middle element of stack</a:t>
             </a:r>
-            <a:endParaRPr lang="en-US" dirty="0"/>
           </a:p>
         </p:txBody>
       </p:sp>
@@ -20054,13 +19150,6 @@
   <p:clrMapOvr>
     <a:masterClrMapping/>
   </p:clrMapOvr>
-  <p:timing>
-    <p:tnLst>
-      <p:par>
-        <p:cTn id="1" dur="indefinite" restart="never" nodeType="tmRoot"/>
-      </p:par>
-    </p:tnLst>
-  </p:timing>
 </p:sld>
 </file>
 
@@ -20141,13 +19230,6 @@
   <p:clrMapOvr>
     <a:masterClrMapping/>
   </p:clrMapOvr>
-  <p:timing>
-    <p:tnLst>
-      <p:par>
-        <p:cTn id="1" dur="indefinite" restart="never" nodeType="tmRoot"/>
-      </p:par>
-    </p:tnLst>
-  </p:timing>
 </p:sld>
 </file>
 
@@ -20220,15 +19302,9 @@
               <a:rPr lang="en-US" dirty="0">
                 <a:hlinkClick r:id="rId2"/>
               </a:rPr>
-              <a:t>https://www.geeksforgeeks.org/top-50-problems-on-queue-data-structure-asked-in-sde-interviews</a:t>
-            </a:r>
-            <a:r>
-              <a:rPr lang="en-US" dirty="0" smtClean="0">
-                <a:hlinkClick r:id="rId2"/>
-              </a:rPr>
-              <a:t>/</a:t>
-            </a:r>
-            <a:endParaRPr lang="en-US" dirty="0" smtClean="0"/>
+              <a:t>https://www.geeksforgeeks.org/top-50-problems-on-queue-data-structure-asked-in-sde-interviews/</a:t>
+            </a:r>
+            <a:endParaRPr lang="en-US" dirty="0"/>
           </a:p>
           <a:p>
             <a:endParaRPr lang="en-US" dirty="0"/>
@@ -20245,13 +19321,6 @@
   <p:clrMapOvr>
     <a:masterClrMapping/>
   </p:clrMapOvr>
-  <p:timing>
-    <p:tnLst>
-      <p:par>
-        <p:cTn id="1" dur="indefinite" restart="never" nodeType="tmRoot"/>
-      </p:par>
-    </p:tnLst>
-  </p:timing>
 </p:sld>
 </file>
 
@@ -20322,14 +19391,6 @@
               </a:rPr>
               <a:t>Applications of Queue:</a:t>
             </a:r>
-            <a:r>
-              <a:rPr lang="en-US" dirty="0">
-                <a:solidFill>
-                  <a:schemeClr val="tx1"/>
-                </a:solidFill>
-              </a:rPr>
-              <a:t/>
-            </a:r>
             <a:br>
               <a:rPr lang="en-US" dirty="0">
                 <a:solidFill>
@@ -20343,15 +19404,15 @@
                   <a:schemeClr val="tx1"/>
                 </a:solidFill>
               </a:rPr>
-              <a:t>Queue is used when things don’t have to be processed </a:t>
-            </a:r>
-            <a:r>
-              <a:rPr lang="en-US" dirty="0" smtClean="0">
+              <a:t>Queue is used when things don’t have to be processed immediately, but have to be processed in </a:t>
+            </a:r>
+            <a:r>
+              <a:rPr lang="en-US" b="1" dirty="0">
                 <a:solidFill>
                   <a:schemeClr val="tx1"/>
                 </a:solidFill>
               </a:rPr>
-              <a:t>immediately, </a:t>
+              <a:t>F</a:t>
             </a:r>
             <a:r>
               <a:rPr lang="en-US" dirty="0">
@@ -20359,7 +19420,7 @@
                   <a:schemeClr val="tx1"/>
                 </a:solidFill>
               </a:rPr>
-              <a:t>but have to be processed in </a:t>
+              <a:t>irst </a:t>
             </a:r>
             <a:r>
               <a:rPr lang="en-US" b="1" dirty="0">
@@ -20367,6 +19428,22 @@
                   <a:schemeClr val="tx1"/>
                 </a:solidFill>
               </a:rPr>
+              <a:t>I</a:t>
+            </a:r>
+            <a:r>
+              <a:rPr lang="en-US" dirty="0">
+                <a:solidFill>
+                  <a:schemeClr val="tx1"/>
+                </a:solidFill>
+              </a:rPr>
+              <a:t>n </a:t>
+            </a:r>
+            <a:r>
+              <a:rPr lang="en-US" b="1" dirty="0">
+                <a:solidFill>
+                  <a:schemeClr val="tx1"/>
+                </a:solidFill>
+              </a:rPr>
               <a:t>F</a:t>
             </a:r>
             <a:r>
@@ -20376,46 +19453,6 @@
                 </a:solidFill>
               </a:rPr>
               <a:t>irst </a:t>
-            </a:r>
-            <a:r>
-              <a:rPr lang="en-US" b="1" dirty="0" smtClean="0">
-                <a:solidFill>
-                  <a:schemeClr val="tx1"/>
-                </a:solidFill>
-              </a:rPr>
-              <a:t>I</a:t>
-            </a:r>
-            <a:r>
-              <a:rPr lang="en-US" dirty="0" smtClean="0">
-                <a:solidFill>
-                  <a:schemeClr val="tx1"/>
-                </a:solidFill>
-              </a:rPr>
-              <a:t>n </a:t>
-            </a:r>
-            <a:r>
-              <a:rPr lang="en-US" b="1" dirty="0" smtClean="0">
-                <a:solidFill>
-                  <a:schemeClr val="tx1"/>
-                </a:solidFill>
-              </a:rPr>
-              <a:t>F</a:t>
-            </a:r>
-            <a:r>
-              <a:rPr lang="en-US" dirty="0" smtClean="0">
-                <a:solidFill>
-                  <a:schemeClr val="tx1"/>
-                </a:solidFill>
-              </a:rPr>
-              <a:t>irst</a:t>
-            </a:r>
-            <a:r>
-              <a:rPr lang="en-US" dirty="0">
-                <a:solidFill>
-                  <a:schemeClr val="tx1"/>
-                </a:solidFill>
-              </a:rPr>
-              <a:t> </a:t>
             </a:r>
             <a:r>
               <a:rPr lang="en-US" b="1" dirty="0">
@@ -20530,13 +19567,6 @@
   <p:clrMapOvr>
     <a:masterClrMapping/>
   </p:clrMapOvr>
-  <p:timing>
-    <p:tnLst>
-      <p:par>
-        <p:cTn id="1" dur="indefinite" restart="never" nodeType="tmRoot"/>
-      </p:par>
-    </p:tnLst>
-  </p:timing>
 </p:sld>
 </file>
 
@@ -20576,13 +19606,8 @@
           <a:p>
             <a:r>
               <a:rPr lang="en-US" sz="3600" dirty="0"/>
-              <a:t>queue implementation using </a:t>
-            </a:r>
-            <a:r>
-              <a:rPr lang="en-US" sz="3600" dirty="0" smtClean="0"/>
-              <a:t>array and linked list</a:t>
-            </a:r>
-            <a:endParaRPr lang="en-US" sz="3600" dirty="0"/>
+              <a:t>queue implementation using array and linked list</a:t>
+            </a:r>
           </a:p>
         </p:txBody>
       </p:sp>
@@ -20819,10 +19844,9 @@
           <a:p>
             <a:pPr algn="ctr"/>
             <a:r>
-              <a:rPr lang="en-US" dirty="0" smtClean="0"/>
+              <a:rPr lang="en-US" dirty="0"/>
               <a:t>Refer Programs here</a:t>
             </a:r>
-            <a:endParaRPr lang="en-US" dirty="0"/>
           </a:p>
         </p:txBody>
       </p:sp>
@@ -20835,7 +19859,7 @@
           <p:nvPr>
             <p:extLst>
               <p:ext uri="{D42A27DB-BD31-4B8C-83A1-F6EECF244321}">
-                <p14:modId xmlns:p14="http://schemas.microsoft.com/office/powerpoint/2010/main" val="4168310644"/>
+                <p14:modId xmlns:p14="http://schemas.microsoft.com/office/powerpoint/2010/main" val="1887942271"/>
               </p:ext>
             </p:extLst>
           </p:nvPr>
@@ -20848,21 +19872,21 @@
           <a:graphicData uri="http://schemas.openxmlformats.org/presentationml/2006/ole">
             <mc:AlternateContent xmlns:mc="http://schemas.openxmlformats.org/markup-compatibility/2006">
               <mc:Choice xmlns:v="urn:schemas-microsoft-com:vml" Requires="v">
-                <p:oleObj spid="_x0000_s8514" name="Packager Shell Object" showAsIcon="1" r:id="rId3" imgW="584348" imgH="526962" progId="Package">
+                <p:oleObj name="Packager Shell Object" showAsIcon="1" r:id="rId2" imgW="584348" imgH="526962" progId="Package">
                   <p:embed/>
                 </p:oleObj>
               </mc:Choice>
               <mc:Fallback>
-                <p:oleObj name="Packager Shell Object" showAsIcon="1" r:id="rId3" imgW="584348" imgH="526962" progId="Package">
+                <p:oleObj name="Packager Shell Object" showAsIcon="1" r:id="rId2" imgW="584348" imgH="526962" progId="Package">
                   <p:embed/>
                   <p:pic>
                     <p:nvPicPr>
-                      <p:cNvPr id="0" name=""/>
+                      <p:cNvPr id="6" name="Object 5"/>
                       <p:cNvPicPr/>
                       <p:nvPr/>
                     </p:nvPicPr>
                     <p:blipFill>
-                      <a:blip r:embed="rId4"/>
+                      <a:blip r:embed="rId3"/>
                       <a:stretch>
                         <a:fillRect/>
                       </a:stretch>
@@ -20892,7 +19916,7 @@
           <p:nvPr>
             <p:extLst>
               <p:ext uri="{D42A27DB-BD31-4B8C-83A1-F6EECF244321}">
-                <p14:modId xmlns:p14="http://schemas.microsoft.com/office/powerpoint/2010/main" val="4152893909"/>
+                <p14:modId xmlns:p14="http://schemas.microsoft.com/office/powerpoint/2010/main" val="229277801"/>
               </p:ext>
             </p:extLst>
           </p:nvPr>
@@ -20905,21 +19929,21 @@
           <a:graphicData uri="http://schemas.openxmlformats.org/presentationml/2006/ole">
             <mc:AlternateContent xmlns:mc="http://schemas.openxmlformats.org/markup-compatibility/2006">
               <mc:Choice xmlns:v="urn:schemas-microsoft-com:vml" Requires="v">
-                <p:oleObj spid="_x0000_s8515" name="Packager Shell Object" showAsIcon="1" r:id="rId5" imgW="552388" imgH="526962" progId="Package">
+                <p:oleObj name="Packager Shell Object" showAsIcon="1" r:id="rId4" imgW="552388" imgH="526962" progId="Package">
                   <p:embed/>
                 </p:oleObj>
               </mc:Choice>
               <mc:Fallback>
-                <p:oleObj name="Packager Shell Object" showAsIcon="1" r:id="rId5" imgW="552388" imgH="526962" progId="Package">
+                <p:oleObj name="Packager Shell Object" showAsIcon="1" r:id="rId4" imgW="552388" imgH="526962" progId="Package">
                   <p:embed/>
                   <p:pic>
                     <p:nvPicPr>
-                      <p:cNvPr id="0" name=""/>
+                      <p:cNvPr id="7" name="Object 6"/>
                       <p:cNvPicPr/>
                       <p:nvPr/>
                     </p:nvPicPr>
                     <p:blipFill>
-                      <a:blip r:embed="rId6"/>
+                      <a:blip r:embed="rId5"/>
                       <a:stretch>
                         <a:fillRect/>
                       </a:stretch>
@@ -20950,13 +19974,6 @@
   <p:clrMapOvr>
     <a:masterClrMapping/>
   </p:clrMapOvr>
-  <p:timing>
-    <p:tnLst>
-      <p:par>
-        <p:cTn id="1" dur="indefinite" restart="never" nodeType="tmRoot"/>
-      </p:par>
-    </p:tnLst>
-  </p:timing>
 </p:sld>
 </file>
 
@@ -20993,10 +20010,9 @@
           <a:lstStyle/>
           <a:p>
             <a:r>
-              <a:rPr lang="en-US" dirty="0" smtClean="0"/>
+              <a:rPr lang="en-US" dirty="0"/>
               <a:t>Applications of Queue</a:t>
             </a:r>
-            <a:endParaRPr lang="en-US" dirty="0"/>
           </a:p>
         </p:txBody>
       </p:sp>
@@ -21033,13 +20049,6 @@
   <p:clrMapOvr>
     <a:masterClrMapping/>
   </p:clrMapOvr>
-  <p:timing>
-    <p:tnLst>
-      <p:par>
-        <p:cTn id="1" dur="indefinite" restart="never" nodeType="tmRoot"/>
-      </p:par>
-    </p:tnLst>
-  </p:timing>
 </p:sld>
 </file>
 
@@ -23977,10 +22986,9 @@
           <a:lstStyle/>
           <a:p>
             <a:r>
-              <a:rPr lang="en-US" dirty="0" smtClean="0"/>
+              <a:rPr lang="en-US" dirty="0"/>
               <a:t>Circular Queue</a:t>
             </a:r>
-            <a:endParaRPr lang="en-US" dirty="0"/>
           </a:p>
         </p:txBody>
       </p:sp>
@@ -24009,31 +23017,7 @@
                 <a:latin typeface="Times New Roman" panose="02020603050405020304" pitchFamily="18" charset="0"/>
                 <a:cs typeface="Times New Roman" panose="02020603050405020304" pitchFamily="18" charset="0"/>
               </a:rPr>
-              <a:t>In circular queue, the elements are physically arranged in sequential manner but </a:t>
-            </a:r>
-            <a:r>
-              <a:rPr lang="en-US" sz="2400" dirty="0" smtClean="0">
-                <a:solidFill>
-                  <a:schemeClr val="bg2">
-                    <a:lumMod val="25000"/>
-                  </a:schemeClr>
-                </a:solidFill>
-                <a:latin typeface="Times New Roman" panose="02020603050405020304" pitchFamily="18" charset="0"/>
-                <a:cs typeface="Times New Roman" panose="02020603050405020304" pitchFamily="18" charset="0"/>
-              </a:rPr>
-              <a:t>logically they </a:t>
-            </a:r>
-            <a:r>
-              <a:rPr lang="en-US" sz="2400" dirty="0">
-                <a:solidFill>
-                  <a:schemeClr val="bg2">
-                    <a:lumMod val="25000"/>
-                  </a:schemeClr>
-                </a:solidFill>
-                <a:latin typeface="Times New Roman" panose="02020603050405020304" pitchFamily="18" charset="0"/>
-                <a:cs typeface="Times New Roman" panose="02020603050405020304" pitchFamily="18" charset="0"/>
-              </a:rPr>
-              <a:t>are treated as they are circularly arranged.</a:t>
+              <a:t>In circular queue, the elements are physically arranged in sequential manner but logically they are treated as they are circularly arranged.</a:t>
             </a:r>
           </a:p>
           <a:p>
@@ -24188,13 +23172,6 @@
   <p:clrMapOvr>
     <a:masterClrMapping/>
   </p:clrMapOvr>
-  <p:timing>
-    <p:tnLst>
-      <p:par>
-        <p:cTn id="1" dur="indefinite" restart="never" nodeType="tmRoot"/>
-      </p:par>
-    </p:tnLst>
-  </p:timing>
 </p:sld>
 </file>
 
